--- a/DocumentsAndReports/EMS Exposure Forecasting App Deck.pptx
+++ b/DocumentsAndReports/EMS Exposure Forecasting App Deck.pptx
@@ -5,15 +5,16 @@
     <p:sldMasterId id="2147483686" r:id="rId1"/>
   </p:sldMasterIdLst>
   <p:notesMasterIdLst>
-    <p:notesMasterId r:id="rId8"/>
+    <p:notesMasterId r:id="rId9"/>
   </p:notesMasterIdLst>
   <p:sldIdLst>
     <p:sldId id="256" r:id="rId2"/>
     <p:sldId id="257" r:id="rId3"/>
-    <p:sldId id="258" r:id="rId4"/>
-    <p:sldId id="259" r:id="rId5"/>
-    <p:sldId id="260" r:id="rId6"/>
-    <p:sldId id="261" r:id="rId7"/>
+    <p:sldId id="262" r:id="rId4"/>
+    <p:sldId id="264" r:id="rId5"/>
+    <p:sldId id="266" r:id="rId6"/>
+    <p:sldId id="263" r:id="rId7"/>
+    <p:sldId id="265" r:id="rId8"/>
   </p:sldIdLst>
   <p:sldSz cx="12192000" cy="6858000"/>
   <p:notesSz cx="6858000" cy="9144000"/>
@@ -112,7 +113,702 @@
       </a:defRPr>
     </a:lvl9pPr>
   </p:defaultTextStyle>
+  <p:extLst>
+    <p:ext uri="{EFAFB233-063F-42B5-8137-9DF3F51BA10A}">
+      <p15:sldGuideLst xmlns:p15="http://schemas.microsoft.com/office/powerpoint/2012/main"/>
+    </p:ext>
+  </p:extLst>
 </p:presentation>
+</file>
+
+<file path=ppt/revisionInfo.xml><?xml version="1.0" encoding="utf-8"?>
+<p1510:revInfo xmlns:a="http://schemas.openxmlformats.org/drawingml/2006/main" xmlns:r="http://schemas.openxmlformats.org/officeDocument/2006/relationships" xmlns:p1510="http://schemas.microsoft.com/office/powerpoint/2015/10/main">
+  <p1510:revLst>
+    <p1510:client id="{A6486759-D710-494D-AE17-7473E4C9E5AB}" v="44" dt="2026-04-09T04:59:34.435"/>
+  </p1510:revLst>
+</p1510:revInfo>
+</file>
+
+<file path=ppt/changesInfos/changesInfo1.xml><?xml version="1.0" encoding="utf-8"?>
+<pc:chgInfo xmlns:a="http://schemas.openxmlformats.org/drawingml/2006/main" xmlns:r="http://schemas.openxmlformats.org/officeDocument/2006/relationships" xmlns:ac="http://schemas.microsoft.com/office/drawing/2013/main/command" xmlns:pc="http://schemas.microsoft.com/office/powerpoint/2013/main/command">
+  <pc:docChgLst>
+    <pc:chgData name="Adriatico, Dundee B." userId="a207e8a9-124e-439f-89fd-9ad351d7d04c" providerId="ADAL" clId="{1782D908-4124-408E-8E70-BD4D334214AB}"/>
+    <pc:docChg chg="undo custSel addSld delSld modSld">
+      <pc:chgData name="Adriatico, Dundee B." userId="a207e8a9-124e-439f-89fd-9ad351d7d04c" providerId="ADAL" clId="{1782D908-4124-408E-8E70-BD4D334214AB}" dt="2026-04-09T05:01:21.889" v="443" actId="14100"/>
+      <pc:docMkLst>
+        <pc:docMk/>
+      </pc:docMkLst>
+      <pc:sldChg chg="addSp modSp mod">
+        <pc:chgData name="Adriatico, Dundee B." userId="a207e8a9-124e-439f-89fd-9ad351d7d04c" providerId="ADAL" clId="{1782D908-4124-408E-8E70-BD4D334214AB}" dt="2026-04-09T04:41:51.262" v="54" actId="20577"/>
+        <pc:sldMkLst>
+          <pc:docMk/>
+          <pc:sldMk cId="3285079806" sldId="256"/>
+        </pc:sldMkLst>
+        <pc:spChg chg="mod">
+          <ac:chgData name="Adriatico, Dundee B." userId="a207e8a9-124e-439f-89fd-9ad351d7d04c" providerId="ADAL" clId="{1782D908-4124-408E-8E70-BD4D334214AB}" dt="2026-04-09T04:39:28.196" v="15" actId="14100"/>
+          <ac:spMkLst>
+            <pc:docMk/>
+            <pc:sldMk cId="3285079806" sldId="256"/>
+            <ac:spMk id="2" creationId="{5F17EA4F-FF17-0CFB-F346-BBBA1576368A}"/>
+          </ac:spMkLst>
+        </pc:spChg>
+        <pc:spChg chg="mod">
+          <ac:chgData name="Adriatico, Dundee B." userId="a207e8a9-124e-439f-89fd-9ad351d7d04c" providerId="ADAL" clId="{1782D908-4124-408E-8E70-BD4D334214AB}" dt="2026-04-09T04:39:09.801" v="1" actId="27636"/>
+          <ac:spMkLst>
+            <pc:docMk/>
+            <pc:sldMk cId="3285079806" sldId="256"/>
+            <ac:spMk id="3" creationId="{C0B484DB-E654-2418-513C-465F545D7FDE}"/>
+          </ac:spMkLst>
+        </pc:spChg>
+        <pc:spChg chg="mod">
+          <ac:chgData name="Adriatico, Dundee B." userId="a207e8a9-124e-439f-89fd-9ad351d7d04c" providerId="ADAL" clId="{1782D908-4124-408E-8E70-BD4D334214AB}" dt="2026-04-09T04:41:51.262" v="54" actId="20577"/>
+          <ac:spMkLst>
+            <pc:docMk/>
+            <pc:sldMk cId="3285079806" sldId="256"/>
+            <ac:spMk id="5" creationId="{9775AAB8-A6AD-203A-ADFE-8A92EF80B0B1}"/>
+          </ac:spMkLst>
+        </pc:spChg>
+        <pc:picChg chg="add mod modCrop">
+          <ac:chgData name="Adriatico, Dundee B." userId="a207e8a9-124e-439f-89fd-9ad351d7d04c" providerId="ADAL" clId="{1782D908-4124-408E-8E70-BD4D334214AB}" dt="2026-04-09T04:40:51.217" v="25" actId="1076"/>
+          <ac:picMkLst>
+            <pc:docMk/>
+            <pc:sldMk cId="3285079806" sldId="256"/>
+            <ac:picMk id="6" creationId="{4EC30190-79DC-BE2B-9506-F178505414E9}"/>
+          </ac:picMkLst>
+        </pc:picChg>
+      </pc:sldChg>
+      <pc:sldChg chg="addSp delSp modSp mod">
+        <pc:chgData name="Adriatico, Dundee B." userId="a207e8a9-124e-439f-89fd-9ad351d7d04c" providerId="ADAL" clId="{1782D908-4124-408E-8E70-BD4D334214AB}" dt="2026-04-09T04:48:05.736" v="177" actId="14100"/>
+        <pc:sldMkLst>
+          <pc:docMk/>
+          <pc:sldMk cId="669878328" sldId="257"/>
+        </pc:sldMkLst>
+        <pc:spChg chg="add mod">
+          <ac:chgData name="Adriatico, Dundee B." userId="a207e8a9-124e-439f-89fd-9ad351d7d04c" providerId="ADAL" clId="{1782D908-4124-408E-8E70-BD4D334214AB}" dt="2026-04-09T04:46:31.800" v="151" actId="1076"/>
+          <ac:spMkLst>
+            <pc:docMk/>
+            <pc:sldMk cId="669878328" sldId="257"/>
+            <ac:spMk id="3" creationId="{852A536A-D1DC-55A7-A3DD-02FF4F5EFB12}"/>
+          </ac:spMkLst>
+        </pc:spChg>
+        <pc:spChg chg="add mod">
+          <ac:chgData name="Adriatico, Dundee B." userId="a207e8a9-124e-439f-89fd-9ad351d7d04c" providerId="ADAL" clId="{1782D908-4124-408E-8E70-BD4D334214AB}" dt="2026-04-09T04:45:43.936" v="132" actId="14100"/>
+          <ac:spMkLst>
+            <pc:docMk/>
+            <pc:sldMk cId="669878328" sldId="257"/>
+            <ac:spMk id="4" creationId="{9E915874-F740-AA7C-007F-5116B7000BFF}"/>
+          </ac:spMkLst>
+        </pc:spChg>
+        <pc:spChg chg="del mod">
+          <ac:chgData name="Adriatico, Dundee B." userId="a207e8a9-124e-439f-89fd-9ad351d7d04c" providerId="ADAL" clId="{1782D908-4124-408E-8E70-BD4D334214AB}" dt="2026-04-09T04:44:45.294" v="75" actId="478"/>
+          <ac:spMkLst>
+            <pc:docMk/>
+            <pc:sldMk cId="669878328" sldId="257"/>
+            <ac:spMk id="5" creationId="{F7E29AD5-28FB-3915-2349-E6CB41CD35F9}"/>
+          </ac:spMkLst>
+        </pc:spChg>
+        <pc:spChg chg="add mod">
+          <ac:chgData name="Adriatico, Dundee B." userId="a207e8a9-124e-439f-89fd-9ad351d7d04c" providerId="ADAL" clId="{1782D908-4124-408E-8E70-BD4D334214AB}" dt="2026-04-09T04:46:26.305" v="150" actId="1076"/>
+          <ac:spMkLst>
+            <pc:docMk/>
+            <pc:sldMk cId="669878328" sldId="257"/>
+            <ac:spMk id="6" creationId="{159486EE-7E9D-2A8E-7986-6B268FFE60A0}"/>
+          </ac:spMkLst>
+        </pc:spChg>
+        <pc:spChg chg="del">
+          <ac:chgData name="Adriatico, Dundee B." userId="a207e8a9-124e-439f-89fd-9ad351d7d04c" providerId="ADAL" clId="{1782D908-4124-408E-8E70-BD4D334214AB}" dt="2026-04-09T04:44:12.703" v="66" actId="478"/>
+          <ac:spMkLst>
+            <pc:docMk/>
+            <pc:sldMk cId="669878328" sldId="257"/>
+            <ac:spMk id="7" creationId="{FA049445-9B38-6B3F-7D30-CD079A3EBF9C}"/>
+          </ac:spMkLst>
+        </pc:spChg>
+        <pc:spChg chg="del">
+          <ac:chgData name="Adriatico, Dundee B." userId="a207e8a9-124e-439f-89fd-9ad351d7d04c" providerId="ADAL" clId="{1782D908-4124-408E-8E70-BD4D334214AB}" dt="2026-04-09T04:44:15.087" v="67" actId="478"/>
+          <ac:spMkLst>
+            <pc:docMk/>
+            <pc:sldMk cId="669878328" sldId="257"/>
+            <ac:spMk id="9" creationId="{FAA84101-8C6A-D463-B489-81D41CE1801A}"/>
+          </ac:spMkLst>
+        </pc:spChg>
+        <pc:spChg chg="add mod">
+          <ac:chgData name="Adriatico, Dundee B." userId="a207e8a9-124e-439f-89fd-9ad351d7d04c" providerId="ADAL" clId="{1782D908-4124-408E-8E70-BD4D334214AB}" dt="2026-04-09T04:47:56.853" v="174" actId="1076"/>
+          <ac:spMkLst>
+            <pc:docMk/>
+            <pc:sldMk cId="669878328" sldId="257"/>
+            <ac:spMk id="10" creationId="{44AB5694-B3E2-4AFC-9E7E-20432D88CE31}"/>
+          </ac:spMkLst>
+        </pc:spChg>
+        <pc:spChg chg="mod">
+          <ac:chgData name="Adriatico, Dundee B." userId="a207e8a9-124e-439f-89fd-9ad351d7d04c" providerId="ADAL" clId="{1782D908-4124-408E-8E70-BD4D334214AB}" dt="2026-04-09T04:43:01.555" v="62" actId="14100"/>
+          <ac:spMkLst>
+            <pc:docMk/>
+            <pc:sldMk cId="669878328" sldId="257"/>
+            <ac:spMk id="11" creationId="{969D45E8-05D3-E4FF-B98D-9388F7C066C2}"/>
+          </ac:spMkLst>
+        </pc:spChg>
+        <pc:spChg chg="mod">
+          <ac:chgData name="Adriatico, Dundee B." userId="a207e8a9-124e-439f-89fd-9ad351d7d04c" providerId="ADAL" clId="{1782D908-4124-408E-8E70-BD4D334214AB}" dt="2026-04-09T04:42:50.140" v="60" actId="255"/>
+          <ac:spMkLst>
+            <pc:docMk/>
+            <pc:sldMk cId="669878328" sldId="257"/>
+            <ac:spMk id="12" creationId="{6182BDB8-597D-5D45-703F-AD5110BB9868}"/>
+          </ac:spMkLst>
+        </pc:spChg>
+        <pc:spChg chg="mod">
+          <ac:chgData name="Adriatico, Dundee B." userId="a207e8a9-124e-439f-89fd-9ad351d7d04c" providerId="ADAL" clId="{1782D908-4124-408E-8E70-BD4D334214AB}" dt="2026-04-09T04:45:20.227" v="86" actId="14100"/>
+          <ac:spMkLst>
+            <pc:docMk/>
+            <pc:sldMk cId="669878328" sldId="257"/>
+            <ac:spMk id="13" creationId="{E9004102-C07C-29EB-EBFB-788CB2783016}"/>
+          </ac:spMkLst>
+        </pc:spChg>
+        <pc:spChg chg="del">
+          <ac:chgData name="Adriatico, Dundee B." userId="a207e8a9-124e-439f-89fd-9ad351d7d04c" providerId="ADAL" clId="{1782D908-4124-408E-8E70-BD4D334214AB}" dt="2026-04-09T04:44:12.703" v="66" actId="478"/>
+          <ac:spMkLst>
+            <pc:docMk/>
+            <pc:sldMk cId="669878328" sldId="257"/>
+            <ac:spMk id="14" creationId="{DDCB63EB-E43B-7FB6-15F4-1FB0622BE04C}"/>
+          </ac:spMkLst>
+        </pc:spChg>
+        <pc:spChg chg="del">
+          <ac:chgData name="Adriatico, Dundee B." userId="a207e8a9-124e-439f-89fd-9ad351d7d04c" providerId="ADAL" clId="{1782D908-4124-408E-8E70-BD4D334214AB}" dt="2026-04-09T04:44:15.087" v="67" actId="478"/>
+          <ac:spMkLst>
+            <pc:docMk/>
+            <pc:sldMk cId="669878328" sldId="257"/>
+            <ac:spMk id="15" creationId="{8E9F704A-BDE5-F4B6-6FA1-02D1DC6F94E6}"/>
+          </ac:spMkLst>
+        </pc:spChg>
+        <pc:spChg chg="del">
+          <ac:chgData name="Adriatico, Dundee B." userId="a207e8a9-124e-439f-89fd-9ad351d7d04c" providerId="ADAL" clId="{1782D908-4124-408E-8E70-BD4D334214AB}" dt="2026-04-09T04:44:25.987" v="68" actId="478"/>
+          <ac:spMkLst>
+            <pc:docMk/>
+            <pc:sldMk cId="669878328" sldId="257"/>
+            <ac:spMk id="16" creationId="{B4676FAA-11D2-E323-6F89-9FBAC0EB94BE}"/>
+          </ac:spMkLst>
+        </pc:spChg>
+        <pc:spChg chg="del">
+          <ac:chgData name="Adriatico, Dundee B." userId="a207e8a9-124e-439f-89fd-9ad351d7d04c" providerId="ADAL" clId="{1782D908-4124-408E-8E70-BD4D334214AB}" dt="2026-04-09T04:44:25.987" v="68" actId="478"/>
+          <ac:spMkLst>
+            <pc:docMk/>
+            <pc:sldMk cId="669878328" sldId="257"/>
+            <ac:spMk id="17" creationId="{2A783A0F-A367-F2F3-586D-60F0D5798530}"/>
+          </ac:spMkLst>
+        </pc:spChg>
+        <pc:spChg chg="del">
+          <ac:chgData name="Adriatico, Dundee B." userId="a207e8a9-124e-439f-89fd-9ad351d7d04c" providerId="ADAL" clId="{1782D908-4124-408E-8E70-BD4D334214AB}" dt="2026-04-09T04:44:25.987" v="68" actId="478"/>
+          <ac:spMkLst>
+            <pc:docMk/>
+            <pc:sldMk cId="669878328" sldId="257"/>
+            <ac:spMk id="18" creationId="{533992E1-18DE-6DF5-6FE4-F4A1DAD2D636}"/>
+          </ac:spMkLst>
+        </pc:spChg>
+        <pc:spChg chg="del">
+          <ac:chgData name="Adriatico, Dundee B." userId="a207e8a9-124e-439f-89fd-9ad351d7d04c" providerId="ADAL" clId="{1782D908-4124-408E-8E70-BD4D334214AB}" dt="2026-04-09T04:44:25.987" v="68" actId="478"/>
+          <ac:spMkLst>
+            <pc:docMk/>
+            <pc:sldMk cId="669878328" sldId="257"/>
+            <ac:spMk id="19" creationId="{8ED05553-6A12-6CD5-AFC1-4848E1B107B7}"/>
+          </ac:spMkLst>
+        </pc:spChg>
+        <pc:spChg chg="del">
+          <ac:chgData name="Adriatico, Dundee B." userId="a207e8a9-124e-439f-89fd-9ad351d7d04c" providerId="ADAL" clId="{1782D908-4124-408E-8E70-BD4D334214AB}" dt="2026-04-09T04:44:25.987" v="68" actId="478"/>
+          <ac:spMkLst>
+            <pc:docMk/>
+            <pc:sldMk cId="669878328" sldId="257"/>
+            <ac:spMk id="20" creationId="{2AE7BD19-A995-5F68-D6C8-C45F97B41860}"/>
+          </ac:spMkLst>
+        </pc:spChg>
+        <pc:spChg chg="del">
+          <ac:chgData name="Adriatico, Dundee B." userId="a207e8a9-124e-439f-89fd-9ad351d7d04c" providerId="ADAL" clId="{1782D908-4124-408E-8E70-BD4D334214AB}" dt="2026-04-09T04:44:25.987" v="68" actId="478"/>
+          <ac:spMkLst>
+            <pc:docMk/>
+            <pc:sldMk cId="669878328" sldId="257"/>
+            <ac:spMk id="21" creationId="{CC820CC5-6FD3-B466-9677-6A4975F0B93F}"/>
+          </ac:spMkLst>
+        </pc:spChg>
+        <pc:spChg chg="del">
+          <ac:chgData name="Adriatico, Dundee B." userId="a207e8a9-124e-439f-89fd-9ad351d7d04c" providerId="ADAL" clId="{1782D908-4124-408E-8E70-BD4D334214AB}" dt="2026-04-09T04:44:25.987" v="68" actId="478"/>
+          <ac:spMkLst>
+            <pc:docMk/>
+            <pc:sldMk cId="669878328" sldId="257"/>
+            <ac:spMk id="22" creationId="{39F767B3-33E4-5262-961E-E941A00B52F4}"/>
+          </ac:spMkLst>
+        </pc:spChg>
+        <pc:spChg chg="add mod">
+          <ac:chgData name="Adriatico, Dundee B." userId="a207e8a9-124e-439f-89fd-9ad351d7d04c" providerId="ADAL" clId="{1782D908-4124-408E-8E70-BD4D334214AB}" dt="2026-04-09T04:47:28.703" v="168" actId="14100"/>
+          <ac:spMkLst>
+            <pc:docMk/>
+            <pc:sldMk cId="669878328" sldId="257"/>
+            <ac:spMk id="24" creationId="{A879127E-6820-AC0F-C2E9-F229B3DEEF93}"/>
+          </ac:spMkLst>
+        </pc:spChg>
+        <pc:spChg chg="add mod">
+          <ac:chgData name="Adriatico, Dundee B." userId="a207e8a9-124e-439f-89fd-9ad351d7d04c" providerId="ADAL" clId="{1782D908-4124-408E-8E70-BD4D334214AB}" dt="2026-04-09T04:48:01.053" v="175" actId="1076"/>
+          <ac:spMkLst>
+            <pc:docMk/>
+            <pc:sldMk cId="669878328" sldId="257"/>
+            <ac:spMk id="26" creationId="{40FDD8CE-A86E-1B49-B510-ACC6EA03473F}"/>
+          </ac:spMkLst>
+        </pc:spChg>
+        <pc:spChg chg="add mod">
+          <ac:chgData name="Adriatico, Dundee B." userId="a207e8a9-124e-439f-89fd-9ad351d7d04c" providerId="ADAL" clId="{1782D908-4124-408E-8E70-BD4D334214AB}" dt="2026-04-09T04:48:05.736" v="177" actId="14100"/>
+          <ac:spMkLst>
+            <pc:docMk/>
+            <pc:sldMk cId="669878328" sldId="257"/>
+            <ac:spMk id="28" creationId="{56892853-FE97-3A18-1839-11592F01144A}"/>
+          </ac:spMkLst>
+        </pc:spChg>
+      </pc:sldChg>
+      <pc:sldChg chg="add del">
+        <pc:chgData name="Adriatico, Dundee B." userId="a207e8a9-124e-439f-89fd-9ad351d7d04c" providerId="ADAL" clId="{1782D908-4124-408E-8E70-BD4D334214AB}" dt="2026-04-09T04:52:04.037" v="238" actId="47"/>
+        <pc:sldMkLst>
+          <pc:docMk/>
+          <pc:sldMk cId="3687530064" sldId="258"/>
+        </pc:sldMkLst>
+      </pc:sldChg>
+      <pc:sldChg chg="add del">
+        <pc:chgData name="Adriatico, Dundee B." userId="a207e8a9-124e-439f-89fd-9ad351d7d04c" providerId="ADAL" clId="{1782D908-4124-408E-8E70-BD4D334214AB}" dt="2026-04-09T04:52:04.037" v="238" actId="47"/>
+        <pc:sldMkLst>
+          <pc:docMk/>
+          <pc:sldMk cId="0" sldId="259"/>
+        </pc:sldMkLst>
+      </pc:sldChg>
+      <pc:sldChg chg="add del">
+        <pc:chgData name="Adriatico, Dundee B." userId="a207e8a9-124e-439f-89fd-9ad351d7d04c" providerId="ADAL" clId="{1782D908-4124-408E-8E70-BD4D334214AB}" dt="2026-04-09T04:52:04.037" v="238" actId="47"/>
+        <pc:sldMkLst>
+          <pc:docMk/>
+          <pc:sldMk cId="0" sldId="260"/>
+        </pc:sldMkLst>
+      </pc:sldChg>
+      <pc:sldChg chg="add del">
+        <pc:chgData name="Adriatico, Dundee B." userId="a207e8a9-124e-439f-89fd-9ad351d7d04c" providerId="ADAL" clId="{1782D908-4124-408E-8E70-BD4D334214AB}" dt="2026-04-09T04:52:04.037" v="238" actId="47"/>
+        <pc:sldMkLst>
+          <pc:docMk/>
+          <pc:sldMk cId="0" sldId="261"/>
+        </pc:sldMkLst>
+      </pc:sldChg>
+      <pc:sldChg chg="addSp delSp modSp add del mod">
+        <pc:chgData name="Adriatico, Dundee B." userId="a207e8a9-124e-439f-89fd-9ad351d7d04c" providerId="ADAL" clId="{1782D908-4124-408E-8E70-BD4D334214AB}" dt="2026-04-09T04:51:49.036" v="237" actId="47"/>
+        <pc:sldMkLst>
+          <pc:docMk/>
+          <pc:sldMk cId="1595840749" sldId="262"/>
+        </pc:sldMkLst>
+        <pc:spChg chg="mod">
+          <ac:chgData name="Adriatico, Dundee B." userId="a207e8a9-124e-439f-89fd-9ad351d7d04c" providerId="ADAL" clId="{1782D908-4124-408E-8E70-BD4D334214AB}" dt="2026-04-09T04:49:07.934" v="211"/>
+          <ac:spMkLst>
+            <pc:docMk/>
+            <pc:sldMk cId="1595840749" sldId="262"/>
+            <ac:spMk id="3" creationId="{C62D3D4C-68BD-EC24-24D5-9B49DD5362E3}"/>
+          </ac:spMkLst>
+        </pc:spChg>
+        <pc:spChg chg="mod">
+          <ac:chgData name="Adriatico, Dundee B." userId="a207e8a9-124e-439f-89fd-9ad351d7d04c" providerId="ADAL" clId="{1782D908-4124-408E-8E70-BD4D334214AB}" dt="2026-04-09T04:49:16.167" v="212"/>
+          <ac:spMkLst>
+            <pc:docMk/>
+            <pc:sldMk cId="1595840749" sldId="262"/>
+            <ac:spMk id="4" creationId="{C1BBBD4A-5879-66C4-170F-318DE9114A1E}"/>
+          </ac:spMkLst>
+        </pc:spChg>
+        <pc:spChg chg="add mod">
+          <ac:chgData name="Adriatico, Dundee B." userId="a207e8a9-124e-439f-89fd-9ad351d7d04c" providerId="ADAL" clId="{1782D908-4124-408E-8E70-BD4D334214AB}" dt="2026-04-09T04:50:59.379" v="230" actId="255"/>
+          <ac:spMkLst>
+            <pc:docMk/>
+            <pc:sldMk cId="1595840749" sldId="262"/>
+            <ac:spMk id="5" creationId="{ECB542FC-1A30-89E8-F95E-640B8A1AB5D9}"/>
+          </ac:spMkLst>
+        </pc:spChg>
+        <pc:spChg chg="mod">
+          <ac:chgData name="Adriatico, Dundee B." userId="a207e8a9-124e-439f-89fd-9ad351d7d04c" providerId="ADAL" clId="{1782D908-4124-408E-8E70-BD4D334214AB}" dt="2026-04-09T04:49:53.643" v="213"/>
+          <ac:spMkLst>
+            <pc:docMk/>
+            <pc:sldMk cId="1595840749" sldId="262"/>
+            <ac:spMk id="6" creationId="{0E37DDBB-E0C8-DBBE-856F-A04317A2C232}"/>
+          </ac:spMkLst>
+        </pc:spChg>
+        <pc:spChg chg="add mod">
+          <ac:chgData name="Adriatico, Dundee B." userId="a207e8a9-124e-439f-89fd-9ad351d7d04c" providerId="ADAL" clId="{1782D908-4124-408E-8E70-BD4D334214AB}" dt="2026-04-09T04:50:54.901" v="229" actId="255"/>
+          <ac:spMkLst>
+            <pc:docMk/>
+            <pc:sldMk cId="1595840749" sldId="262"/>
+            <ac:spMk id="8" creationId="{CDEC73D8-3F8B-720D-2EC4-94B20DEECCDA}"/>
+          </ac:spMkLst>
+        </pc:spChg>
+        <pc:spChg chg="del">
+          <ac:chgData name="Adriatico, Dundee B." userId="a207e8a9-124e-439f-89fd-9ad351d7d04c" providerId="ADAL" clId="{1782D908-4124-408E-8E70-BD4D334214AB}" dt="2026-04-09T04:50:18.110" v="217" actId="478"/>
+          <ac:spMkLst>
+            <pc:docMk/>
+            <pc:sldMk cId="1595840749" sldId="262"/>
+            <ac:spMk id="10" creationId="{419D63B9-0965-7AF0-FEB1-555974F0853C}"/>
+          </ac:spMkLst>
+        </pc:spChg>
+        <pc:spChg chg="mod">
+          <ac:chgData name="Adriatico, Dundee B." userId="a207e8a9-124e-439f-89fd-9ad351d7d04c" providerId="ADAL" clId="{1782D908-4124-408E-8E70-BD4D334214AB}" dt="2026-04-09T04:48:53.482" v="208" actId="20577"/>
+          <ac:spMkLst>
+            <pc:docMk/>
+            <pc:sldMk cId="1595840749" sldId="262"/>
+            <ac:spMk id="11" creationId="{EF5F76A6-9F21-EE84-C65D-BDC14BF06838}"/>
+          </ac:spMkLst>
+        </pc:spChg>
+        <pc:spChg chg="mod">
+          <ac:chgData name="Adriatico, Dundee B." userId="a207e8a9-124e-439f-89fd-9ad351d7d04c" providerId="ADAL" clId="{1782D908-4124-408E-8E70-BD4D334214AB}" dt="2026-04-09T04:48:36.977" v="185" actId="20577"/>
+          <ac:spMkLst>
+            <pc:docMk/>
+            <pc:sldMk cId="1595840749" sldId="262"/>
+            <ac:spMk id="12" creationId="{68F9AC32-B1D3-40FA-D91A-9AF0D7A69258}"/>
+          </ac:spMkLst>
+        </pc:spChg>
+        <pc:spChg chg="mod">
+          <ac:chgData name="Adriatico, Dundee B." userId="a207e8a9-124e-439f-89fd-9ad351d7d04c" providerId="ADAL" clId="{1782D908-4124-408E-8E70-BD4D334214AB}" dt="2026-04-09T04:50:03.694" v="214"/>
+          <ac:spMkLst>
+            <pc:docMk/>
+            <pc:sldMk cId="1595840749" sldId="262"/>
+            <ac:spMk id="13" creationId="{6AC6CBD0-0EA6-0C62-78B8-78807C6644CA}"/>
+          </ac:spMkLst>
+        </pc:spChg>
+        <pc:spChg chg="add mod">
+          <ac:chgData name="Adriatico, Dundee B." userId="a207e8a9-124e-439f-89fd-9ad351d7d04c" providerId="ADAL" clId="{1782D908-4124-408E-8E70-BD4D334214AB}" dt="2026-04-09T04:51:24.400" v="235" actId="1076"/>
+          <ac:spMkLst>
+            <pc:docMk/>
+            <pc:sldMk cId="1595840749" sldId="262"/>
+            <ac:spMk id="14" creationId="{A0B18CF5-4C0F-4562-D703-1D0FEFF42360}"/>
+          </ac:spMkLst>
+        </pc:spChg>
+        <pc:spChg chg="del">
+          <ac:chgData name="Adriatico, Dundee B." userId="a207e8a9-124e-439f-89fd-9ad351d7d04c" providerId="ADAL" clId="{1782D908-4124-408E-8E70-BD4D334214AB}" dt="2026-04-09T04:50:18.110" v="217" actId="478"/>
+          <ac:spMkLst>
+            <pc:docMk/>
+            <pc:sldMk cId="1595840749" sldId="262"/>
+            <ac:spMk id="24" creationId="{C4FE5805-361E-82C7-136A-10F96A9B44B1}"/>
+          </ac:spMkLst>
+        </pc:spChg>
+        <pc:spChg chg="del">
+          <ac:chgData name="Adriatico, Dundee B." userId="a207e8a9-124e-439f-89fd-9ad351d7d04c" providerId="ADAL" clId="{1782D908-4124-408E-8E70-BD4D334214AB}" dt="2026-04-09T04:50:18.110" v="217" actId="478"/>
+          <ac:spMkLst>
+            <pc:docMk/>
+            <pc:sldMk cId="1595840749" sldId="262"/>
+            <ac:spMk id="26" creationId="{DA8FE6CD-1F54-35C7-17D3-D4232E59B02E}"/>
+          </ac:spMkLst>
+        </pc:spChg>
+        <pc:spChg chg="del">
+          <ac:chgData name="Adriatico, Dundee B." userId="a207e8a9-124e-439f-89fd-9ad351d7d04c" providerId="ADAL" clId="{1782D908-4124-408E-8E70-BD4D334214AB}" dt="2026-04-09T04:50:18.110" v="217" actId="478"/>
+          <ac:spMkLst>
+            <pc:docMk/>
+            <pc:sldMk cId="1595840749" sldId="262"/>
+            <ac:spMk id="28" creationId="{DEEEC350-D3FC-A057-FDC8-09C76C59F677}"/>
+          </ac:spMkLst>
+        </pc:spChg>
+      </pc:sldChg>
+      <pc:sldChg chg="delSp modSp add mod">
+        <pc:chgData name="Adriatico, Dundee B." userId="a207e8a9-124e-439f-89fd-9ad351d7d04c" providerId="ADAL" clId="{1782D908-4124-408E-8E70-BD4D334214AB}" dt="2026-04-09T04:53:03.208" v="245" actId="478"/>
+        <pc:sldMkLst>
+          <pc:docMk/>
+          <pc:sldMk cId="799882113" sldId="263"/>
+        </pc:sldMkLst>
+        <pc:spChg chg="del">
+          <ac:chgData name="Adriatico, Dundee B." userId="a207e8a9-124e-439f-89fd-9ad351d7d04c" providerId="ADAL" clId="{1782D908-4124-408E-8E70-BD4D334214AB}" dt="2026-04-09T04:53:03.208" v="245" actId="478"/>
+          <ac:spMkLst>
+            <pc:docMk/>
+            <pc:sldMk cId="799882113" sldId="263"/>
+            <ac:spMk id="3" creationId="{F54B0083-2904-5C2C-C25B-997EE9204A5F}"/>
+          </ac:spMkLst>
+        </pc:spChg>
+        <pc:spChg chg="del">
+          <ac:chgData name="Adriatico, Dundee B." userId="a207e8a9-124e-439f-89fd-9ad351d7d04c" providerId="ADAL" clId="{1782D908-4124-408E-8E70-BD4D334214AB}" dt="2026-04-09T04:53:03.208" v="245" actId="478"/>
+          <ac:spMkLst>
+            <pc:docMk/>
+            <pc:sldMk cId="799882113" sldId="263"/>
+            <ac:spMk id="4" creationId="{1E439590-D4AD-E0C7-65E3-FCC0761D76B4}"/>
+          </ac:spMkLst>
+        </pc:spChg>
+        <pc:spChg chg="del">
+          <ac:chgData name="Adriatico, Dundee B." userId="a207e8a9-124e-439f-89fd-9ad351d7d04c" providerId="ADAL" clId="{1782D908-4124-408E-8E70-BD4D334214AB}" dt="2026-04-09T04:53:03.208" v="245" actId="478"/>
+          <ac:spMkLst>
+            <pc:docMk/>
+            <pc:sldMk cId="799882113" sldId="263"/>
+            <ac:spMk id="5" creationId="{E93E7BCD-831B-7878-EE8E-4105CA7E9B8B}"/>
+          </ac:spMkLst>
+        </pc:spChg>
+        <pc:spChg chg="del">
+          <ac:chgData name="Adriatico, Dundee B." userId="a207e8a9-124e-439f-89fd-9ad351d7d04c" providerId="ADAL" clId="{1782D908-4124-408E-8E70-BD4D334214AB}" dt="2026-04-09T04:53:03.208" v="245" actId="478"/>
+          <ac:spMkLst>
+            <pc:docMk/>
+            <pc:sldMk cId="799882113" sldId="263"/>
+            <ac:spMk id="6" creationId="{481B5D76-D944-B454-AC8B-017A31F91A70}"/>
+          </ac:spMkLst>
+        </pc:spChg>
+        <pc:spChg chg="del">
+          <ac:chgData name="Adriatico, Dundee B." userId="a207e8a9-124e-439f-89fd-9ad351d7d04c" providerId="ADAL" clId="{1782D908-4124-408E-8E70-BD4D334214AB}" dt="2026-04-09T04:53:03.208" v="245" actId="478"/>
+          <ac:spMkLst>
+            <pc:docMk/>
+            <pc:sldMk cId="799882113" sldId="263"/>
+            <ac:spMk id="8" creationId="{1248D0D5-D019-8DE1-696D-A98507DF9518}"/>
+          </ac:spMkLst>
+        </pc:spChg>
+        <pc:spChg chg="mod">
+          <ac:chgData name="Adriatico, Dundee B." userId="a207e8a9-124e-439f-89fd-9ad351d7d04c" providerId="ADAL" clId="{1782D908-4124-408E-8E70-BD4D334214AB}" dt="2026-04-09T04:53:00.897" v="244" actId="20577"/>
+          <ac:spMkLst>
+            <pc:docMk/>
+            <pc:sldMk cId="799882113" sldId="263"/>
+            <ac:spMk id="11" creationId="{C896AA13-14A1-85D7-6F12-6999B99511FF}"/>
+          </ac:spMkLst>
+        </pc:spChg>
+        <pc:spChg chg="mod">
+          <ac:chgData name="Adriatico, Dundee B." userId="a207e8a9-124e-439f-89fd-9ad351d7d04c" providerId="ADAL" clId="{1782D908-4124-408E-8E70-BD4D334214AB}" dt="2026-04-09T04:52:53.492" v="243" actId="20577"/>
+          <ac:spMkLst>
+            <pc:docMk/>
+            <pc:sldMk cId="799882113" sldId="263"/>
+            <ac:spMk id="12" creationId="{7DC65381-6742-D743-5F2B-C7CF2C8ACD53}"/>
+          </ac:spMkLst>
+        </pc:spChg>
+        <pc:spChg chg="del">
+          <ac:chgData name="Adriatico, Dundee B." userId="a207e8a9-124e-439f-89fd-9ad351d7d04c" providerId="ADAL" clId="{1782D908-4124-408E-8E70-BD4D334214AB}" dt="2026-04-09T04:53:03.208" v="245" actId="478"/>
+          <ac:spMkLst>
+            <pc:docMk/>
+            <pc:sldMk cId="799882113" sldId="263"/>
+            <ac:spMk id="13" creationId="{584595DA-5379-751E-5A40-5BE2183201F9}"/>
+          </ac:spMkLst>
+        </pc:spChg>
+        <pc:spChg chg="del">
+          <ac:chgData name="Adriatico, Dundee B." userId="a207e8a9-124e-439f-89fd-9ad351d7d04c" providerId="ADAL" clId="{1782D908-4124-408E-8E70-BD4D334214AB}" dt="2026-04-09T04:53:03.208" v="245" actId="478"/>
+          <ac:spMkLst>
+            <pc:docMk/>
+            <pc:sldMk cId="799882113" sldId="263"/>
+            <ac:spMk id="14" creationId="{FEBDD7E7-054C-0682-563B-BC0513792A13}"/>
+          </ac:spMkLst>
+        </pc:spChg>
+      </pc:sldChg>
+      <pc:sldChg chg="addSp delSp modSp add mod">
+        <pc:chgData name="Adriatico, Dundee B." userId="a207e8a9-124e-439f-89fd-9ad351d7d04c" providerId="ADAL" clId="{1782D908-4124-408E-8E70-BD4D334214AB}" dt="2026-04-09T04:55:40.018" v="289" actId="1076"/>
+        <pc:sldMkLst>
+          <pc:docMk/>
+          <pc:sldMk cId="546682087" sldId="264"/>
+        </pc:sldMkLst>
+        <pc:spChg chg="mod">
+          <ac:chgData name="Adriatico, Dundee B." userId="a207e8a9-124e-439f-89fd-9ad351d7d04c" providerId="ADAL" clId="{1782D908-4124-408E-8E70-BD4D334214AB}" dt="2026-04-09T04:53:51.143" v="268"/>
+          <ac:spMkLst>
+            <pc:docMk/>
+            <pc:sldMk cId="546682087" sldId="264"/>
+            <ac:spMk id="3" creationId="{D1E66417-47A2-14A2-0B6D-9B9D1CE63D4E}"/>
+          </ac:spMkLst>
+        </pc:spChg>
+        <pc:spChg chg="mod">
+          <ac:chgData name="Adriatico, Dundee B." userId="a207e8a9-124e-439f-89fd-9ad351d7d04c" providerId="ADAL" clId="{1782D908-4124-408E-8E70-BD4D334214AB}" dt="2026-04-09T04:54:00.718" v="269"/>
+          <ac:spMkLst>
+            <pc:docMk/>
+            <pc:sldMk cId="546682087" sldId="264"/>
+            <ac:spMk id="4" creationId="{37116B44-0DE9-3B80-282A-2CAB2E4DC688}"/>
+          </ac:spMkLst>
+        </pc:spChg>
+        <pc:spChg chg="del">
+          <ac:chgData name="Adriatico, Dundee B." userId="a207e8a9-124e-439f-89fd-9ad351d7d04c" providerId="ADAL" clId="{1782D908-4124-408E-8E70-BD4D334214AB}" dt="2026-04-09T04:55:24.234" v="284" actId="478"/>
+          <ac:spMkLst>
+            <pc:docMk/>
+            <pc:sldMk cId="546682087" sldId="264"/>
+            <ac:spMk id="5" creationId="{7BD63E11-8073-D3A7-4483-01AF508C0158}"/>
+          </ac:spMkLst>
+        </pc:spChg>
+        <pc:spChg chg="del">
+          <ac:chgData name="Adriatico, Dundee B." userId="a207e8a9-124e-439f-89fd-9ad351d7d04c" providerId="ADAL" clId="{1782D908-4124-408E-8E70-BD4D334214AB}" dt="2026-04-09T04:54:37.952" v="275" actId="478"/>
+          <ac:spMkLst>
+            <pc:docMk/>
+            <pc:sldMk cId="546682087" sldId="264"/>
+            <ac:spMk id="6" creationId="{3ED783F8-67EE-07F9-14CD-F9B31DE5FA4F}"/>
+          </ac:spMkLst>
+        </pc:spChg>
+        <pc:spChg chg="del">
+          <ac:chgData name="Adriatico, Dundee B." userId="a207e8a9-124e-439f-89fd-9ad351d7d04c" providerId="ADAL" clId="{1782D908-4124-408E-8E70-BD4D334214AB}" dt="2026-04-09T04:55:24.234" v="284" actId="478"/>
+          <ac:spMkLst>
+            <pc:docMk/>
+            <pc:sldMk cId="546682087" sldId="264"/>
+            <ac:spMk id="8" creationId="{5CCCE369-5063-0F9A-E43D-ACF520B37EEC}"/>
+          </ac:spMkLst>
+        </pc:spChg>
+        <pc:spChg chg="add mod">
+          <ac:chgData name="Adriatico, Dundee B." userId="a207e8a9-124e-439f-89fd-9ad351d7d04c" providerId="ADAL" clId="{1782D908-4124-408E-8E70-BD4D334214AB}" dt="2026-04-09T04:55:40.018" v="289" actId="1076"/>
+          <ac:spMkLst>
+            <pc:docMk/>
+            <pc:sldMk cId="546682087" sldId="264"/>
+            <ac:spMk id="9" creationId="{C3E8EB85-F41D-6BCC-7DD9-0242107E3801}"/>
+          </ac:spMkLst>
+        </pc:spChg>
+        <pc:spChg chg="mod">
+          <ac:chgData name="Adriatico, Dundee B." userId="a207e8a9-124e-439f-89fd-9ad351d7d04c" providerId="ADAL" clId="{1782D908-4124-408E-8E70-BD4D334214AB}" dt="2026-04-09T04:53:24.319" v="256" actId="20577"/>
+          <ac:spMkLst>
+            <pc:docMk/>
+            <pc:sldMk cId="546682087" sldId="264"/>
+            <ac:spMk id="11" creationId="{67C5FCDF-8339-305A-F54E-83EA99DB128E}"/>
+          </ac:spMkLst>
+        </pc:spChg>
+        <pc:spChg chg="mod">
+          <ac:chgData name="Adriatico, Dundee B." userId="a207e8a9-124e-439f-89fd-9ad351d7d04c" providerId="ADAL" clId="{1782D908-4124-408E-8E70-BD4D334214AB}" dt="2026-04-09T04:53:40.051" v="267" actId="20577"/>
+          <ac:spMkLst>
+            <pc:docMk/>
+            <pc:sldMk cId="546682087" sldId="264"/>
+            <ac:spMk id="12" creationId="{3A76520A-9964-E8AA-C61F-9C6B76BFE39A}"/>
+          </ac:spMkLst>
+        </pc:spChg>
+        <pc:spChg chg="mod">
+          <ac:chgData name="Adriatico, Dundee B." userId="a207e8a9-124e-439f-89fd-9ad351d7d04c" providerId="ADAL" clId="{1782D908-4124-408E-8E70-BD4D334214AB}" dt="2026-04-09T04:54:15.262" v="270"/>
+          <ac:spMkLst>
+            <pc:docMk/>
+            <pc:sldMk cId="546682087" sldId="264"/>
+            <ac:spMk id="13" creationId="{213CF6CE-B7E4-A0FD-E139-22913F43D5AE}"/>
+          </ac:spMkLst>
+        </pc:spChg>
+        <pc:spChg chg="del">
+          <ac:chgData name="Adriatico, Dundee B." userId="a207e8a9-124e-439f-89fd-9ad351d7d04c" providerId="ADAL" clId="{1782D908-4124-408E-8E70-BD4D334214AB}" dt="2026-04-09T04:55:24.234" v="284" actId="478"/>
+          <ac:spMkLst>
+            <pc:docMk/>
+            <pc:sldMk cId="546682087" sldId="264"/>
+            <ac:spMk id="14" creationId="{9B209DDB-0742-B6AB-7A71-D9B38CC95C2D}"/>
+          </ac:spMkLst>
+        </pc:spChg>
+        <pc:graphicFrameChg chg="add mod modGraphic">
+          <ac:chgData name="Adriatico, Dundee B." userId="a207e8a9-124e-439f-89fd-9ad351d7d04c" providerId="ADAL" clId="{1782D908-4124-408E-8E70-BD4D334214AB}" dt="2026-04-09T04:55:18.116" v="283" actId="1076"/>
+          <ac:graphicFrameMkLst>
+            <pc:docMk/>
+            <pc:sldMk cId="546682087" sldId="264"/>
+            <ac:graphicFrameMk id="2" creationId="{555F7480-588E-C36D-399C-5E8CB1F579C5}"/>
+          </ac:graphicFrameMkLst>
+        </pc:graphicFrameChg>
+      </pc:sldChg>
+      <pc:sldChg chg="addSp delSp modSp add mod">
+        <pc:chgData name="Adriatico, Dundee B." userId="a207e8a9-124e-439f-89fd-9ad351d7d04c" providerId="ADAL" clId="{1782D908-4124-408E-8E70-BD4D334214AB}" dt="2026-04-09T04:58:35.800" v="381" actId="20577"/>
+        <pc:sldMkLst>
+          <pc:docMk/>
+          <pc:sldMk cId="1726875448" sldId="265"/>
+        </pc:sldMkLst>
+        <pc:spChg chg="add del mod">
+          <ac:chgData name="Adriatico, Dundee B." userId="a207e8a9-124e-439f-89fd-9ad351d7d04c" providerId="ADAL" clId="{1782D908-4124-408E-8E70-BD4D334214AB}" dt="2026-04-09T04:58:30.250" v="354" actId="478"/>
+          <ac:spMkLst>
+            <pc:docMk/>
+            <pc:sldMk cId="1726875448" sldId="265"/>
+            <ac:spMk id="2" creationId="{26809621-0658-51D8-6FD5-034E9FA54B45}"/>
+          </ac:spMkLst>
+        </pc:spChg>
+        <pc:spChg chg="add mod">
+          <ac:chgData name="Adriatico, Dundee B." userId="a207e8a9-124e-439f-89fd-9ad351d7d04c" providerId="ADAL" clId="{1782D908-4124-408E-8E70-BD4D334214AB}" dt="2026-04-09T04:58:35.800" v="381" actId="20577"/>
+          <ac:spMkLst>
+            <pc:docMk/>
+            <pc:sldMk cId="1726875448" sldId="265"/>
+            <ac:spMk id="3" creationId="{93635594-7FE0-BC04-2ADA-4E799DB80EDA}"/>
+          </ac:spMkLst>
+        </pc:spChg>
+        <pc:spChg chg="mod">
+          <ac:chgData name="Adriatico, Dundee B." userId="a207e8a9-124e-439f-89fd-9ad351d7d04c" providerId="ADAL" clId="{1782D908-4124-408E-8E70-BD4D334214AB}" dt="2026-04-09T04:58:12.657" v="324" actId="20577"/>
+          <ac:spMkLst>
+            <pc:docMk/>
+            <pc:sldMk cId="1726875448" sldId="265"/>
+            <ac:spMk id="12" creationId="{3994E74E-0E28-ABD7-CB63-06A65F363AC1}"/>
+          </ac:spMkLst>
+        </pc:spChg>
+      </pc:sldChg>
+      <pc:sldChg chg="addSp delSp modSp add mod">
+        <pc:chgData name="Adriatico, Dundee B." userId="a207e8a9-124e-439f-89fd-9ad351d7d04c" providerId="ADAL" clId="{1782D908-4124-408E-8E70-BD4D334214AB}" dt="2026-04-09T05:01:21.889" v="443" actId="14100"/>
+        <pc:sldMkLst>
+          <pc:docMk/>
+          <pc:sldMk cId="2005714003" sldId="266"/>
+        </pc:sldMkLst>
+        <pc:spChg chg="mod">
+          <ac:chgData name="Adriatico, Dundee B." userId="a207e8a9-124e-439f-89fd-9ad351d7d04c" providerId="ADAL" clId="{1782D908-4124-408E-8E70-BD4D334214AB}" dt="2026-04-09T04:59:26.286" v="399" actId="14100"/>
+          <ac:spMkLst>
+            <pc:docMk/>
+            <pc:sldMk cId="2005714003" sldId="266"/>
+            <ac:spMk id="3" creationId="{78CE8F23-A82A-A995-8024-D5CE0BD90BA6}"/>
+          </ac:spMkLst>
+        </pc:spChg>
+        <pc:spChg chg="mod">
+          <ac:chgData name="Adriatico, Dundee B." userId="a207e8a9-124e-439f-89fd-9ad351d7d04c" providerId="ADAL" clId="{1782D908-4124-408E-8E70-BD4D334214AB}" dt="2026-04-09T05:00:34.017" v="430" actId="20577"/>
+          <ac:spMkLst>
+            <pc:docMk/>
+            <pc:sldMk cId="2005714003" sldId="266"/>
+            <ac:spMk id="4" creationId="{12210598-2A3E-17C9-06FC-AD5405EFD4EC}"/>
+          </ac:spMkLst>
+        </pc:spChg>
+        <pc:spChg chg="add del">
+          <ac:chgData name="Adriatico, Dundee B." userId="a207e8a9-124e-439f-89fd-9ad351d7d04c" providerId="ADAL" clId="{1782D908-4124-408E-8E70-BD4D334214AB}" dt="2026-04-09T04:59:12.734" v="396" actId="22"/>
+          <ac:spMkLst>
+            <pc:docMk/>
+            <pc:sldMk cId="2005714003" sldId="266"/>
+            <ac:spMk id="6" creationId="{AF143D83-61DF-2BAC-4D21-C609BC6A043D}"/>
+          </ac:spMkLst>
+        </pc:spChg>
+        <pc:spChg chg="add mod">
+          <ac:chgData name="Adriatico, Dundee B." userId="a207e8a9-124e-439f-89fd-9ad351d7d04c" providerId="ADAL" clId="{1782D908-4124-408E-8E70-BD4D334214AB}" dt="2026-04-09T05:00:07.701" v="410" actId="1076"/>
+          <ac:spMkLst>
+            <pc:docMk/>
+            <pc:sldMk cId="2005714003" sldId="266"/>
+            <ac:spMk id="8" creationId="{861E6AD6-ACBE-389E-6233-C4A04E51348A}"/>
+          </ac:spMkLst>
+        </pc:spChg>
+        <pc:spChg chg="del">
+          <ac:chgData name="Adriatico, Dundee B." userId="a207e8a9-124e-439f-89fd-9ad351d7d04c" providerId="ADAL" clId="{1782D908-4124-408E-8E70-BD4D334214AB}" dt="2026-04-09T04:59:50.873" v="405" actId="478"/>
+          <ac:spMkLst>
+            <pc:docMk/>
+            <pc:sldMk cId="2005714003" sldId="266"/>
+            <ac:spMk id="9" creationId="{58167DA8-D5B4-F13F-BFC3-47DA5DB1ACEF}"/>
+          </ac:spMkLst>
+        </pc:spChg>
+        <pc:spChg chg="mod">
+          <ac:chgData name="Adriatico, Dundee B." userId="a207e8a9-124e-439f-89fd-9ad351d7d04c" providerId="ADAL" clId="{1782D908-4124-408E-8E70-BD4D334214AB}" dt="2026-04-09T04:58:46.871" v="390" actId="20577"/>
+          <ac:spMkLst>
+            <pc:docMk/>
+            <pc:sldMk cId="2005714003" sldId="266"/>
+            <ac:spMk id="11" creationId="{C983192B-71CF-98C7-FB94-2F5BEA62B1C0}"/>
+          </ac:spMkLst>
+        </pc:spChg>
+        <pc:spChg chg="mod">
+          <ac:chgData name="Adriatico, Dundee B." userId="a207e8a9-124e-439f-89fd-9ad351d7d04c" providerId="ADAL" clId="{1782D908-4124-408E-8E70-BD4D334214AB}" dt="2026-04-09T04:58:55.985" v="391"/>
+          <ac:spMkLst>
+            <pc:docMk/>
+            <pc:sldMk cId="2005714003" sldId="266"/>
+            <ac:spMk id="12" creationId="{4FAA39F1-7DA0-A3A4-53DF-43E423D96979}"/>
+          </ac:spMkLst>
+        </pc:spChg>
+        <pc:spChg chg="mod">
+          <ac:chgData name="Adriatico, Dundee B." userId="a207e8a9-124e-439f-89fd-9ad351d7d04c" providerId="ADAL" clId="{1782D908-4124-408E-8E70-BD4D334214AB}" dt="2026-04-09T05:00:12.948" v="411" actId="114"/>
+          <ac:spMkLst>
+            <pc:docMk/>
+            <pc:sldMk cId="2005714003" sldId="266"/>
+            <ac:spMk id="13" creationId="{8B6D7DB8-DBA7-9F61-07DA-1507EC2D01EC}"/>
+          </ac:spMkLst>
+        </pc:spChg>
+        <pc:spChg chg="add mod">
+          <ac:chgData name="Adriatico, Dundee B." userId="a207e8a9-124e-439f-89fd-9ad351d7d04c" providerId="ADAL" clId="{1782D908-4124-408E-8E70-BD4D334214AB}" dt="2026-04-09T05:01:21.889" v="443" actId="14100"/>
+          <ac:spMkLst>
+            <pc:docMk/>
+            <pc:sldMk cId="2005714003" sldId="266"/>
+            <ac:spMk id="14" creationId="{8B35B2AD-E6BF-87F2-DA44-5040D3F20C71}"/>
+          </ac:spMkLst>
+        </pc:spChg>
+        <pc:graphicFrameChg chg="del">
+          <ac:chgData name="Adriatico, Dundee B." userId="a207e8a9-124e-439f-89fd-9ad351d7d04c" providerId="ADAL" clId="{1782D908-4124-408E-8E70-BD4D334214AB}" dt="2026-04-09T05:00:46.149" v="433" actId="478"/>
+          <ac:graphicFrameMkLst>
+            <pc:docMk/>
+            <pc:sldMk cId="2005714003" sldId="266"/>
+            <ac:graphicFrameMk id="2" creationId="{6A30444E-FD55-E65F-988B-B752036DC25C}"/>
+          </ac:graphicFrameMkLst>
+        </pc:graphicFrameChg>
+      </pc:sldChg>
+      <pc:sldMasterChg chg="addSldLayout delSldLayout">
+        <pc:chgData name="Adriatico, Dundee B." userId="a207e8a9-124e-439f-89fd-9ad351d7d04c" providerId="ADAL" clId="{1782D908-4124-408E-8E70-BD4D334214AB}" dt="2026-04-09T04:52:04.037" v="238" actId="47"/>
+        <pc:sldMasterMkLst>
+          <pc:docMk/>
+          <pc:sldMasterMk cId="3412174801" sldId="2147483686"/>
+        </pc:sldMasterMkLst>
+        <pc:sldLayoutChg chg="add del">
+          <pc:chgData name="Adriatico, Dundee B." userId="a207e8a9-124e-439f-89fd-9ad351d7d04c" providerId="ADAL" clId="{1782D908-4124-408E-8E70-BD4D334214AB}" dt="2026-04-09T04:52:04.037" v="238" actId="47"/>
+          <pc:sldLayoutMkLst>
+            <pc:docMk/>
+            <pc:sldMasterMk cId="3412174801" sldId="2147483686"/>
+            <pc:sldLayoutMk cId="1856718631" sldId="2147483687"/>
+          </pc:sldLayoutMkLst>
+        </pc:sldLayoutChg>
+      </pc:sldMasterChg>
+    </pc:docChg>
+  </pc:docChgLst>
+</pc:chgInfo>
 </file>
 
 <file path=ppt/notesMasters/notesMaster1.xml><?xml version="1.0" encoding="utf-8"?>
@@ -509,7 +1205,7 @@
           <a:bodyPr/>
           <a:lstStyle/>
           <a:p>
-            <a:endParaRPr lang="en-US" dirty="0"/>
+            <a:endParaRPr lang="en-CA" dirty="0"/>
           </a:p>
         </p:txBody>
       </p:sp>
@@ -520,7 +1216,7 @@
             <a:spLocks noGrp="1"/>
           </p:cNvSpPr>
           <p:nvPr>
-            <p:ph type="sldNum" sz="quarter" idx="10"/>
+            <p:ph type="sldNum" sz="quarter" idx="5"/>
           </p:nvPr>
         </p:nvSpPr>
         <p:spPr/>
@@ -528,186 +1224,18 @@
           <a:bodyPr/>
           <a:lstStyle/>
           <a:p>
-            <a:fld id="{F7021451-1387-4CA6-816F-3879F97B5CBC}" type="slidenum">
-              <a:rPr lang="en-US"/>
-              <a:t>4</a:t>
+            <a:fld id="{BF9F3382-CF14-4459-9AC4-47815BF1AA48}" type="slidenum">
+              <a:rPr lang="en-CA" smtClean="0"/>
+              <a:t>1</a:t>
             </a:fld>
-            <a:endParaRPr lang="en-US"/>
+            <a:endParaRPr lang="en-CA"/>
           </a:p>
         </p:txBody>
       </p:sp>
     </p:spTree>
     <p:extLst>
       <p:ext uri="{BB962C8B-B14F-4D97-AF65-F5344CB8AC3E}">
-        <p14:creationId xmlns:p14="http://schemas.microsoft.com/office/powerpoint/2010/main" val="1024086991"/>
-      </p:ext>
-    </p:extLst>
-  </p:cSld>
-  <p:clrMapOvr>
-    <a:masterClrMapping/>
-  </p:clrMapOvr>
-</p:notes>
-</file>
-
-<file path=ppt/notesSlides/notesSlide2.xml><?xml version="1.0" encoding="utf-8"?>
-<p:notes xmlns:a="http://schemas.openxmlformats.org/drawingml/2006/main" xmlns:r="http://schemas.openxmlformats.org/officeDocument/2006/relationships" xmlns:p="http://schemas.openxmlformats.org/presentationml/2006/main">
-  <p:cSld>
-    <p:spTree>
-      <p:nvGrpSpPr>
-        <p:cNvPr id="1" name=""/>
-        <p:cNvGrpSpPr/>
-        <p:nvPr/>
-      </p:nvGrpSpPr>
-      <p:grpSpPr>
-        <a:xfrm>
-          <a:off x="0" y="0"/>
-          <a:ext cx="0" cy="0"/>
-          <a:chOff x="0" y="0"/>
-          <a:chExt cx="0" cy="0"/>
-        </a:xfrm>
-      </p:grpSpPr>
-      <p:sp>
-        <p:nvSpPr>
-          <p:cNvPr id="2" name="Slide Image Placeholder 1"/>
-          <p:cNvSpPr>
-            <a:spLocks noGrp="1" noRot="1" noChangeAspect="1"/>
-          </p:cNvSpPr>
-          <p:nvPr>
-            <p:ph type="sldImg"/>
-          </p:nvPr>
-        </p:nvSpPr>
-        <p:spPr/>
-      </p:sp>
-      <p:sp>
-        <p:nvSpPr>
-          <p:cNvPr id="3" name="Notes Placeholder 2"/>
-          <p:cNvSpPr>
-            <a:spLocks noGrp="1"/>
-          </p:cNvSpPr>
-          <p:nvPr>
-            <p:ph type="body" idx="1"/>
-          </p:nvPr>
-        </p:nvSpPr>
-        <p:spPr/>
-        <p:txBody>
-          <a:bodyPr/>
-          <a:lstStyle/>
-          <a:p>
-            <a:endParaRPr lang="en-US" dirty="0"/>
-          </a:p>
-        </p:txBody>
-      </p:sp>
-      <p:sp>
-        <p:nvSpPr>
-          <p:cNvPr id="4" name="Slide Number Placeholder 3"/>
-          <p:cNvSpPr>
-            <a:spLocks noGrp="1"/>
-          </p:cNvSpPr>
-          <p:nvPr>
-            <p:ph type="sldNum" sz="quarter" idx="10"/>
-          </p:nvPr>
-        </p:nvSpPr>
-        <p:spPr/>
-        <p:txBody>
-          <a:bodyPr/>
-          <a:lstStyle/>
-          <a:p>
-            <a:fld id="{F7021451-1387-4CA6-816F-3879F97B5CBC}" type="slidenum">
-              <a:rPr lang="en-US"/>
-              <a:t>5</a:t>
-            </a:fld>
-            <a:endParaRPr lang="en-US"/>
-          </a:p>
-        </p:txBody>
-      </p:sp>
-    </p:spTree>
-    <p:extLst>
-      <p:ext uri="{BB962C8B-B14F-4D97-AF65-F5344CB8AC3E}">
-        <p14:creationId xmlns:p14="http://schemas.microsoft.com/office/powerpoint/2010/main" val="1024086991"/>
-      </p:ext>
-    </p:extLst>
-  </p:cSld>
-  <p:clrMapOvr>
-    <a:masterClrMapping/>
-  </p:clrMapOvr>
-</p:notes>
-</file>
-
-<file path=ppt/notesSlides/notesSlide3.xml><?xml version="1.0" encoding="utf-8"?>
-<p:notes xmlns:a="http://schemas.openxmlformats.org/drawingml/2006/main" xmlns:r="http://schemas.openxmlformats.org/officeDocument/2006/relationships" xmlns:p="http://schemas.openxmlformats.org/presentationml/2006/main">
-  <p:cSld>
-    <p:spTree>
-      <p:nvGrpSpPr>
-        <p:cNvPr id="1" name=""/>
-        <p:cNvGrpSpPr/>
-        <p:nvPr/>
-      </p:nvGrpSpPr>
-      <p:grpSpPr>
-        <a:xfrm>
-          <a:off x="0" y="0"/>
-          <a:ext cx="0" cy="0"/>
-          <a:chOff x="0" y="0"/>
-          <a:chExt cx="0" cy="0"/>
-        </a:xfrm>
-      </p:grpSpPr>
-      <p:sp>
-        <p:nvSpPr>
-          <p:cNvPr id="2" name="Slide Image Placeholder 1"/>
-          <p:cNvSpPr>
-            <a:spLocks noGrp="1" noRot="1" noChangeAspect="1"/>
-          </p:cNvSpPr>
-          <p:nvPr>
-            <p:ph type="sldImg"/>
-          </p:nvPr>
-        </p:nvSpPr>
-        <p:spPr/>
-      </p:sp>
-      <p:sp>
-        <p:nvSpPr>
-          <p:cNvPr id="3" name="Notes Placeholder 2"/>
-          <p:cNvSpPr>
-            <a:spLocks noGrp="1"/>
-          </p:cNvSpPr>
-          <p:nvPr>
-            <p:ph type="body" idx="1"/>
-          </p:nvPr>
-        </p:nvSpPr>
-        <p:spPr/>
-        <p:txBody>
-          <a:bodyPr/>
-          <a:lstStyle/>
-          <a:p>
-            <a:endParaRPr lang="en-US" dirty="0"/>
-          </a:p>
-        </p:txBody>
-      </p:sp>
-      <p:sp>
-        <p:nvSpPr>
-          <p:cNvPr id="4" name="Slide Number Placeholder 3"/>
-          <p:cNvSpPr>
-            <a:spLocks noGrp="1"/>
-          </p:cNvSpPr>
-          <p:nvPr>
-            <p:ph type="sldNum" sz="quarter" idx="10"/>
-          </p:nvPr>
-        </p:nvSpPr>
-        <p:spPr/>
-        <p:txBody>
-          <a:bodyPr/>
-          <a:lstStyle/>
-          <a:p>
-            <a:fld id="{F7021451-1387-4CA6-816F-3879F97B5CBC}" type="slidenum">
-              <a:rPr lang="en-US"/>
-              <a:t>6</a:t>
-            </a:fld>
-            <a:endParaRPr lang="en-US"/>
-          </a:p>
-        </p:txBody>
-      </p:sp>
-    </p:spTree>
-    <p:extLst>
-      <p:ext uri="{BB962C8B-B14F-4D97-AF65-F5344CB8AC3E}">
-        <p14:creationId xmlns:p14="http://schemas.microsoft.com/office/powerpoint/2010/main" val="1024086991"/>
+        <p14:creationId xmlns:p14="http://schemas.microsoft.com/office/powerpoint/2010/main" val="1629639965"/>
       </p:ext>
     </p:extLst>
   </p:cSld>
@@ -1344,41 +1872,6 @@
     <p:extLst>
       <p:ext uri="{BB962C8B-B14F-4D97-AF65-F5344CB8AC3E}">
         <p14:creationId xmlns:p14="http://schemas.microsoft.com/office/powerpoint/2010/main" val="1484855810"/>
-      </p:ext>
-    </p:extLst>
-  </p:cSld>
-  <p:clrMapOvr>
-    <a:masterClrMapping/>
-  </p:clrMapOvr>
-</p:sldLayout>
-</file>
-
-<file path=ppt/slideLayouts/slideLayout12.xml><?xml version="1.0" encoding="utf-8"?>
-<p:sldLayout xmlns:a="http://schemas.openxmlformats.org/drawingml/2006/main" xmlns:r="http://schemas.openxmlformats.org/officeDocument/2006/relationships" xmlns:p="http://schemas.openxmlformats.org/presentationml/2006/main">
-  <p:cSld name="DEFAULT">
-    <p:bg>
-      <p:bgRef idx="1001">
-        <a:schemeClr val="bg1"/>
-      </p:bgRef>
-    </p:bg>
-    <p:spTree>
-      <p:nvGrpSpPr>
-        <p:cNvPr id="1" name=""/>
-        <p:cNvGrpSpPr/>
-        <p:nvPr/>
-      </p:nvGrpSpPr>
-      <p:grpSpPr>
-        <a:xfrm>
-          <a:off x="0" y="0"/>
-          <a:ext cx="0" cy="0"/>
-          <a:chOff x="0" y="0"/>
-          <a:chExt cx="0" cy="0"/>
-        </a:xfrm>
-      </p:grpSpPr>
-    </p:spTree>
-    <p:extLst>
-      <p:ext uri="{BB962C8B-B14F-4D97-AF65-F5344CB8AC3E}">
-        <p14:creationId xmlns:p14="http://schemas.microsoft.com/office/powerpoint/2010/main" val="1856718631"/>
       </p:ext>
     </p:extLst>
   </p:cSld>
@@ -3789,7 +4282,6 @@
     <p:sldLayoutId id="2147483677" r:id="rId9"/>
     <p:sldLayoutId id="2147483678" r:id="rId10"/>
     <p:sldLayoutId id="2147483680" r:id="rId11"/>
-    <p:sldLayoutId id="2147483687" r:id="rId12"/>
   </p:sldLayoutIdLst>
   <p:hf sldNum="0" hdr="0" ftr="0" dt="0"/>
   <p:txStyles>
@@ -4195,7 +4687,7 @@
         <p:spPr>
           <a:xfrm>
             <a:off x="5604552" y="871758"/>
-            <a:ext cx="5825448" cy="3871143"/>
+            <a:ext cx="6210220" cy="3871143"/>
           </a:xfrm>
         </p:spPr>
         <p:txBody>
@@ -4206,7 +4698,7 @@
           <a:p>
             <a:r>
               <a:rPr lang="en-US" dirty="0"/>
-              <a:t>EMS Exposure Forecasting App</a:t>
+              <a:t>EMS Work-injury Forecasting App</a:t>
             </a:r>
             <a:endParaRPr lang="en-CA" dirty="0"/>
           </a:p>
@@ -4236,7 +4728,7 @@
         </p:spPr>
         <p:txBody>
           <a:bodyPr>
-            <a:normAutofit/>
+            <a:normAutofit fontScale="85000" lnSpcReduction="20000"/>
           </a:bodyPr>
           <a:lstStyle/>
           <a:p>
@@ -4246,8 +4738,16 @@
               </a:lnSpc>
             </a:pPr>
             <a:r>
-              <a:rPr lang="en-US" sz="1600" dirty="0"/>
-              <a:t>A dashboard that turns historical work-related exposure events into interpretable weekly forecasts, accuracy checks, and manager-ready planning advice.</a:t>
+              <a:rPr lang="en-US" dirty="0"/>
+              <a:t>A decision-support prototype that turns weekly injury and exposure records into forecasts, </a:t>
+            </a:r>
+            <a:r>
+              <a:rPr lang="en-US" dirty="0" err="1"/>
+              <a:t>backtests</a:t>
+            </a:r>
+            <a:r>
+              <a:rPr lang="en-US" dirty="0"/>
+              <a:t>, and AI-generated operational recommendations for EMS managers.</a:t>
             </a:r>
             <a:endParaRPr lang="en-CA" sz="1600" dirty="0"/>
           </a:p>
@@ -4268,7 +4768,7 @@
           <p:nvPr/>
         </p:nvPicPr>
         <p:blipFill>
-          <a:blip r:embed="rId2"/>
+          <a:blip r:embed="rId3"/>
           <a:srcRect l="47912" r="4621" b="-1"/>
           <a:stretch>
             <a:fillRect/>
@@ -4403,7 +4903,7 @@
         <p:spPr>
           <a:xfrm>
             <a:off x="5723776" y="3124200"/>
-            <a:ext cx="3336170" cy="923330"/>
+            <a:ext cx="5442452" cy="923330"/>
           </a:xfrm>
           <a:prstGeom prst="rect">
             <a:avLst/>
@@ -4426,7 +4926,7 @@
             </a:r>
             <a:r>
               <a:rPr lang="en-US" b="1" dirty="0"/>
-              <a:t> Project for CSIS 4495</a:t>
+              <a:t> Project for CSIS 4495 (Applied Research)</a:t>
             </a:r>
           </a:p>
           <a:p>
@@ -4444,6 +4944,43 @@
           </a:p>
         </p:txBody>
       </p:sp>
+      <p:pic>
+        <p:nvPicPr>
+          <p:cNvPr id="6" name="Picture 5">
+            <a:extLst>
+              <a:ext uri="{FF2B5EF4-FFF2-40B4-BE49-F238E27FC236}">
+                <a16:creationId xmlns:a16="http://schemas.microsoft.com/office/drawing/2014/main" id="{4EC30190-79DC-BE2B-9506-F178505414E9}"/>
+              </a:ext>
+            </a:extLst>
+          </p:cNvPr>
+          <p:cNvPicPr>
+            <a:picLocks noChangeAspect="1"/>
+          </p:cNvPicPr>
+          <p:nvPr/>
+        </p:nvPicPr>
+        <p:blipFill>
+          <a:blip r:embed="rId4">
+            <a:extLst>
+              <a:ext uri="{28A0092B-C50C-407E-A947-70E740481C1C}">
+                <a14:useLocalDpi xmlns:a14="http://schemas.microsoft.com/office/drawing/2010/main" val="0"/>
+              </a:ext>
+            </a:extLst>
+          </a:blip>
+          <a:srcRect l="29921" r="20982"/>
+          <a:stretch>
+            <a:fillRect/>
+          </a:stretch>
+        </p:blipFill>
+        <p:spPr>
+          <a:xfrm>
+            <a:off x="-510012" y="0"/>
+            <a:ext cx="5386812" cy="6858000"/>
+          </a:xfrm>
+          <a:prstGeom prst="rect">
+            <a:avLst/>
+          </a:prstGeom>
+        </p:spPr>
+      </p:pic>
     </p:spTree>
     <p:extLst>
       <p:ext uri="{BB962C8B-B14F-4D97-AF65-F5344CB8AC3E}">
@@ -4615,165 +5152,6 @@
       </p:grpSpPr>
       <p:sp>
         <p:nvSpPr>
-          <p:cNvPr id="5" name="Text 1">
-            <a:extLst>
-              <a:ext uri="{FF2B5EF4-FFF2-40B4-BE49-F238E27FC236}">
-                <a16:creationId xmlns:a16="http://schemas.microsoft.com/office/drawing/2014/main" id="{F7E29AD5-28FB-3915-2349-E6CB41CD35F9}"/>
-              </a:ext>
-            </a:extLst>
-          </p:cNvPr>
-          <p:cNvSpPr/>
-          <p:nvPr/>
-        </p:nvSpPr>
-        <p:spPr>
-          <a:xfrm>
-            <a:off x="851197" y="2054006"/>
-            <a:ext cx="2268210" cy="300930"/>
-          </a:xfrm>
-          <a:prstGeom prst="roundRect">
-            <a:avLst>
-              <a:gd name="adj" fmla="val 30355418"/>
-            </a:avLst>
-          </a:prstGeom>
-          <a:solidFill>
-            <a:srgbClr val="0891B2">
-              <a:alpha val="10000"/>
-            </a:srgbClr>
-          </a:solidFill>
-          <a:ln/>
-        </p:spPr>
-        <p:txBody>
-          <a:bodyPr wrap="square" lIns="106680" tIns="106680" rIns="106680" bIns="106680" rtlCol="0" anchor="t">
-            <a:noAutofit/>
-          </a:bodyPr>
-          <a:lstStyle/>
-          <a:p>
-            <a:pPr marL="0" indent="0" algn="l">
-              <a:buNone/>
-            </a:pPr>
-            <a:r>
-              <a:rPr lang="en-US" sz="1200" b="1" dirty="0">
-                <a:solidFill>
-                  <a:srgbClr val="0C4A6E"/>
-                </a:solidFill>
-                <a:latin typeface="ui-sans-serif" pitchFamily="34" charset="0"/>
-                <a:ea typeface="ui-sans-serif" pitchFamily="34" charset="-122"/>
-                <a:cs typeface="ui-sans-serif" pitchFamily="34" charset="-120"/>
-              </a:rPr>
-              <a:t>Why it matters</a:t>
-            </a:r>
-            <a:endParaRPr lang="en-US" sz="1200" dirty="0"/>
-          </a:p>
-        </p:txBody>
-      </p:sp>
-      <p:sp>
-        <p:nvSpPr>
-          <p:cNvPr id="7" name="Text 3">
-            <a:extLst>
-              <a:ext uri="{FF2B5EF4-FFF2-40B4-BE49-F238E27FC236}">
-                <a16:creationId xmlns:a16="http://schemas.microsoft.com/office/drawing/2014/main" id="{FA049445-9B38-6B3F-7D30-CD079A3EBF9C}"/>
-              </a:ext>
-            </a:extLst>
-          </p:cNvPr>
-          <p:cNvSpPr/>
-          <p:nvPr/>
-        </p:nvSpPr>
-        <p:spPr>
-          <a:xfrm>
-            <a:off x="902663" y="3462927"/>
-            <a:ext cx="866775" cy="300930"/>
-          </a:xfrm>
-          <a:prstGeom prst="roundRect">
-            <a:avLst>
-              <a:gd name="adj" fmla="val 30355418"/>
-            </a:avLst>
-          </a:prstGeom>
-          <a:solidFill>
-            <a:srgbClr val="0891B2">
-              <a:alpha val="10000"/>
-            </a:srgbClr>
-          </a:solidFill>
-          <a:ln/>
-        </p:spPr>
-        <p:txBody>
-          <a:bodyPr wrap="square" lIns="106680" tIns="106680" rIns="106680" bIns="106680" rtlCol="0" anchor="t">
-            <a:noAutofit/>
-          </a:bodyPr>
-          <a:lstStyle/>
-          <a:p>
-            <a:pPr marL="0" indent="0" algn="l">
-              <a:buNone/>
-            </a:pPr>
-            <a:r>
-              <a:rPr lang="en-US" sz="1200" b="1" dirty="0">
-                <a:solidFill>
-                  <a:srgbClr val="0C4A6E"/>
-                </a:solidFill>
-                <a:latin typeface="ui-sans-serif" pitchFamily="34" charset="0"/>
-                <a:ea typeface="ui-sans-serif" pitchFamily="34" charset="-122"/>
-                <a:cs typeface="ui-sans-serif" pitchFamily="34" charset="-120"/>
-              </a:rPr>
-              <a:t>Gap</a:t>
-            </a:r>
-            <a:endParaRPr lang="en-US" sz="1200" dirty="0"/>
-          </a:p>
-        </p:txBody>
-      </p:sp>
-      <p:sp>
-        <p:nvSpPr>
-          <p:cNvPr id="9" name="Text 5">
-            <a:extLst>
-              <a:ext uri="{FF2B5EF4-FFF2-40B4-BE49-F238E27FC236}">
-                <a16:creationId xmlns:a16="http://schemas.microsoft.com/office/drawing/2014/main" id="{FAA84101-8C6A-D463-B489-81D41CE1801A}"/>
-              </a:ext>
-            </a:extLst>
-          </p:cNvPr>
-          <p:cNvSpPr/>
-          <p:nvPr/>
-        </p:nvSpPr>
-        <p:spPr>
-          <a:xfrm>
-            <a:off x="851197" y="4927916"/>
-            <a:ext cx="2462182" cy="300930"/>
-          </a:xfrm>
-          <a:prstGeom prst="roundRect">
-            <a:avLst>
-              <a:gd name="adj" fmla="val 30355418"/>
-            </a:avLst>
-          </a:prstGeom>
-          <a:solidFill>
-            <a:srgbClr val="0891B2">
-              <a:alpha val="10000"/>
-            </a:srgbClr>
-          </a:solidFill>
-          <a:ln/>
-        </p:spPr>
-        <p:txBody>
-          <a:bodyPr wrap="square" lIns="106680" tIns="106680" rIns="106680" bIns="106680" rtlCol="0" anchor="t">
-            <a:noAutofit/>
-          </a:bodyPr>
-          <a:lstStyle/>
-          <a:p>
-            <a:pPr marL="0" indent="0" algn="l">
-              <a:buNone/>
-            </a:pPr>
-            <a:r>
-              <a:rPr lang="en-US" sz="1200" b="1" dirty="0">
-                <a:solidFill>
-                  <a:srgbClr val="0C4A6E"/>
-                </a:solidFill>
-                <a:latin typeface="ui-sans-serif" pitchFamily="34" charset="0"/>
-                <a:ea typeface="ui-sans-serif" pitchFamily="34" charset="-122"/>
-                <a:cs typeface="ui-sans-serif" pitchFamily="34" charset="-120"/>
-              </a:rPr>
-              <a:t>Project question</a:t>
-            </a:r>
-            <a:endParaRPr lang="en-US" sz="1200" dirty="0"/>
-          </a:p>
-        </p:txBody>
-      </p:sp>
-      <p:sp>
-        <p:nvSpPr>
           <p:cNvPr id="11" name="Text 7">
             <a:extLst>
               <a:ext uri="{FF2B5EF4-FFF2-40B4-BE49-F238E27FC236}">
@@ -4787,7 +5165,7 @@
         <p:spPr>
           <a:xfrm>
             <a:off x="834280" y="392448"/>
-            <a:ext cx="4647804" cy="178296"/>
+            <a:ext cx="2678465" cy="259402"/>
           </a:xfrm>
           <a:prstGeom prst="rect">
             <a:avLst/>
@@ -4799,23 +5177,15 @@
           <a:bodyPr wrap="square" lIns="0" tIns="0" rIns="0" bIns="0" rtlCol="0" anchor="t"/>
           <a:lstStyle/>
           <a:p>
-            <a:pPr marL="0" indent="0">
-              <a:lnSpc>
-                <a:spcPts val="1404"/>
-              </a:lnSpc>
-              <a:buNone/>
-            </a:pPr>
-            <a:r>
-              <a:rPr lang="en-US" sz="2000" b="1" dirty="0">
-                <a:solidFill>
-                  <a:srgbClr val="64748B"/>
-                </a:solidFill>
-                <a:latin typeface="ui-sans-serif" pitchFamily="34" charset="0"/>
-                <a:ea typeface="ui-sans-serif" pitchFamily="34" charset="-122"/>
-                <a:cs typeface="ui-sans-serif" pitchFamily="34" charset="-120"/>
-              </a:rPr>
-              <a:t>Problem and motivation</a:t>
-            </a:r>
+            <a:r>
+              <a:rPr lang="en-CA" cap="all" dirty="0"/>
+              <a:t>Project overview</a:t>
+            </a:r>
+          </a:p>
+          <a:p>
+            <a:br>
+              <a:rPr lang="en-CA" sz="2000" dirty="0"/>
+            </a:br>
             <a:endParaRPr lang="en-US" sz="2000" dirty="0"/>
           </a:p>
         </p:txBody>
@@ -4847,24 +5217,10 @@
           <a:bodyPr wrap="square" lIns="0" tIns="0" rIns="0" bIns="0" rtlCol="0" anchor="t"/>
           <a:lstStyle/>
           <a:p>
-            <a:pPr marL="0" indent="0">
-              <a:lnSpc>
-                <a:spcPts val="5760"/>
-              </a:lnSpc>
-              <a:buNone/>
-            </a:pPr>
-            <a:r>
-              <a:rPr lang="en-US" sz="3200" b="1" dirty="0">
-                <a:solidFill>
-                  <a:srgbClr val="0F172A"/>
-                </a:solidFill>
-                <a:latin typeface="Manrope" pitchFamily="34" charset="0"/>
-                <a:ea typeface="Manrope" pitchFamily="34" charset="-122"/>
-                <a:cs typeface="Manrope" pitchFamily="34" charset="-120"/>
-              </a:rPr>
-              <a:t>EMS leaders often see risk only after a bad week</a:t>
-            </a:r>
-            <a:endParaRPr lang="en-US" sz="3200" dirty="0"/>
+            <a:r>
+              <a:rPr lang="en-US" sz="3200" b="1" dirty="0"/>
+              <a:t>Problem, novelty, and full framework</a:t>
+            </a:r>
           </a:p>
         </p:txBody>
       </p:sp>
@@ -4882,8 +5238,8 @@
         </p:nvSpPr>
         <p:spPr>
           <a:xfrm>
-            <a:off x="2754509" y="1905326"/>
-            <a:ext cx="4156621" cy="1066800"/>
+            <a:off x="834279" y="2362199"/>
+            <a:ext cx="4156621" cy="1376881"/>
           </a:xfrm>
           <a:prstGeom prst="rect">
             <a:avLst/>
@@ -4895,33 +5251,145 @@
           <a:bodyPr wrap="square" lIns="0" tIns="0" rIns="0" bIns="0" rtlCol="0" anchor="t"/>
           <a:lstStyle/>
           <a:p>
-            <a:pPr marL="0" indent="0">
-              <a:lnSpc>
-                <a:spcPts val="2100"/>
-              </a:lnSpc>
-              <a:buNone/>
+            <a:pPr marL="171450" indent="-171450">
+              <a:buFont typeface="Arial" panose="020B0604020202020204" pitchFamily="34" charset="0"/>
+              <a:buChar char="•"/>
             </a:pPr>
             <a:r>
-              <a:rPr lang="en-US" sz="1350" dirty="0">
+              <a:rPr lang="en-US" sz="1200" dirty="0">
+                <a:latin typeface="Aptos" panose="020B0004020202020204" pitchFamily="34" charset="0"/>
+              </a:rPr>
+              <a:t>EMS supervisors usually react to exposure spikes after they happen instead of planning ahead.</a:t>
+            </a:r>
+          </a:p>
+          <a:p>
+            <a:pPr marL="171450" indent="-171450">
+              <a:buFont typeface="Arial" panose="020B0604020202020204" pitchFamily="34" charset="0"/>
+              <a:buChar char="•"/>
+            </a:pPr>
+            <a:r>
+              <a:rPr lang="en-US" sz="1200" dirty="0">
+                <a:latin typeface="Aptos" panose="020B0004020202020204" pitchFamily="34" charset="0"/>
+              </a:rPr>
+              <a:t>This app estimates future weekly exposure volume so staffing, PPE, overtime, and reporting support can be planned earlier.</a:t>
+            </a:r>
+          </a:p>
+          <a:p>
+            <a:pPr marL="171450" indent="-171450">
+              <a:buFont typeface="Arial" panose="020B0604020202020204" pitchFamily="34" charset="0"/>
+              <a:buChar char="•"/>
+            </a:pPr>
+            <a:r>
+              <a:rPr lang="en-US" sz="1200" dirty="0">
+                <a:latin typeface="Aptos" panose="020B0004020202020204" pitchFamily="34" charset="0"/>
+              </a:rPr>
+              <a:t>The practical goal is utility, not just prediction: move from counts to operational action.</a:t>
+            </a:r>
+          </a:p>
+        </p:txBody>
+      </p:sp>
+      <p:sp>
+        <p:nvSpPr>
+          <p:cNvPr id="3" name="TextBox 2">
+            <a:extLst>
+              <a:ext uri="{FF2B5EF4-FFF2-40B4-BE49-F238E27FC236}">
+                <a16:creationId xmlns:a16="http://schemas.microsoft.com/office/drawing/2014/main" id="{852A536A-D1DC-55A7-A3DD-02FF4F5EFB12}"/>
+              </a:ext>
+            </a:extLst>
+          </p:cNvPr>
+          <p:cNvSpPr txBox="1"/>
+          <p:nvPr/>
+        </p:nvSpPr>
+        <p:spPr>
+          <a:xfrm>
+            <a:off x="834279" y="1893867"/>
+            <a:ext cx="1942145" cy="369332"/>
+          </a:xfrm>
+          <a:prstGeom prst="rect">
+            <a:avLst/>
+          </a:prstGeom>
+          <a:noFill/>
+        </p:spPr>
+        <p:txBody>
+          <a:bodyPr wrap="square">
+            <a:spAutoFit/>
+          </a:bodyPr>
+          <a:lstStyle/>
+          <a:p>
+            <a:pPr algn="l">
+              <a:spcAft>
+                <a:spcPts val="900"/>
+              </a:spcAft>
+              <a:buNone/>
+            </a:pPr>
+            <a:r>
+              <a:rPr lang="en-CA" b="1" i="0" dirty="0">
                 <a:solidFill>
-                  <a:srgbClr val="334155"/>
+                  <a:srgbClr val="0F766E"/>
                 </a:solidFill>
-                <a:latin typeface="ui-sans-serif" pitchFamily="34" charset="0"/>
-                <a:ea typeface="ui-sans-serif" pitchFamily="34" charset="-122"/>
-                <a:cs typeface="ui-sans-serif" pitchFamily="34" charset="-120"/>
-              </a:rPr>
-              <a:t>EMS clinicians work in unpredictable scenes, under time pressure, with lifting strain, transport hazards, and blood or body-fluid exposure risk.</a:t>
-            </a:r>
-            <a:endParaRPr lang="en-US" sz="1350" dirty="0"/>
-          </a:p>
-        </p:txBody>
-      </p:sp>
-      <p:sp>
-        <p:nvSpPr>
-          <p:cNvPr id="14" name="Text 10">
-            <a:extLst>
-              <a:ext uri="{FF2B5EF4-FFF2-40B4-BE49-F238E27FC236}">
-                <a16:creationId xmlns:a16="http://schemas.microsoft.com/office/drawing/2014/main" id="{DDCB63EB-E43B-7FB6-15F4-1FB0622BE04C}"/>
+                <a:effectLst/>
+                <a:latin typeface="ui-sans-serif"/>
+              </a:rPr>
+              <a:t>Why this matters?</a:t>
+            </a:r>
+            <a:endParaRPr lang="en-CA" dirty="0"/>
+          </a:p>
+        </p:txBody>
+      </p:sp>
+      <p:sp>
+        <p:nvSpPr>
+          <p:cNvPr id="4" name="TextBox 3">
+            <a:extLst>
+              <a:ext uri="{FF2B5EF4-FFF2-40B4-BE49-F238E27FC236}">
+                <a16:creationId xmlns:a16="http://schemas.microsoft.com/office/drawing/2014/main" id="{9E915874-F740-AA7C-007F-5116B7000BFF}"/>
+              </a:ext>
+            </a:extLst>
+          </p:cNvPr>
+          <p:cNvSpPr txBox="1"/>
+          <p:nvPr/>
+        </p:nvSpPr>
+        <p:spPr>
+          <a:xfrm>
+            <a:off x="5690858" y="1893867"/>
+            <a:ext cx="2203764" cy="369332"/>
+          </a:xfrm>
+          <a:prstGeom prst="rect">
+            <a:avLst/>
+          </a:prstGeom>
+          <a:noFill/>
+        </p:spPr>
+        <p:txBody>
+          <a:bodyPr wrap="square">
+            <a:spAutoFit/>
+          </a:bodyPr>
+          <a:lstStyle/>
+          <a:p>
+            <a:pPr algn="l">
+              <a:spcAft>
+                <a:spcPts val="900"/>
+              </a:spcAft>
+              <a:buNone/>
+            </a:pPr>
+            <a:r>
+              <a:rPr lang="en-CA" b="1" i="0" dirty="0">
+                <a:solidFill>
+                  <a:srgbClr val="0F766E"/>
+                </a:solidFill>
+                <a:effectLst/>
+                <a:latin typeface="ui-sans-serif"/>
+              </a:rPr>
+              <a:t>What is novel here?</a:t>
+            </a:r>
+            <a:endParaRPr lang="en-CA" dirty="0"/>
+          </a:p>
+        </p:txBody>
+      </p:sp>
+      <p:sp>
+        <p:nvSpPr>
+          <p:cNvPr id="6" name="Text 9">
+            <a:extLst>
+              <a:ext uri="{FF2B5EF4-FFF2-40B4-BE49-F238E27FC236}">
+                <a16:creationId xmlns:a16="http://schemas.microsoft.com/office/drawing/2014/main" id="{159486EE-7E9D-2A8E-7986-6B268FFE60A0}"/>
               </a:ext>
             </a:extLst>
           </p:cNvPr>
@@ -4930,8 +5398,8 @@
         </p:nvSpPr>
         <p:spPr>
           <a:xfrm>
-            <a:off x="2686049" y="3340962"/>
-            <a:ext cx="4156621" cy="1066800"/>
+            <a:off x="5690858" y="2353144"/>
+            <a:ext cx="4156621" cy="1376881"/>
           </a:xfrm>
           <a:prstGeom prst="rect">
             <a:avLst/>
@@ -4943,408 +5411,310 @@
           <a:bodyPr wrap="square" lIns="0" tIns="0" rIns="0" bIns="0" rtlCol="0" anchor="t"/>
           <a:lstStyle/>
           <a:p>
-            <a:pPr marL="0" indent="0">
-              <a:lnSpc>
-                <a:spcPts val="2100"/>
-              </a:lnSpc>
-              <a:buNone/>
+            <a:pPr marL="171450" indent="-171450">
+              <a:buFont typeface="Arial" panose="020B0604020202020204" pitchFamily="34" charset="0"/>
+              <a:buChar char="•"/>
             </a:pPr>
             <a:r>
-              <a:rPr lang="en-US" sz="1350" dirty="0">
-                <a:solidFill>
-                  <a:srgbClr val="334155"/>
-                </a:solidFill>
-                <a:latin typeface="ui-sans-serif" pitchFamily="34" charset="0"/>
-                <a:ea typeface="ui-sans-serif" pitchFamily="34" charset="-122"/>
-                <a:cs typeface="ui-sans-serif" pitchFamily="34" charset="-120"/>
-              </a:rPr>
-              <a:t>Most systems still monitor injuries and exposures retrospectively, which limits proactive staffing, PPE messaging, and training decisions.</a:t>
-            </a:r>
-            <a:endParaRPr lang="en-US" sz="1350" dirty="0"/>
-          </a:p>
-        </p:txBody>
-      </p:sp>
-      <p:sp>
-        <p:nvSpPr>
-          <p:cNvPr id="15" name="Text 11">
-            <a:extLst>
-              <a:ext uri="{FF2B5EF4-FFF2-40B4-BE49-F238E27FC236}">
-                <a16:creationId xmlns:a16="http://schemas.microsoft.com/office/drawing/2014/main" id="{8E9F704A-BDE5-F4B6-6FA1-02D1DC6F94E6}"/>
-              </a:ext>
-            </a:extLst>
-          </p:cNvPr>
-          <p:cNvSpPr/>
+              <a:rPr lang="en-US" sz="1200" dirty="0">
+                <a:latin typeface="Aptos" panose="020B0004020202020204" pitchFamily="34" charset="0"/>
+              </a:rPr>
+              <a:t>Combines forecasting models, manager-facing </a:t>
+            </a:r>
+            <a:r>
+              <a:rPr lang="en-US" sz="1200" dirty="0" err="1">
+                <a:latin typeface="Aptos" panose="020B0004020202020204" pitchFamily="34" charset="0"/>
+              </a:rPr>
+              <a:t>backtest</a:t>
+            </a:r>
+            <a:r>
+              <a:rPr lang="en-US" sz="1200" dirty="0">
+                <a:latin typeface="Aptos" panose="020B0004020202020204" pitchFamily="34" charset="0"/>
+              </a:rPr>
+              <a:t> metrics, and AI-generated recommendations in one workflow.</a:t>
+            </a:r>
+          </a:p>
+          <a:p>
+            <a:pPr marL="171450" indent="-171450">
+              <a:buFont typeface="Arial" panose="020B0604020202020204" pitchFamily="34" charset="0"/>
+              <a:buChar char="•"/>
+            </a:pPr>
+            <a:r>
+              <a:rPr lang="en-US" sz="1200" dirty="0">
+                <a:latin typeface="Aptos" panose="020B0004020202020204" pitchFamily="34" charset="0"/>
+              </a:rPr>
+              <a:t>Adds optional weather and major-event context to enrich decision making.</a:t>
+            </a:r>
+          </a:p>
+          <a:p>
+            <a:pPr marL="171450" indent="-171450">
+              <a:buFont typeface="Arial" panose="020B0604020202020204" pitchFamily="34" charset="0"/>
+              <a:buChar char="•"/>
+            </a:pPr>
+            <a:r>
+              <a:rPr lang="en-US" sz="1200" dirty="0">
+                <a:latin typeface="Aptos" panose="020B0004020202020204" pitchFamily="34" charset="0"/>
+              </a:rPr>
+              <a:t>Focuses on an EMS use case rather than a generic forecasting dashboard.</a:t>
+            </a:r>
+          </a:p>
+        </p:txBody>
+      </p:sp>
+      <p:sp>
+        <p:nvSpPr>
+          <p:cNvPr id="10" name="TextBox 9">
+            <a:extLst>
+              <a:ext uri="{FF2B5EF4-FFF2-40B4-BE49-F238E27FC236}">
+                <a16:creationId xmlns:a16="http://schemas.microsoft.com/office/drawing/2014/main" id="{44AB5694-B3E2-4AFC-9E7E-20432D88CE31}"/>
+              </a:ext>
+            </a:extLst>
+          </p:cNvPr>
+          <p:cNvSpPr txBox="1"/>
           <p:nvPr/>
         </p:nvSpPr>
         <p:spPr>
           <a:xfrm>
-            <a:off x="2686050" y="4871848"/>
-            <a:ext cx="4156621" cy="800100"/>
+            <a:off x="873296" y="4697997"/>
+            <a:ext cx="2039293" cy="846386"/>
           </a:xfrm>
           <a:prstGeom prst="rect">
             <a:avLst/>
           </a:prstGeom>
           <a:noFill/>
-          <a:ln/>
         </p:spPr>
         <p:txBody>
-          <a:bodyPr wrap="square" lIns="0" tIns="0" rIns="0" bIns="0" rtlCol="0" anchor="t"/>
-          <a:lstStyle/>
-          <a:p>
-            <a:pPr marL="0" indent="0">
-              <a:lnSpc>
-                <a:spcPts val="2100"/>
-              </a:lnSpc>
+          <a:bodyPr wrap="square">
+            <a:spAutoFit/>
+          </a:bodyPr>
+          <a:lstStyle/>
+          <a:p>
+            <a:pPr algn="l">
               <a:buNone/>
             </a:pPr>
             <a:r>
-              <a:rPr lang="en-US" sz="1350" dirty="0">
+              <a:rPr lang="en-US" sz="1100" b="0" i="0" cap="all" dirty="0">
                 <a:solidFill>
-                  <a:srgbClr val="334155"/>
+                  <a:srgbClr val="64748B"/>
                 </a:solidFill>
-                <a:latin typeface="ui-sans-serif" pitchFamily="34" charset="0"/>
-                <a:ea typeface="ui-sans-serif" pitchFamily="34" charset="-122"/>
-                <a:cs typeface="ui-sans-serif" pitchFamily="34" charset="-120"/>
-              </a:rPr>
-              <a:t>Can simple, transparent forecasting methods turn routine exposure records into short-term signals that managers can actually use?</a:t>
-            </a:r>
-            <a:endParaRPr lang="en-US" sz="1350" dirty="0"/>
-          </a:p>
-        </p:txBody>
-      </p:sp>
-      <p:sp>
-        <p:nvSpPr>
-          <p:cNvPr id="16" name="Text 12">
-            <a:extLst>
-              <a:ext uri="{FF2B5EF4-FFF2-40B4-BE49-F238E27FC236}">
-                <a16:creationId xmlns:a16="http://schemas.microsoft.com/office/drawing/2014/main" id="{B4676FAA-11D2-E323-6F89-9FBAC0EB94BE}"/>
-              </a:ext>
-            </a:extLst>
-          </p:cNvPr>
-          <p:cNvSpPr/>
+                <a:effectLst/>
+                <a:latin typeface="ui-sans-serif"/>
+              </a:rPr>
+              <a:t>Data</a:t>
+            </a:r>
+          </a:p>
+          <a:p>
+            <a:pPr algn="l">
+              <a:spcBef>
+                <a:spcPts val="600"/>
+              </a:spcBef>
+              <a:buNone/>
+            </a:pPr>
+            <a:r>
+              <a:rPr lang="en-US" sz="1100" b="0" i="0" dirty="0">
+                <a:solidFill>
+                  <a:srgbClr val="355163"/>
+                </a:solidFill>
+                <a:effectLst/>
+                <a:latin typeface="ui-sans-serif"/>
+              </a:rPr>
+              <a:t>PCR exposure records aggregated to Monday-based weekly counts.</a:t>
+            </a:r>
+          </a:p>
+        </p:txBody>
+      </p:sp>
+      <p:sp>
+        <p:nvSpPr>
+          <p:cNvPr id="24" name="TextBox 23">
+            <a:extLst>
+              <a:ext uri="{FF2B5EF4-FFF2-40B4-BE49-F238E27FC236}">
+                <a16:creationId xmlns:a16="http://schemas.microsoft.com/office/drawing/2014/main" id="{A879127E-6820-AC0F-C2E9-F229B3DEEF93}"/>
+              </a:ext>
+            </a:extLst>
+          </p:cNvPr>
+          <p:cNvSpPr txBox="1"/>
           <p:nvPr/>
         </p:nvSpPr>
         <p:spPr>
           <a:xfrm>
-            <a:off x="8261896" y="2038716"/>
-            <a:ext cx="3027441" cy="178296"/>
+            <a:off x="3047246" y="4697997"/>
+            <a:ext cx="2303352" cy="846386"/>
           </a:xfrm>
           <a:prstGeom prst="rect">
             <a:avLst/>
           </a:prstGeom>
           <a:noFill/>
-          <a:ln/>
         </p:spPr>
         <p:txBody>
-          <a:bodyPr wrap="square" lIns="0" tIns="0" rIns="0" bIns="0" rtlCol="0" anchor="t"/>
-          <a:lstStyle/>
-          <a:p>
-            <a:pPr marL="0" indent="0">
-              <a:lnSpc>
-                <a:spcPts val="1404"/>
-              </a:lnSpc>
+          <a:bodyPr wrap="square">
+            <a:spAutoFit/>
+          </a:bodyPr>
+          <a:lstStyle/>
+          <a:p>
+            <a:pPr algn="l">
               <a:buNone/>
             </a:pPr>
             <a:r>
-              <a:rPr lang="en-US" sz="936" b="1" dirty="0">
+              <a:rPr lang="en-US" sz="1100" b="0" i="0" cap="all" dirty="0">
                 <a:solidFill>
                   <a:srgbClr val="64748B"/>
                 </a:solidFill>
-                <a:latin typeface="ui-sans-serif" pitchFamily="34" charset="0"/>
-                <a:ea typeface="ui-sans-serif" pitchFamily="34" charset="-122"/>
-                <a:cs typeface="ui-sans-serif" pitchFamily="34" charset="-120"/>
-              </a:rPr>
-              <a:t>Research focus</a:t>
-            </a:r>
-            <a:endParaRPr lang="en-US" sz="936" dirty="0"/>
-          </a:p>
-        </p:txBody>
-      </p:sp>
-      <p:sp>
-        <p:nvSpPr>
-          <p:cNvPr id="17" name="Text 13">
-            <a:extLst>
-              <a:ext uri="{FF2B5EF4-FFF2-40B4-BE49-F238E27FC236}">
-                <a16:creationId xmlns:a16="http://schemas.microsoft.com/office/drawing/2014/main" id="{2A783A0F-A367-F2F3-586D-60F0D5798530}"/>
-              </a:ext>
-            </a:extLst>
-          </p:cNvPr>
-          <p:cNvSpPr/>
+                <a:effectLst/>
+                <a:latin typeface="ui-sans-serif"/>
+              </a:rPr>
+              <a:t>Models</a:t>
+            </a:r>
+          </a:p>
+          <a:p>
+            <a:pPr algn="l">
+              <a:spcBef>
+                <a:spcPts val="600"/>
+              </a:spcBef>
+              <a:buNone/>
+            </a:pPr>
+            <a:r>
+              <a:rPr lang="en-US" sz="1100" b="0" i="0" dirty="0">
+                <a:solidFill>
+                  <a:srgbClr val="355163"/>
+                </a:solidFill>
+                <a:effectLst/>
+                <a:latin typeface="ui-sans-serif"/>
+              </a:rPr>
+              <a:t>Naive, moving average, exponential smoothing, Holt, Holt-Winters, SARIMA.</a:t>
+            </a:r>
+          </a:p>
+        </p:txBody>
+      </p:sp>
+      <p:sp>
+        <p:nvSpPr>
+          <p:cNvPr id="26" name="TextBox 25">
+            <a:extLst>
+              <a:ext uri="{FF2B5EF4-FFF2-40B4-BE49-F238E27FC236}">
+                <a16:creationId xmlns:a16="http://schemas.microsoft.com/office/drawing/2014/main" id="{40FDD8CE-A86E-1B49-B510-ACC6EA03473F}"/>
+              </a:ext>
+            </a:extLst>
+          </p:cNvPr>
+          <p:cNvSpPr txBox="1"/>
           <p:nvPr/>
         </p:nvSpPr>
         <p:spPr>
           <a:xfrm>
-            <a:off x="8261896" y="2331312"/>
-            <a:ext cx="3027441" cy="266700"/>
+            <a:off x="5485255" y="4688192"/>
+            <a:ext cx="2419538" cy="846386"/>
           </a:xfrm>
           <a:prstGeom prst="rect">
             <a:avLst/>
           </a:prstGeom>
           <a:noFill/>
-          <a:ln/>
         </p:spPr>
         <p:txBody>
-          <a:bodyPr wrap="square" lIns="0" tIns="0" rIns="0" bIns="0" rtlCol="0" anchor="t"/>
-          <a:lstStyle/>
-          <a:p>
-            <a:pPr marL="0" indent="0">
-              <a:lnSpc>
-                <a:spcPts val="2100"/>
-              </a:lnSpc>
+          <a:bodyPr wrap="square">
+            <a:spAutoFit/>
+          </a:bodyPr>
+          <a:lstStyle/>
+          <a:p>
+            <a:pPr algn="l">
               <a:buNone/>
             </a:pPr>
             <a:r>
-              <a:rPr lang="en-US" sz="1350" b="1" dirty="0">
+              <a:rPr lang="en-US" sz="1100" b="0" i="0" cap="all" dirty="0">
                 <a:solidFill>
-                  <a:srgbClr val="0F172A"/>
+                  <a:srgbClr val="64748B"/>
                 </a:solidFill>
-                <a:latin typeface="ui-sans-serif" pitchFamily="34" charset="0"/>
-                <a:ea typeface="ui-sans-serif" pitchFamily="34" charset="-122"/>
-                <a:cs typeface="ui-sans-serif" pitchFamily="34" charset="-120"/>
-              </a:rPr>
-              <a:t>1. Surface recent patterns</a:t>
-            </a:r>
-            <a:endParaRPr lang="en-US" sz="1350" dirty="0"/>
-          </a:p>
-        </p:txBody>
-      </p:sp>
-      <p:sp>
-        <p:nvSpPr>
-          <p:cNvPr id="18" name="Text 14">
-            <a:extLst>
-              <a:ext uri="{FF2B5EF4-FFF2-40B4-BE49-F238E27FC236}">
-                <a16:creationId xmlns:a16="http://schemas.microsoft.com/office/drawing/2014/main" id="{533992E1-18DE-6DF5-6FE4-F4A1DAD2D636}"/>
-              </a:ext>
-            </a:extLst>
-          </p:cNvPr>
-          <p:cNvSpPr/>
+                <a:effectLst/>
+                <a:latin typeface="ui-sans-serif"/>
+              </a:rPr>
+              <a:t>App</a:t>
+            </a:r>
+          </a:p>
+          <a:p>
+            <a:pPr algn="l">
+              <a:spcBef>
+                <a:spcPts val="600"/>
+              </a:spcBef>
+              <a:buNone/>
+            </a:pPr>
+            <a:r>
+              <a:rPr lang="en-US" sz="1100" b="0" i="0" dirty="0" err="1">
+                <a:solidFill>
+                  <a:srgbClr val="355163"/>
+                </a:solidFill>
+                <a:effectLst/>
+                <a:latin typeface="ui-sans-serif"/>
+              </a:rPr>
+              <a:t>Streamlit</a:t>
+            </a:r>
+            <a:r>
+              <a:rPr lang="en-US" sz="1100" b="0" i="0" dirty="0">
+                <a:solidFill>
+                  <a:srgbClr val="355163"/>
+                </a:solidFill>
+                <a:effectLst/>
+                <a:latin typeface="ui-sans-serif"/>
+              </a:rPr>
+              <a:t> interface with sidebar controls, charts, forecast table, and comparisons.</a:t>
+            </a:r>
+          </a:p>
+        </p:txBody>
+      </p:sp>
+      <p:sp>
+        <p:nvSpPr>
+          <p:cNvPr id="28" name="TextBox 27">
+            <a:extLst>
+              <a:ext uri="{FF2B5EF4-FFF2-40B4-BE49-F238E27FC236}">
+                <a16:creationId xmlns:a16="http://schemas.microsoft.com/office/drawing/2014/main" id="{56892853-FE97-3A18-1839-11592F01144A}"/>
+              </a:ext>
+            </a:extLst>
+          </p:cNvPr>
+          <p:cNvSpPr txBox="1"/>
           <p:nvPr/>
         </p:nvSpPr>
         <p:spPr>
           <a:xfrm>
-            <a:off x="8261896" y="2598012"/>
-            <a:ext cx="2968079" cy="457200"/>
+            <a:off x="8039450" y="4697997"/>
+            <a:ext cx="1937469" cy="846386"/>
           </a:xfrm>
           <a:prstGeom prst="rect">
             <a:avLst/>
           </a:prstGeom>
           <a:noFill/>
-          <a:ln/>
         </p:spPr>
         <p:txBody>
-          <a:bodyPr wrap="square" lIns="0" tIns="0" rIns="0" bIns="0" rtlCol="0" anchor="t"/>
-          <a:lstStyle/>
-          <a:p>
-            <a:pPr marL="0" indent="0">
-              <a:lnSpc>
-                <a:spcPts val="1800"/>
-              </a:lnSpc>
+          <a:bodyPr wrap="square">
+            <a:spAutoFit/>
+          </a:bodyPr>
+          <a:lstStyle/>
+          <a:p>
+            <a:pPr algn="l">
               <a:buNone/>
             </a:pPr>
             <a:r>
-              <a:rPr lang="en-US" sz="1200" dirty="0">
+              <a:rPr lang="en-US" sz="1100" b="0" i="0" cap="all" dirty="0">
                 <a:solidFill>
-                  <a:srgbClr val="334155"/>
+                  <a:srgbClr val="64748B"/>
                 </a:solidFill>
-                <a:latin typeface="ui-sans-serif" pitchFamily="34" charset="0"/>
-                <a:ea typeface="ui-sans-serif" pitchFamily="34" charset="-122"/>
-                <a:cs typeface="ui-sans-serif" pitchFamily="34" charset="-120"/>
-              </a:rPr>
-              <a:t>Build clear visual summaries of exposure events.</a:t>
-            </a:r>
-            <a:endParaRPr lang="en-US" sz="1200" dirty="0"/>
-          </a:p>
-        </p:txBody>
-      </p:sp>
-      <p:sp>
-        <p:nvSpPr>
-          <p:cNvPr id="19" name="Text 15">
-            <a:extLst>
-              <a:ext uri="{FF2B5EF4-FFF2-40B4-BE49-F238E27FC236}">
-                <a16:creationId xmlns:a16="http://schemas.microsoft.com/office/drawing/2014/main" id="{8ED05553-6A12-6CD5-AFC1-4848E1B107B7}"/>
-              </a:ext>
-            </a:extLst>
-          </p:cNvPr>
-          <p:cNvSpPr/>
-          <p:nvPr/>
-        </p:nvSpPr>
-        <p:spPr>
-          <a:xfrm>
-            <a:off x="8261896" y="3207612"/>
-            <a:ext cx="3027441" cy="266700"/>
-          </a:xfrm>
-          <a:prstGeom prst="rect">
-            <a:avLst/>
-          </a:prstGeom>
-          <a:noFill/>
-          <a:ln/>
-        </p:spPr>
-        <p:txBody>
-          <a:bodyPr wrap="square" lIns="0" tIns="0" rIns="0" bIns="0" rtlCol="0" anchor="t"/>
-          <a:lstStyle/>
-          <a:p>
-            <a:pPr marL="0" indent="0">
-              <a:lnSpc>
-                <a:spcPts val="2100"/>
-              </a:lnSpc>
+                <a:effectLst/>
+                <a:latin typeface="ui-sans-serif"/>
+              </a:rPr>
+              <a:t>AI layer</a:t>
+            </a:r>
+          </a:p>
+          <a:p>
+            <a:pPr algn="l">
+              <a:spcBef>
+                <a:spcPts val="600"/>
+              </a:spcBef>
               <a:buNone/>
             </a:pPr>
             <a:r>
-              <a:rPr lang="en-US" sz="1350" b="1" dirty="0">
+              <a:rPr lang="en-US" sz="1100" b="0" i="0" dirty="0">
                 <a:solidFill>
-                  <a:srgbClr val="0F172A"/>
+                  <a:srgbClr val="355163"/>
                 </a:solidFill>
-                <a:latin typeface="ui-sans-serif" pitchFamily="34" charset="0"/>
-                <a:ea typeface="ui-sans-serif" pitchFamily="34" charset="-122"/>
-                <a:cs typeface="ui-sans-serif" pitchFamily="34" charset="-120"/>
-              </a:rPr>
-              <a:t>2. Test temporal structure</a:t>
-            </a:r>
-            <a:endParaRPr lang="en-US" sz="1350" dirty="0"/>
-          </a:p>
-        </p:txBody>
-      </p:sp>
-      <p:sp>
-        <p:nvSpPr>
-          <p:cNvPr id="20" name="Text 16">
-            <a:extLst>
-              <a:ext uri="{FF2B5EF4-FFF2-40B4-BE49-F238E27FC236}">
-                <a16:creationId xmlns:a16="http://schemas.microsoft.com/office/drawing/2014/main" id="{2AE7BD19-A995-5F68-D6C8-C45F97B41860}"/>
-              </a:ext>
-            </a:extLst>
-          </p:cNvPr>
-          <p:cNvSpPr/>
-          <p:nvPr/>
-        </p:nvSpPr>
-        <p:spPr>
-          <a:xfrm>
-            <a:off x="8261896" y="3474312"/>
-            <a:ext cx="2968079" cy="457200"/>
-          </a:xfrm>
-          <a:prstGeom prst="rect">
-            <a:avLst/>
-          </a:prstGeom>
-          <a:noFill/>
-          <a:ln/>
-        </p:spPr>
-        <p:txBody>
-          <a:bodyPr wrap="square" lIns="0" tIns="0" rIns="0" bIns="0" rtlCol="0" anchor="t"/>
-          <a:lstStyle/>
-          <a:p>
-            <a:pPr marL="0" indent="0">
-              <a:lnSpc>
-                <a:spcPts val="1800"/>
-              </a:lnSpc>
-              <a:buNone/>
-            </a:pPr>
-            <a:r>
-              <a:rPr lang="en-US" sz="1200" dirty="0">
-                <a:solidFill>
-                  <a:srgbClr val="334155"/>
-                </a:solidFill>
-                <a:latin typeface="ui-sans-serif" pitchFamily="34" charset="0"/>
-                <a:ea typeface="ui-sans-serif" pitchFamily="34" charset="-122"/>
-                <a:cs typeface="ui-sans-serif" pitchFamily="34" charset="-120"/>
-              </a:rPr>
-              <a:t>Check whether weekly exposure counts show trend or seasonality.</a:t>
-            </a:r>
-            <a:endParaRPr lang="en-US" sz="1200" dirty="0"/>
-          </a:p>
-        </p:txBody>
-      </p:sp>
-      <p:sp>
-        <p:nvSpPr>
-          <p:cNvPr id="21" name="Text 17">
-            <a:extLst>
-              <a:ext uri="{FF2B5EF4-FFF2-40B4-BE49-F238E27FC236}">
-                <a16:creationId xmlns:a16="http://schemas.microsoft.com/office/drawing/2014/main" id="{CC820CC5-6FD3-B466-9677-6A4975F0B93F}"/>
-              </a:ext>
-            </a:extLst>
-          </p:cNvPr>
-          <p:cNvSpPr/>
-          <p:nvPr/>
-        </p:nvSpPr>
-        <p:spPr>
-          <a:xfrm>
-            <a:off x="8261896" y="4083912"/>
-            <a:ext cx="3027441" cy="266700"/>
-          </a:xfrm>
-          <a:prstGeom prst="rect">
-            <a:avLst/>
-          </a:prstGeom>
-          <a:noFill/>
-          <a:ln/>
-        </p:spPr>
-        <p:txBody>
-          <a:bodyPr wrap="square" lIns="0" tIns="0" rIns="0" bIns="0" rtlCol="0" anchor="t"/>
-          <a:lstStyle/>
-          <a:p>
-            <a:pPr marL="0" indent="0">
-              <a:lnSpc>
-                <a:spcPts val="2100"/>
-              </a:lnSpc>
-              <a:buNone/>
-            </a:pPr>
-            <a:r>
-              <a:rPr lang="en-US" sz="1350" b="1" dirty="0">
-                <a:solidFill>
-                  <a:srgbClr val="0F172A"/>
-                </a:solidFill>
-                <a:latin typeface="ui-sans-serif" pitchFamily="34" charset="0"/>
-                <a:ea typeface="ui-sans-serif" pitchFamily="34" charset="-122"/>
-                <a:cs typeface="ui-sans-serif" pitchFamily="34" charset="-120"/>
-              </a:rPr>
-              <a:t>3. Communicate uncertainty</a:t>
-            </a:r>
-            <a:endParaRPr lang="en-US" sz="1350" dirty="0"/>
-          </a:p>
-        </p:txBody>
-      </p:sp>
-      <p:sp>
-        <p:nvSpPr>
-          <p:cNvPr id="22" name="Text 18">
-            <a:extLst>
-              <a:ext uri="{FF2B5EF4-FFF2-40B4-BE49-F238E27FC236}">
-                <a16:creationId xmlns:a16="http://schemas.microsoft.com/office/drawing/2014/main" id="{39F767B3-33E4-5262-961E-E941A00B52F4}"/>
-              </a:ext>
-            </a:extLst>
-          </p:cNvPr>
-          <p:cNvSpPr/>
-          <p:nvPr/>
-        </p:nvSpPr>
-        <p:spPr>
-          <a:xfrm>
-            <a:off x="8261896" y="4350612"/>
-            <a:ext cx="2968079" cy="457200"/>
-          </a:xfrm>
-          <a:prstGeom prst="rect">
-            <a:avLst/>
-          </a:prstGeom>
-          <a:noFill/>
-          <a:ln/>
-        </p:spPr>
-        <p:txBody>
-          <a:bodyPr wrap="square" lIns="0" tIns="0" rIns="0" bIns="0" rtlCol="0" anchor="t"/>
-          <a:lstStyle/>
-          <a:p>
-            <a:pPr marL="0" indent="0">
-              <a:lnSpc>
-                <a:spcPts val="1800"/>
-              </a:lnSpc>
-              <a:buNone/>
-            </a:pPr>
-            <a:r>
-              <a:rPr lang="en-US" sz="1200" dirty="0">
-                <a:solidFill>
-                  <a:srgbClr val="334155"/>
-                </a:solidFill>
-                <a:latin typeface="ui-sans-serif" pitchFamily="34" charset="0"/>
-                <a:ea typeface="ui-sans-serif" pitchFamily="34" charset="-122"/>
-                <a:cs typeface="ui-sans-serif" pitchFamily="34" charset="-120"/>
-              </a:rPr>
-              <a:t>Show forecast error with MAE, RMSE, and simple planning language.</a:t>
-            </a:r>
-            <a:endParaRPr lang="en-US" sz="1200" dirty="0"/>
+                <a:effectLst/>
+                <a:latin typeface="ui-sans-serif"/>
+              </a:rPr>
+              <a:t>Gemini/OpenAI prompt that converts forecast reliability into planning guidance.</a:t>
+            </a:r>
           </a:p>
         </p:txBody>
       </p:sp>
@@ -5366,7 +5736,13 @@
   <p:cSld>
     <p:spTree>
       <p:nvGrpSpPr>
-        <p:cNvPr id="1" name=""/>
+        <p:cNvPr id="1" name="">
+          <a:extLst>
+            <a:ext uri="{FF2B5EF4-FFF2-40B4-BE49-F238E27FC236}">
+              <a16:creationId xmlns:a16="http://schemas.microsoft.com/office/drawing/2014/main" id="{0C95DDDE-1D77-0F21-8040-B74E26147885}"/>
+            </a:ext>
+          </a:extLst>
+        </p:cNvPr>
         <p:cNvGrpSpPr/>
         <p:nvPr/>
       </p:nvGrpSpPr>
@@ -5380,10 +5756,10 @@
       </p:grpSpPr>
       <p:sp>
         <p:nvSpPr>
-          <p:cNvPr id="4" name="Text 0">
-            <a:extLst>
-              <a:ext uri="{FF2B5EF4-FFF2-40B4-BE49-F238E27FC236}">
-                <a16:creationId xmlns:a16="http://schemas.microsoft.com/office/drawing/2014/main" id="{7817B718-52E0-FD72-1A55-A18C955BBEB6}"/>
+          <p:cNvPr id="11" name="Text 7">
+            <a:extLst>
+              <a:ext uri="{FF2B5EF4-FFF2-40B4-BE49-F238E27FC236}">
+                <a16:creationId xmlns:a16="http://schemas.microsoft.com/office/drawing/2014/main" id="{EF5F76A6-9F21-EE84-C65D-BDC14BF06838}"/>
               </a:ext>
             </a:extLst>
           </p:cNvPr>
@@ -5392,373 +5768,8 @@
         </p:nvSpPr>
         <p:spPr>
           <a:xfrm>
-            <a:off x="1850491" y="1495425"/>
-            <a:ext cx="2616101" cy="2609850"/>
-          </a:xfrm>
-          <a:prstGeom prst="roundRect">
-            <a:avLst>
-              <a:gd name="adj" fmla="val 84088"/>
-            </a:avLst>
-          </a:prstGeom>
-          <a:solidFill>
-            <a:srgbClr val="FFFFFF">
-              <a:alpha val="84000"/>
-            </a:srgbClr>
-          </a:solidFill>
-          <a:ln w="9525">
-            <a:solidFill>
-              <a:srgbClr val="0F172A"/>
-            </a:solidFill>
-          </a:ln>
-          <a:effectLst>
-            <a:outerShdw blurRad="323850" dist="152400" dir="5400000" algn="bl" rotWithShape="0">
-              <a:srgbClr val="0F172A">
-                <a:alpha val="6000"/>
-              </a:srgbClr>
-            </a:outerShdw>
-          </a:effectLst>
-        </p:spPr>
-        <p:txBody>
-          <a:bodyPr wrap="none" lIns="0" tIns="0" rIns="0" bIns="0" rtlCol="0" anchor="ctr">
-            <a:normAutofit/>
-          </a:bodyPr>
-          <a:lstStyle/>
-          <a:p>
-            <a:pPr marL="0" indent="0">
-              <a:buNone/>
-            </a:pPr>
-            <a:endParaRPr lang="en-US" dirty="0"/>
-          </a:p>
-        </p:txBody>
-      </p:sp>
-      <p:sp>
-        <p:nvSpPr>
-          <p:cNvPr id="5" name="Text 1">
-            <a:extLst>
-              <a:ext uri="{FF2B5EF4-FFF2-40B4-BE49-F238E27FC236}">
-                <a16:creationId xmlns:a16="http://schemas.microsoft.com/office/drawing/2014/main" id="{7B6FD070-A028-AB38-C35E-2A26D7DA8EB7}"/>
-              </a:ext>
-            </a:extLst>
-          </p:cNvPr>
-          <p:cNvSpPr/>
-          <p:nvPr/>
-        </p:nvSpPr>
-        <p:spPr>
-          <a:xfrm>
-            <a:off x="4657092" y="1495425"/>
-            <a:ext cx="2616250" cy="2609850"/>
-          </a:xfrm>
-          <a:prstGeom prst="roundRect">
-            <a:avLst>
-              <a:gd name="adj" fmla="val 84088"/>
-            </a:avLst>
-          </a:prstGeom>
-          <a:solidFill>
-            <a:srgbClr val="FFFFFF">
-              <a:alpha val="84000"/>
-            </a:srgbClr>
-          </a:solidFill>
-          <a:ln w="9525">
-            <a:solidFill>
-              <a:srgbClr val="0F172A"/>
-            </a:solidFill>
-          </a:ln>
-          <a:effectLst>
-            <a:outerShdw blurRad="323850" dist="152400" dir="5400000" algn="bl" rotWithShape="0">
-              <a:srgbClr val="0F172A">
-                <a:alpha val="6000"/>
-              </a:srgbClr>
-            </a:outerShdw>
-          </a:effectLst>
-        </p:spPr>
-        <p:txBody>
-          <a:bodyPr wrap="none" lIns="0" tIns="0" rIns="0" bIns="0" rtlCol="0" anchor="ctr">
-            <a:normAutofit/>
-          </a:bodyPr>
-          <a:lstStyle/>
-          <a:p>
-            <a:pPr marL="0" indent="0">
-              <a:buNone/>
-            </a:pPr>
-            <a:endParaRPr lang="en-US" dirty="0"/>
-          </a:p>
-        </p:txBody>
-      </p:sp>
-      <p:sp>
-        <p:nvSpPr>
-          <p:cNvPr id="6" name="Text 2">
-            <a:extLst>
-              <a:ext uri="{FF2B5EF4-FFF2-40B4-BE49-F238E27FC236}">
-                <a16:creationId xmlns:a16="http://schemas.microsoft.com/office/drawing/2014/main" id="{0E2DC41E-73F5-8E43-371C-402675684E07}"/>
-              </a:ext>
-            </a:extLst>
-          </p:cNvPr>
-          <p:cNvSpPr/>
-          <p:nvPr/>
-        </p:nvSpPr>
-        <p:spPr>
-          <a:xfrm>
-            <a:off x="7463841" y="1495425"/>
-            <a:ext cx="2616101" cy="2609850"/>
-          </a:xfrm>
-          <a:prstGeom prst="roundRect">
-            <a:avLst>
-              <a:gd name="adj" fmla="val 84088"/>
-            </a:avLst>
-          </a:prstGeom>
-          <a:solidFill>
-            <a:srgbClr val="FFFFFF">
-              <a:alpha val="84000"/>
-            </a:srgbClr>
-          </a:solidFill>
-          <a:ln w="9525">
-            <a:solidFill>
-              <a:srgbClr val="0F172A"/>
-            </a:solidFill>
-          </a:ln>
-          <a:effectLst>
-            <a:outerShdw blurRad="323850" dist="152400" dir="5400000" algn="bl" rotWithShape="0">
-              <a:srgbClr val="0F172A">
-                <a:alpha val="6000"/>
-              </a:srgbClr>
-            </a:outerShdw>
-          </a:effectLst>
-        </p:spPr>
-        <p:txBody>
-          <a:bodyPr wrap="none" lIns="0" tIns="0" rIns="0" bIns="0" rtlCol="0" anchor="ctr">
-            <a:normAutofit/>
-          </a:bodyPr>
-          <a:lstStyle/>
-          <a:p>
-            <a:pPr marL="0" indent="0">
-              <a:buNone/>
-            </a:pPr>
-            <a:endParaRPr lang="en-US" dirty="0"/>
-          </a:p>
-        </p:txBody>
-      </p:sp>
-      <p:sp>
-        <p:nvSpPr>
-          <p:cNvPr id="7" name="Text 3">
-            <a:extLst>
-              <a:ext uri="{FF2B5EF4-FFF2-40B4-BE49-F238E27FC236}">
-                <a16:creationId xmlns:a16="http://schemas.microsoft.com/office/drawing/2014/main" id="{E9228A47-9ABC-7F93-2302-761975B003CB}"/>
-              </a:ext>
-            </a:extLst>
-          </p:cNvPr>
-          <p:cNvSpPr/>
-          <p:nvPr/>
-        </p:nvSpPr>
-        <p:spPr>
-          <a:xfrm>
-            <a:off x="1850491" y="4333875"/>
-            <a:ext cx="8229600" cy="1607046"/>
-          </a:xfrm>
-          <a:prstGeom prst="roundRect">
-            <a:avLst>
-              <a:gd name="adj" fmla="val 136559"/>
-            </a:avLst>
-          </a:prstGeom>
-          <a:solidFill>
-            <a:srgbClr val="FFFFFF">
-              <a:alpha val="84000"/>
-            </a:srgbClr>
-          </a:solidFill>
-          <a:ln w="9525">
-            <a:solidFill>
-              <a:srgbClr val="0F172A"/>
-            </a:solidFill>
-          </a:ln>
-          <a:effectLst>
-            <a:outerShdw blurRad="323850" dist="152400" dir="5400000" algn="bl" rotWithShape="0">
-              <a:srgbClr val="0F172A">
-                <a:alpha val="6000"/>
-              </a:srgbClr>
-            </a:outerShdw>
-          </a:effectLst>
-        </p:spPr>
-        <p:txBody>
-          <a:bodyPr wrap="none" lIns="0" tIns="0" rIns="0" bIns="0" rtlCol="0" anchor="ctr">
-            <a:normAutofit/>
-          </a:bodyPr>
-          <a:lstStyle/>
-          <a:p>
-            <a:pPr marL="0" indent="0">
-              <a:buNone/>
-            </a:pPr>
-            <a:endParaRPr lang="en-US" dirty="0"/>
-          </a:p>
-        </p:txBody>
-      </p:sp>
-      <p:sp>
-        <p:nvSpPr>
-          <p:cNvPr id="8" name="Text 4">
-            <a:extLst>
-              <a:ext uri="{FF2B5EF4-FFF2-40B4-BE49-F238E27FC236}">
-                <a16:creationId xmlns:a16="http://schemas.microsoft.com/office/drawing/2014/main" id="{10426AF4-068B-20D8-1B6F-65EF566671C1}"/>
-              </a:ext>
-            </a:extLst>
-          </p:cNvPr>
-          <p:cNvSpPr/>
-          <p:nvPr/>
-        </p:nvSpPr>
-        <p:spPr>
-          <a:xfrm>
-            <a:off x="2050516" y="4959846"/>
-            <a:ext cx="1474440" cy="685800"/>
-          </a:xfrm>
-          <a:prstGeom prst="roundRect">
-            <a:avLst>
-              <a:gd name="adj" fmla="val 213333"/>
-            </a:avLst>
-          </a:prstGeom>
-          <a:solidFill>
-            <a:srgbClr val="EAF4F7"/>
-          </a:solidFill>
-          <a:ln/>
-        </p:spPr>
-        <p:txBody>
-          <a:bodyPr wrap="square" lIns="152400" tIns="152400" rIns="152400" bIns="152400" rtlCol="0" anchor="t">
-            <a:normAutofit fontScale="77500" lnSpcReduction="20000"/>
-          </a:bodyPr>
-          <a:lstStyle/>
-          <a:p>
-            <a:pPr marL="0" indent="0" algn="ctr">
-              <a:buNone/>
-            </a:pPr>
-            <a:r>
-              <a:rPr lang="en-US" sz="1050" b="1" dirty="0">
-                <a:solidFill>
-                  <a:srgbClr val="334155"/>
-                </a:solidFill>
-                <a:latin typeface="ui-sans-serif" pitchFamily="34" charset="0"/>
-                <a:ea typeface="ui-sans-serif" pitchFamily="34" charset="-122"/>
-                <a:cs typeface="ui-sans-serif" pitchFamily="34" charset="-120"/>
-              </a:rPr>
-              <a:t>Raw exposure records</a:t>
-            </a:r>
-            <a:endParaRPr lang="en-US" sz="1050" dirty="0"/>
-          </a:p>
-        </p:txBody>
-      </p:sp>
-      <p:sp>
-        <p:nvSpPr>
-          <p:cNvPr id="9" name="Text 5">
-            <a:extLst>
-              <a:ext uri="{FF2B5EF4-FFF2-40B4-BE49-F238E27FC236}">
-                <a16:creationId xmlns:a16="http://schemas.microsoft.com/office/drawing/2014/main" id="{9A87925D-B74E-C234-F3DB-361E45838F51}"/>
-              </a:ext>
-            </a:extLst>
-          </p:cNvPr>
-          <p:cNvSpPr/>
-          <p:nvPr/>
-        </p:nvSpPr>
-        <p:spPr>
-          <a:xfrm>
-            <a:off x="5227996" y="4959846"/>
-            <a:ext cx="1474440" cy="685800"/>
-          </a:xfrm>
-          <a:prstGeom prst="roundRect">
-            <a:avLst>
-              <a:gd name="adj" fmla="val 213333"/>
-            </a:avLst>
-          </a:prstGeom>
-          <a:solidFill>
-            <a:srgbClr val="EAF4F7"/>
-          </a:solidFill>
-          <a:ln/>
-        </p:spPr>
-        <p:txBody>
-          <a:bodyPr wrap="square" lIns="152400" tIns="152400" rIns="152400" bIns="152400" rtlCol="0" anchor="t">
-            <a:normAutofit fontScale="70000" lnSpcReduction="20000"/>
-          </a:bodyPr>
-          <a:lstStyle/>
-          <a:p>
-            <a:pPr marL="0" indent="0" algn="ctr">
-              <a:buNone/>
-            </a:pPr>
-            <a:r>
-              <a:rPr lang="en-US" sz="1050" b="1" dirty="0">
-                <a:solidFill>
-                  <a:srgbClr val="334155"/>
-                </a:solidFill>
-                <a:latin typeface="ui-sans-serif" pitchFamily="34" charset="0"/>
-                <a:ea typeface="ui-sans-serif" pitchFamily="34" charset="-122"/>
-                <a:cs typeface="ui-sans-serif" pitchFamily="34" charset="-120"/>
-              </a:rPr>
-              <a:t>SQL cleaning &amp; cohort build</a:t>
-            </a:r>
-            <a:endParaRPr lang="en-US" sz="1050" dirty="0"/>
-          </a:p>
-        </p:txBody>
-      </p:sp>
-      <p:sp>
-        <p:nvSpPr>
-          <p:cNvPr id="10" name="Text 6">
-            <a:extLst>
-              <a:ext uri="{FF2B5EF4-FFF2-40B4-BE49-F238E27FC236}">
-                <a16:creationId xmlns:a16="http://schemas.microsoft.com/office/drawing/2014/main" id="{4A9606E6-7C68-3C69-8FBF-DB96FE36473C}"/>
-              </a:ext>
-            </a:extLst>
-          </p:cNvPr>
-          <p:cNvSpPr/>
-          <p:nvPr/>
-        </p:nvSpPr>
-        <p:spPr>
-          <a:xfrm>
-            <a:off x="8405477" y="4864596"/>
-            <a:ext cx="1474589" cy="876300"/>
-          </a:xfrm>
-          <a:prstGeom prst="roundRect">
-            <a:avLst>
-              <a:gd name="adj" fmla="val 166957"/>
-            </a:avLst>
-          </a:prstGeom>
-          <a:solidFill>
-            <a:srgbClr val="EAF4F7"/>
-          </a:solidFill>
-          <a:ln/>
-        </p:spPr>
-        <p:txBody>
-          <a:bodyPr wrap="square" lIns="152400" tIns="152400" rIns="152400" bIns="152400" rtlCol="0" anchor="t">
-            <a:normAutofit fontScale="85000" lnSpcReduction="10000"/>
-          </a:bodyPr>
-          <a:lstStyle/>
-          <a:p>
-            <a:pPr marL="0" indent="0" algn="ctr">
-              <a:buNone/>
-            </a:pPr>
-            <a:r>
-              <a:rPr lang="en-US" sz="1050" b="1" dirty="0">
-                <a:solidFill>
-                  <a:srgbClr val="334155"/>
-                </a:solidFill>
-                <a:latin typeface="ui-sans-serif" pitchFamily="34" charset="0"/>
-                <a:ea typeface="ui-sans-serif" pitchFamily="34" charset="-122"/>
-                <a:cs typeface="ui-sans-serif" pitchFamily="34" charset="-120"/>
-              </a:rPr>
-              <a:t>CSV → daily counts → weekly series</a:t>
-            </a:r>
-            <a:endParaRPr lang="en-US" sz="1050" dirty="0"/>
-          </a:p>
-        </p:txBody>
-      </p:sp>
-      <p:sp>
-        <p:nvSpPr>
-          <p:cNvPr id="11" name="Text 7">
-            <a:extLst>
-              <a:ext uri="{FF2B5EF4-FFF2-40B4-BE49-F238E27FC236}">
-                <a16:creationId xmlns:a16="http://schemas.microsoft.com/office/drawing/2014/main" id="{CCCD754C-62D1-9660-B7A7-5E0A9204FE4C}"/>
-              </a:ext>
-            </a:extLst>
-          </p:cNvPr>
-          <p:cNvSpPr/>
-          <p:nvPr/>
-        </p:nvSpPr>
-        <p:spPr>
-          <a:xfrm>
-            <a:off x="767629" y="365969"/>
-            <a:ext cx="8394192" cy="178296"/>
+            <a:off x="834280" y="392448"/>
+            <a:ext cx="2678465" cy="259402"/>
           </a:xfrm>
           <a:prstGeom prst="rect">
             <a:avLst/>
@@ -5770,23 +5781,15 @@
           <a:bodyPr wrap="square" lIns="0" tIns="0" rIns="0" bIns="0" rtlCol="0" anchor="t"/>
           <a:lstStyle/>
           <a:p>
-            <a:pPr marL="0" indent="0">
-              <a:lnSpc>
-                <a:spcPts val="1404"/>
-              </a:lnSpc>
-              <a:buNone/>
-            </a:pPr>
-            <a:r>
-              <a:rPr lang="en-US" sz="2000" b="1" dirty="0">
-                <a:solidFill>
-                  <a:srgbClr val="64748B"/>
-                </a:solidFill>
-                <a:latin typeface="ui-sans-serif" pitchFamily="34" charset="0"/>
-                <a:ea typeface="ui-sans-serif" pitchFamily="34" charset="-122"/>
-                <a:cs typeface="ui-sans-serif" pitchFamily="34" charset="-120"/>
-              </a:rPr>
-              <a:t>Data pipeline</a:t>
-            </a:r>
+            <a:r>
+              <a:rPr lang="en-CA" cap="all" dirty="0"/>
+              <a:t>DATA AND FINDINGS</a:t>
+            </a:r>
+          </a:p>
+          <a:p>
+            <a:br>
+              <a:rPr lang="en-CA" sz="2000" dirty="0"/>
+            </a:br>
             <a:endParaRPr lang="en-US" sz="2000" dirty="0"/>
           </a:p>
         </p:txBody>
@@ -5796,7 +5799,7 @@
           <p:cNvPr id="12" name="Text 8">
             <a:extLst>
               <a:ext uri="{FF2B5EF4-FFF2-40B4-BE49-F238E27FC236}">
-                <a16:creationId xmlns:a16="http://schemas.microsoft.com/office/drawing/2014/main" id="{059716B7-E857-FF2B-9DED-1583D60D1E1A}"/>
+                <a16:creationId xmlns:a16="http://schemas.microsoft.com/office/drawing/2014/main" id="{68F9AC32-B1D3-40FA-D91A-9AF0D7A69258}"/>
               </a:ext>
             </a:extLst>
           </p:cNvPr>
@@ -5805,8 +5808,8 @@
         </p:nvSpPr>
         <p:spPr>
           <a:xfrm>
-            <a:off x="761367" y="733425"/>
-            <a:ext cx="10999084" cy="1371600"/>
+            <a:off x="834279" y="766602"/>
+            <a:ext cx="10455057" cy="618570"/>
           </a:xfrm>
           <a:prstGeom prst="rect">
             <a:avLst/>
@@ -5818,24 +5821,10 @@
           <a:bodyPr wrap="square" lIns="0" tIns="0" rIns="0" bIns="0" rtlCol="0" anchor="t"/>
           <a:lstStyle/>
           <a:p>
-            <a:pPr marL="0" indent="0">
-              <a:lnSpc>
-                <a:spcPts val="5400"/>
-              </a:lnSpc>
-              <a:buNone/>
-            </a:pPr>
-            <a:r>
-              <a:rPr lang="en-US" sz="3200" b="1" dirty="0">
-                <a:solidFill>
-                  <a:srgbClr val="0F172A"/>
-                </a:solidFill>
-                <a:latin typeface="Manrope" pitchFamily="34" charset="0"/>
-                <a:ea typeface="Manrope" pitchFamily="34" charset="-122"/>
-                <a:cs typeface="Manrope" pitchFamily="34" charset="-120"/>
-              </a:rPr>
-              <a:t>Pragmatic design: one clean outcome, one usable weekly series</a:t>
-            </a:r>
-            <a:endParaRPr lang="en-US" sz="3200" dirty="0"/>
+            <a:r>
+              <a:rPr lang="en-US" sz="3200" b="1" dirty="0"/>
+              <a:t>What the data is already telling us</a:t>
+            </a:r>
           </a:p>
         </p:txBody>
       </p:sp>
@@ -5844,7 +5833,7 @@
           <p:cNvPr id="13" name="Text 9">
             <a:extLst>
               <a:ext uri="{FF2B5EF4-FFF2-40B4-BE49-F238E27FC236}">
-                <a16:creationId xmlns:a16="http://schemas.microsoft.com/office/drawing/2014/main" id="{2A0C11FD-2877-BA4B-FE4C-B0A146BBB0D6}"/>
+                <a16:creationId xmlns:a16="http://schemas.microsoft.com/office/drawing/2014/main" id="{6AC6CBD0-0EA6-0C62-78B8-78807C6644CA}"/>
               </a:ext>
             </a:extLst>
           </p:cNvPr>
@@ -5853,8 +5842,8 @@
         </p:nvSpPr>
         <p:spPr>
           <a:xfrm>
-            <a:off x="2050516" y="1695450"/>
-            <a:ext cx="2260372" cy="342900"/>
+            <a:off x="834279" y="2362199"/>
+            <a:ext cx="4156621" cy="1376881"/>
           </a:xfrm>
           <a:prstGeom prst="rect">
             <a:avLst/>
@@ -5866,33 +5855,143 @@
           <a:bodyPr wrap="square" lIns="0" tIns="0" rIns="0" bIns="0" rtlCol="0" anchor="t"/>
           <a:lstStyle/>
           <a:p>
-            <a:pPr marL="0" indent="0">
-              <a:lnSpc>
-                <a:spcPts val="2700"/>
-              </a:lnSpc>
-              <a:buNone/>
+            <a:pPr marL="171450" indent="-171450">
+              <a:buFont typeface="Arial" panose="020B0604020202020204" pitchFamily="34" charset="0"/>
+              <a:buChar char="•"/>
             </a:pPr>
             <a:r>
-              <a:rPr lang="en-US" sz="2250" dirty="0">
+              <a:rPr lang="en-US" sz="1200" dirty="0">
+                <a:latin typeface="Aptos" panose="020B0004020202020204" pitchFamily="34" charset="0"/>
+              </a:rPr>
+              <a:t>Both 2023 and 2024 show a similar seasonal shape: exposures are highest around January and trend downward toward the end of the year.</a:t>
+            </a:r>
+          </a:p>
+          <a:p>
+            <a:pPr marL="171450" indent="-171450">
+              <a:buFont typeface="Arial" panose="020B0604020202020204" pitchFamily="34" charset="0"/>
+              <a:buChar char="•"/>
+            </a:pPr>
+            <a:r>
+              <a:rPr lang="en-US" sz="1200" dirty="0">
+                <a:latin typeface="Aptos" panose="020B0004020202020204" pitchFamily="34" charset="0"/>
+              </a:rPr>
+              <a:t>The fact that 2023 still shows the same directional pattern, even while looking inflated, suggests the seasonal signal is real.</a:t>
+            </a:r>
+          </a:p>
+          <a:p>
+            <a:pPr marL="171450" indent="-171450">
+              <a:buFont typeface="Arial" panose="020B0604020202020204" pitchFamily="34" charset="0"/>
+              <a:buChar char="•"/>
+            </a:pPr>
+            <a:r>
+              <a:rPr lang="en-US" sz="1200" dirty="0">
+                <a:latin typeface="Aptos" panose="020B0004020202020204" pitchFamily="34" charset="0"/>
+              </a:rPr>
+              <a:t>This gives a useful planning insight now, while still leaving room for a stronger cleaned version later.</a:t>
+            </a:r>
+          </a:p>
+        </p:txBody>
+      </p:sp>
+      <p:sp>
+        <p:nvSpPr>
+          <p:cNvPr id="3" name="TextBox 2">
+            <a:extLst>
+              <a:ext uri="{FF2B5EF4-FFF2-40B4-BE49-F238E27FC236}">
+                <a16:creationId xmlns:a16="http://schemas.microsoft.com/office/drawing/2014/main" id="{C62D3D4C-68BD-EC24-24D5-9B49DD5362E3}"/>
+              </a:ext>
+            </a:extLst>
+          </p:cNvPr>
+          <p:cNvSpPr txBox="1"/>
+          <p:nvPr/>
+        </p:nvSpPr>
+        <p:spPr>
+          <a:xfrm>
+            <a:off x="834279" y="1893867"/>
+            <a:ext cx="1942145" cy="369332"/>
+          </a:xfrm>
+          <a:prstGeom prst="rect">
+            <a:avLst/>
+          </a:prstGeom>
+          <a:noFill/>
+        </p:spPr>
+        <p:txBody>
+          <a:bodyPr wrap="square">
+            <a:spAutoFit/>
+          </a:bodyPr>
+          <a:lstStyle/>
+          <a:p>
+            <a:pPr algn="l">
+              <a:spcAft>
+                <a:spcPts val="900"/>
+              </a:spcAft>
+              <a:buNone/>
+            </a:pPr>
+            <a:r>
+              <a:rPr lang="en-CA" b="1" i="0" dirty="0">
                 <a:solidFill>
-                  <a:srgbClr val="0F172A"/>
+                  <a:srgbClr val="0F766E"/>
                 </a:solidFill>
-                <a:latin typeface="ui-sans-serif" pitchFamily="34" charset="0"/>
-                <a:ea typeface="ui-sans-serif" pitchFamily="34" charset="-122"/>
-                <a:cs typeface="ui-sans-serif" pitchFamily="34" charset="-120"/>
-              </a:rPr>
-              <a:t>🗂️</a:t>
-            </a:r>
-            <a:endParaRPr lang="en-US" sz="2250" dirty="0"/>
-          </a:p>
-        </p:txBody>
-      </p:sp>
-      <p:sp>
-        <p:nvSpPr>
-          <p:cNvPr id="14" name="Text 10">
-            <a:extLst>
-              <a:ext uri="{FF2B5EF4-FFF2-40B4-BE49-F238E27FC236}">
-                <a16:creationId xmlns:a16="http://schemas.microsoft.com/office/drawing/2014/main" id="{E64BFE44-84E0-42B3-AAFA-6F487BDE3594}"/>
+                <a:effectLst/>
+                <a:latin typeface="ui-sans-serif"/>
+              </a:rPr>
+              <a:t>Observed pattern</a:t>
+            </a:r>
+          </a:p>
+        </p:txBody>
+      </p:sp>
+      <p:sp>
+        <p:nvSpPr>
+          <p:cNvPr id="4" name="TextBox 3">
+            <a:extLst>
+              <a:ext uri="{FF2B5EF4-FFF2-40B4-BE49-F238E27FC236}">
+                <a16:creationId xmlns:a16="http://schemas.microsoft.com/office/drawing/2014/main" id="{C1BBBD4A-5879-66C4-170F-318DE9114A1E}"/>
+              </a:ext>
+            </a:extLst>
+          </p:cNvPr>
+          <p:cNvSpPr txBox="1"/>
+          <p:nvPr/>
+        </p:nvSpPr>
+        <p:spPr>
+          <a:xfrm>
+            <a:off x="5690858" y="1893867"/>
+            <a:ext cx="2203764" cy="369332"/>
+          </a:xfrm>
+          <a:prstGeom prst="rect">
+            <a:avLst/>
+          </a:prstGeom>
+          <a:noFill/>
+        </p:spPr>
+        <p:txBody>
+          <a:bodyPr wrap="square">
+            <a:spAutoFit/>
+          </a:bodyPr>
+          <a:lstStyle/>
+          <a:p>
+            <a:pPr algn="l">
+              <a:spcAft>
+                <a:spcPts val="900"/>
+              </a:spcAft>
+              <a:buNone/>
+            </a:pPr>
+            <a:r>
+              <a:rPr lang="en-CA" b="1" i="0" dirty="0">
+                <a:solidFill>
+                  <a:srgbClr val="0F766E"/>
+                </a:solidFill>
+                <a:effectLst/>
+                <a:latin typeface="ui-sans-serif"/>
+              </a:rPr>
+              <a:t>Data limitation</a:t>
+            </a:r>
+          </a:p>
+        </p:txBody>
+      </p:sp>
+      <p:sp>
+        <p:nvSpPr>
+          <p:cNvPr id="6" name="Text 9">
+            <a:extLst>
+              <a:ext uri="{FF2B5EF4-FFF2-40B4-BE49-F238E27FC236}">
+                <a16:creationId xmlns:a16="http://schemas.microsoft.com/office/drawing/2014/main" id="{0E37DDBB-E0C8-DBBE-856F-A04317A2C232}"/>
               </a:ext>
             </a:extLst>
           </p:cNvPr>
@@ -5901,8 +6000,8 @@
         </p:nvSpPr>
         <p:spPr>
           <a:xfrm>
-            <a:off x="2050516" y="2152650"/>
-            <a:ext cx="2260372" cy="266700"/>
+            <a:off x="5690858" y="2353144"/>
+            <a:ext cx="4156621" cy="1376881"/>
           </a:xfrm>
           <a:prstGeom prst="rect">
             <a:avLst/>
@@ -5914,511 +6013,209 @@
           <a:bodyPr wrap="square" lIns="0" tIns="0" rIns="0" bIns="0" rtlCol="0" anchor="t"/>
           <a:lstStyle/>
           <a:p>
-            <a:pPr marL="0" indent="0">
-              <a:lnSpc>
-                <a:spcPts val="2100"/>
-              </a:lnSpc>
-              <a:buNone/>
+            <a:pPr marL="171450" indent="-171450">
+              <a:buFont typeface="Arial" panose="020B0604020202020204" pitchFamily="34" charset="0"/>
+              <a:buChar char="•"/>
             </a:pPr>
             <a:r>
-              <a:rPr lang="en-US" sz="1500" b="1" dirty="0">
-                <a:solidFill>
-                  <a:srgbClr val="0F172A"/>
-                </a:solidFill>
-                <a:latin typeface="ui-sans-serif" pitchFamily="34" charset="0"/>
-                <a:ea typeface="ui-sans-serif" pitchFamily="34" charset="-122"/>
-                <a:cs typeface="ui-sans-serif" pitchFamily="34" charset="-120"/>
-              </a:rPr>
-              <a:t>Source data</a:t>
-            </a:r>
-            <a:endParaRPr lang="en-US" sz="1500" dirty="0"/>
-          </a:p>
-        </p:txBody>
-      </p:sp>
-      <p:sp>
-        <p:nvSpPr>
-          <p:cNvPr id="15" name="Text 11">
-            <a:extLst>
-              <a:ext uri="{FF2B5EF4-FFF2-40B4-BE49-F238E27FC236}">
-                <a16:creationId xmlns:a16="http://schemas.microsoft.com/office/drawing/2014/main" id="{89E1D60C-CD32-A2FC-0A15-73C46B50CCF3}"/>
-              </a:ext>
-            </a:extLst>
-          </p:cNvPr>
-          <p:cNvSpPr/>
+              <a:rPr lang="en-US" sz="1200" dirty="0">
+                <a:latin typeface="Aptos" panose="020B0004020202020204" pitchFamily="34" charset="0"/>
+              </a:rPr>
+              <a:t>The 2023 data likely still needs additional filters and cleanup. Because the project timeline was short, the current version keeps that year available for exploration, but the strongest modeling decisions should rely more heavily on the cleaner 2024 signal.</a:t>
+            </a:r>
+          </a:p>
+        </p:txBody>
+      </p:sp>
+      <p:sp>
+        <p:nvSpPr>
+          <p:cNvPr id="5" name="TextBox 4">
+            <a:extLst>
+              <a:ext uri="{FF2B5EF4-FFF2-40B4-BE49-F238E27FC236}">
+                <a16:creationId xmlns:a16="http://schemas.microsoft.com/office/drawing/2014/main" id="{ECB542FC-1A30-89E8-F95E-640B8A1AB5D9}"/>
+              </a:ext>
+            </a:extLst>
+          </p:cNvPr>
+          <p:cNvSpPr txBox="1"/>
           <p:nvPr/>
         </p:nvSpPr>
         <p:spPr>
           <a:xfrm>
-            <a:off x="2050516" y="2495550"/>
-            <a:ext cx="2216051" cy="1371600"/>
+            <a:off x="933868" y="4346165"/>
+            <a:ext cx="2180525" cy="1123384"/>
           </a:xfrm>
           <a:prstGeom prst="rect">
             <a:avLst/>
           </a:prstGeom>
           <a:noFill/>
-          <a:ln/>
         </p:spPr>
         <p:txBody>
-          <a:bodyPr wrap="square" lIns="0" tIns="0" rIns="0" bIns="0" rtlCol="0" anchor="t"/>
-          <a:lstStyle/>
-          <a:p>
-            <a:pPr marL="0" indent="0">
-              <a:lnSpc>
-                <a:spcPts val="1800"/>
-              </a:lnSpc>
+          <a:bodyPr wrap="square">
+            <a:spAutoFit/>
+          </a:bodyPr>
+          <a:lstStyle/>
+          <a:p>
+            <a:pPr algn="l">
               <a:buNone/>
             </a:pPr>
             <a:r>
-              <a:rPr lang="en-US" sz="1200" dirty="0">
+              <a:rPr lang="en-US" sz="2000" b="1" i="0" dirty="0">
                 <a:solidFill>
-                  <a:srgbClr val="334155"/>
+                  <a:srgbClr val="0F766E"/>
                 </a:solidFill>
-                <a:latin typeface="ui-sans-serif" pitchFamily="34" charset="0"/>
-                <a:ea typeface="ui-sans-serif" pitchFamily="34" charset="-122"/>
-                <a:cs typeface="ui-sans-serif" pitchFamily="34" charset="-120"/>
-              </a:rPr>
-              <a:t>The final scope used a cleaned 2024 cohort of work-related exposure events rather than multi-year demand and injury modeling.</a:t>
-            </a:r>
-            <a:endParaRPr lang="en-US" sz="1200" dirty="0"/>
-          </a:p>
-        </p:txBody>
-      </p:sp>
-      <p:sp>
-        <p:nvSpPr>
-          <p:cNvPr id="16" name="Text 12">
-            <a:extLst>
-              <a:ext uri="{FF2B5EF4-FFF2-40B4-BE49-F238E27FC236}">
-                <a16:creationId xmlns:a16="http://schemas.microsoft.com/office/drawing/2014/main" id="{B560F500-3A5E-31D0-466C-EAD7FB11B3E5}"/>
-              </a:ext>
-            </a:extLst>
-          </p:cNvPr>
-          <p:cNvSpPr/>
+                <a:effectLst/>
+                <a:latin typeface="ui-sans-serif"/>
+              </a:rPr>
+              <a:t>Jan</a:t>
+            </a:r>
+          </a:p>
+          <a:p>
+            <a:pPr algn="l">
+              <a:spcBef>
+                <a:spcPts val="600"/>
+              </a:spcBef>
+              <a:buNone/>
+            </a:pPr>
+            <a:r>
+              <a:rPr lang="en-US" sz="1400" b="0" i="0" dirty="0">
+                <a:solidFill>
+                  <a:srgbClr val="355163"/>
+                </a:solidFill>
+                <a:effectLst/>
+                <a:latin typeface="ui-sans-serif"/>
+              </a:rPr>
+              <a:t>Highest exposure pressure appears near the start of the year.</a:t>
+            </a:r>
+          </a:p>
+        </p:txBody>
+      </p:sp>
+      <p:sp>
+        <p:nvSpPr>
+          <p:cNvPr id="8" name="TextBox 7">
+            <a:extLst>
+              <a:ext uri="{FF2B5EF4-FFF2-40B4-BE49-F238E27FC236}">
+                <a16:creationId xmlns:a16="http://schemas.microsoft.com/office/drawing/2014/main" id="{CDEC73D8-3F8B-720D-2EC4-94B20DEECCDA}"/>
+              </a:ext>
+            </a:extLst>
+          </p:cNvPr>
+          <p:cNvSpPr txBox="1"/>
           <p:nvPr/>
         </p:nvSpPr>
         <p:spPr>
           <a:xfrm>
-            <a:off x="4857117" y="1695450"/>
-            <a:ext cx="2260524" cy="342900"/>
+            <a:off x="4219293" y="4346165"/>
+            <a:ext cx="2573447" cy="1123384"/>
           </a:xfrm>
           <a:prstGeom prst="rect">
             <a:avLst/>
           </a:prstGeom>
           <a:noFill/>
-          <a:ln/>
         </p:spPr>
         <p:txBody>
-          <a:bodyPr wrap="square" lIns="0" tIns="0" rIns="0" bIns="0" rtlCol="0" anchor="t"/>
-          <a:lstStyle/>
-          <a:p>
-            <a:pPr marL="0" indent="0">
-              <a:lnSpc>
-                <a:spcPts val="2700"/>
-              </a:lnSpc>
+          <a:bodyPr wrap="square">
+            <a:spAutoFit/>
+          </a:bodyPr>
+          <a:lstStyle/>
+          <a:p>
+            <a:pPr algn="l">
               <a:buNone/>
             </a:pPr>
             <a:r>
-              <a:rPr lang="en-US" sz="2250" dirty="0">
+              <a:rPr lang="en-US" sz="2000" b="1" i="0" dirty="0">
                 <a:solidFill>
-                  <a:srgbClr val="0F172A"/>
+                  <a:srgbClr val="0F766E"/>
                 </a:solidFill>
-                <a:latin typeface="ui-sans-serif" pitchFamily="34" charset="0"/>
-                <a:ea typeface="ui-sans-serif" pitchFamily="34" charset="-122"/>
-                <a:cs typeface="ui-sans-serif" pitchFamily="34" charset="-120"/>
-              </a:rPr>
-              <a:t>⚙️</a:t>
-            </a:r>
-            <a:endParaRPr lang="en-US" sz="2250" dirty="0"/>
-          </a:p>
-        </p:txBody>
-      </p:sp>
-      <p:sp>
-        <p:nvSpPr>
-          <p:cNvPr id="17" name="Text 13">
-            <a:extLst>
-              <a:ext uri="{FF2B5EF4-FFF2-40B4-BE49-F238E27FC236}">
-                <a16:creationId xmlns:a16="http://schemas.microsoft.com/office/drawing/2014/main" id="{E5A7D5B5-8D3C-7840-0782-859BFC3D4879}"/>
-              </a:ext>
-            </a:extLst>
-          </p:cNvPr>
-          <p:cNvSpPr/>
+                <a:effectLst/>
+                <a:latin typeface="ui-sans-serif"/>
+              </a:rPr>
+              <a:t>Year-end</a:t>
+            </a:r>
+          </a:p>
+          <a:p>
+            <a:pPr algn="l">
+              <a:spcBef>
+                <a:spcPts val="600"/>
+              </a:spcBef>
+              <a:buNone/>
+            </a:pPr>
+            <a:r>
+              <a:rPr lang="en-US" sz="1400" b="0" i="0" dirty="0">
+                <a:solidFill>
+                  <a:srgbClr val="355163"/>
+                </a:solidFill>
+                <a:effectLst/>
+                <a:latin typeface="ui-sans-serif"/>
+              </a:rPr>
+              <a:t>Counts taper down toward late-year weeks in both 2023 and 2024.</a:t>
+            </a:r>
+          </a:p>
+        </p:txBody>
+      </p:sp>
+      <p:sp>
+        <p:nvSpPr>
+          <p:cNvPr id="14" name="TextBox 13">
+            <a:extLst>
+              <a:ext uri="{FF2B5EF4-FFF2-40B4-BE49-F238E27FC236}">
+                <a16:creationId xmlns:a16="http://schemas.microsoft.com/office/drawing/2014/main" id="{A0B18CF5-4C0F-4562-D703-1D0FEFF42360}"/>
+              </a:ext>
+            </a:extLst>
+          </p:cNvPr>
+          <p:cNvSpPr txBox="1"/>
           <p:nvPr/>
         </p:nvSpPr>
         <p:spPr>
           <a:xfrm>
-            <a:off x="4857117" y="2152650"/>
-            <a:ext cx="2260524" cy="266700"/>
+            <a:off x="7545636" y="4346165"/>
+            <a:ext cx="2301843" cy="1338828"/>
           </a:xfrm>
           <a:prstGeom prst="rect">
             <a:avLst/>
           </a:prstGeom>
           <a:noFill/>
-          <a:ln/>
         </p:spPr>
         <p:txBody>
-          <a:bodyPr wrap="square" lIns="0" tIns="0" rIns="0" bIns="0" rtlCol="0" anchor="t"/>
-          <a:lstStyle/>
-          <a:p>
-            <a:pPr marL="0" indent="0">
-              <a:lnSpc>
-                <a:spcPts val="2100"/>
-              </a:lnSpc>
+          <a:bodyPr wrap="square">
+            <a:spAutoFit/>
+          </a:bodyPr>
+          <a:lstStyle/>
+          <a:p>
+            <a:pPr algn="l">
               <a:buNone/>
             </a:pPr>
             <a:r>
-              <a:rPr lang="en-US" sz="1500" b="1" dirty="0">
+              <a:rPr lang="en-US" sz="2000" b="1" i="0" dirty="0">
                 <a:solidFill>
-                  <a:srgbClr val="0F172A"/>
+                  <a:srgbClr val="0F766E"/>
                 </a:solidFill>
-                <a:latin typeface="ui-sans-serif" pitchFamily="34" charset="0"/>
-                <a:ea typeface="ui-sans-serif" pitchFamily="34" charset="-122"/>
-                <a:cs typeface="ui-sans-serif" pitchFamily="34" charset="-120"/>
-              </a:rPr>
-              <a:t>Engineering flow</a:t>
-            </a:r>
-            <a:endParaRPr lang="en-US" sz="1500" dirty="0"/>
-          </a:p>
-        </p:txBody>
-      </p:sp>
-      <p:sp>
-        <p:nvSpPr>
-          <p:cNvPr id="18" name="Text 14">
-            <a:extLst>
-              <a:ext uri="{FF2B5EF4-FFF2-40B4-BE49-F238E27FC236}">
-                <a16:creationId xmlns:a16="http://schemas.microsoft.com/office/drawing/2014/main" id="{E269C747-4921-433D-9A0A-B00EE7A44E0C}"/>
-              </a:ext>
-            </a:extLst>
-          </p:cNvPr>
-          <p:cNvSpPr/>
-          <p:nvPr/>
-        </p:nvSpPr>
-        <p:spPr>
-          <a:xfrm>
-            <a:off x="4857117" y="2495550"/>
-            <a:ext cx="2216200" cy="1143000"/>
-          </a:xfrm>
-          <a:prstGeom prst="rect">
-            <a:avLst/>
-          </a:prstGeom>
-          <a:noFill/>
-          <a:ln/>
-        </p:spPr>
-        <p:txBody>
-          <a:bodyPr wrap="square" lIns="0" tIns="0" rIns="0" bIns="0" rtlCol="0" anchor="t"/>
-          <a:lstStyle/>
-          <a:p>
-            <a:pPr marL="0" indent="0">
-              <a:lnSpc>
-                <a:spcPts val="1800"/>
-              </a:lnSpc>
+                <a:effectLst/>
+                <a:latin typeface="ui-sans-serif"/>
+              </a:rPr>
+              <a:t>2023</a:t>
+            </a:r>
+          </a:p>
+          <a:p>
+            <a:pPr algn="l">
+              <a:spcBef>
+                <a:spcPts val="600"/>
+              </a:spcBef>
               <a:buNone/>
             </a:pPr>
             <a:r>
-              <a:rPr lang="en-US" sz="1200" dirty="0">
+              <a:rPr lang="en-US" sz="1400" b="0" i="0" dirty="0">
                 <a:solidFill>
-                  <a:srgbClr val="334155"/>
+                  <a:srgbClr val="355163"/>
                 </a:solidFill>
-                <a:latin typeface="ui-sans-serif" pitchFamily="34" charset="0"/>
-                <a:ea typeface="ui-sans-serif" pitchFamily="34" charset="-122"/>
-                <a:cs typeface="ui-sans-serif" pitchFamily="34" charset="-120"/>
-              </a:rPr>
-              <a:t>SQL Server handled heavy filtering and joins, then exported a compact CSV that Python ingested into the app.</a:t>
-            </a:r>
-            <a:endParaRPr lang="en-US" sz="1200" dirty="0"/>
-          </a:p>
-        </p:txBody>
-      </p:sp>
-      <p:sp>
-        <p:nvSpPr>
-          <p:cNvPr id="19" name="Text 15">
-            <a:extLst>
-              <a:ext uri="{FF2B5EF4-FFF2-40B4-BE49-F238E27FC236}">
-                <a16:creationId xmlns:a16="http://schemas.microsoft.com/office/drawing/2014/main" id="{C38F86AA-6113-62AC-492D-0B1625296D34}"/>
-              </a:ext>
-            </a:extLst>
-          </p:cNvPr>
-          <p:cNvSpPr/>
-          <p:nvPr/>
-        </p:nvSpPr>
-        <p:spPr>
-          <a:xfrm>
-            <a:off x="7663866" y="1695450"/>
-            <a:ext cx="2260372" cy="342900"/>
-          </a:xfrm>
-          <a:prstGeom prst="rect">
-            <a:avLst/>
-          </a:prstGeom>
-          <a:noFill/>
-          <a:ln/>
-        </p:spPr>
-        <p:txBody>
-          <a:bodyPr wrap="square" lIns="0" tIns="0" rIns="0" bIns="0" rtlCol="0" anchor="t"/>
-          <a:lstStyle/>
-          <a:p>
-            <a:pPr marL="0" indent="0">
-              <a:lnSpc>
-                <a:spcPts val="2700"/>
-              </a:lnSpc>
-              <a:buNone/>
-            </a:pPr>
-            <a:r>
-              <a:rPr lang="en-US" sz="2250" dirty="0">
-                <a:solidFill>
-                  <a:srgbClr val="0F172A"/>
-                </a:solidFill>
-                <a:latin typeface="ui-sans-serif" pitchFamily="34" charset="0"/>
-                <a:ea typeface="ui-sans-serif" pitchFamily="34" charset="-122"/>
-                <a:cs typeface="ui-sans-serif" pitchFamily="34" charset="-120"/>
-              </a:rPr>
-              <a:t>📈</a:t>
-            </a:r>
-            <a:endParaRPr lang="en-US" sz="2250" dirty="0"/>
-          </a:p>
-        </p:txBody>
-      </p:sp>
-      <p:sp>
-        <p:nvSpPr>
-          <p:cNvPr id="20" name="Text 16">
-            <a:extLst>
-              <a:ext uri="{FF2B5EF4-FFF2-40B4-BE49-F238E27FC236}">
-                <a16:creationId xmlns:a16="http://schemas.microsoft.com/office/drawing/2014/main" id="{E114E074-340C-BBC0-B5A2-6049A837C83E}"/>
-              </a:ext>
-            </a:extLst>
-          </p:cNvPr>
-          <p:cNvSpPr/>
-          <p:nvPr/>
-        </p:nvSpPr>
-        <p:spPr>
-          <a:xfrm>
-            <a:off x="7663866" y="2152650"/>
-            <a:ext cx="2216051" cy="533400"/>
-          </a:xfrm>
-          <a:prstGeom prst="rect">
-            <a:avLst/>
-          </a:prstGeom>
-          <a:noFill/>
-          <a:ln/>
-        </p:spPr>
-        <p:txBody>
-          <a:bodyPr wrap="square" lIns="0" tIns="0" rIns="0" bIns="0" rtlCol="0" anchor="t"/>
-          <a:lstStyle/>
-          <a:p>
-            <a:pPr marL="0" indent="0">
-              <a:lnSpc>
-                <a:spcPts val="2100"/>
-              </a:lnSpc>
-              <a:buNone/>
-            </a:pPr>
-            <a:r>
-              <a:rPr lang="en-US" sz="1500" b="1" dirty="0">
-                <a:solidFill>
-                  <a:srgbClr val="0F172A"/>
-                </a:solidFill>
-                <a:latin typeface="ui-sans-serif" pitchFamily="34" charset="0"/>
-                <a:ea typeface="ui-sans-serif" pitchFamily="34" charset="-122"/>
-                <a:cs typeface="ui-sans-serif" pitchFamily="34" charset="-120"/>
-              </a:rPr>
-              <a:t>Forecast-ready series</a:t>
-            </a:r>
-            <a:endParaRPr lang="en-US" sz="1500" dirty="0"/>
-          </a:p>
-        </p:txBody>
-      </p:sp>
-      <p:sp>
-        <p:nvSpPr>
-          <p:cNvPr id="21" name="Text 17">
-            <a:extLst>
-              <a:ext uri="{FF2B5EF4-FFF2-40B4-BE49-F238E27FC236}">
-                <a16:creationId xmlns:a16="http://schemas.microsoft.com/office/drawing/2014/main" id="{991E61B8-1B8D-4FEC-D575-AA042D579766}"/>
-              </a:ext>
-            </a:extLst>
-          </p:cNvPr>
-          <p:cNvSpPr/>
-          <p:nvPr/>
-        </p:nvSpPr>
-        <p:spPr>
-          <a:xfrm>
-            <a:off x="7663866" y="2762250"/>
-            <a:ext cx="2216051" cy="1143000"/>
-          </a:xfrm>
-          <a:prstGeom prst="rect">
-            <a:avLst/>
-          </a:prstGeom>
-          <a:noFill/>
-          <a:ln/>
-        </p:spPr>
-        <p:txBody>
-          <a:bodyPr wrap="square" lIns="0" tIns="0" rIns="0" bIns="0" rtlCol="0" anchor="t"/>
-          <a:lstStyle/>
-          <a:p>
-            <a:pPr marL="0" indent="0">
-              <a:lnSpc>
-                <a:spcPts val="1800"/>
-              </a:lnSpc>
-              <a:buNone/>
-            </a:pPr>
-            <a:r>
-              <a:rPr lang="en-US" sz="1200" dirty="0">
-                <a:solidFill>
-                  <a:srgbClr val="334155"/>
-                </a:solidFill>
-                <a:latin typeface="ui-sans-serif" pitchFamily="34" charset="0"/>
-                <a:ea typeface="ui-sans-serif" pitchFamily="34" charset="-122"/>
-                <a:cs typeface="ui-sans-serif" pitchFamily="34" charset="-120"/>
-              </a:rPr>
-              <a:t>The app parsed timestamps, built daily counts, then resampled to Monday-based weekly exposure totals for modeling.</a:t>
-            </a:r>
-            <a:endParaRPr lang="en-US" sz="1200" dirty="0"/>
-          </a:p>
-        </p:txBody>
-      </p:sp>
-      <p:sp>
-        <p:nvSpPr>
-          <p:cNvPr id="22" name="Text 18">
-            <a:extLst>
-              <a:ext uri="{FF2B5EF4-FFF2-40B4-BE49-F238E27FC236}">
-                <a16:creationId xmlns:a16="http://schemas.microsoft.com/office/drawing/2014/main" id="{98D45E03-1B36-AE87-A191-1513C8C2DBA3}"/>
-              </a:ext>
-            </a:extLst>
-          </p:cNvPr>
-          <p:cNvSpPr/>
-          <p:nvPr/>
-        </p:nvSpPr>
-        <p:spPr>
-          <a:xfrm>
-            <a:off x="2050516" y="4533900"/>
-            <a:ext cx="7986141" cy="178296"/>
-          </a:xfrm>
-          <a:prstGeom prst="rect">
-            <a:avLst/>
-          </a:prstGeom>
-          <a:noFill/>
-          <a:ln/>
-        </p:spPr>
-        <p:txBody>
-          <a:bodyPr wrap="square" lIns="0" tIns="0" rIns="0" bIns="0" rtlCol="0" anchor="t"/>
-          <a:lstStyle/>
-          <a:p>
-            <a:pPr marL="0" indent="0">
-              <a:lnSpc>
-                <a:spcPts val="1404"/>
-              </a:lnSpc>
-              <a:buNone/>
-            </a:pPr>
-            <a:r>
-              <a:rPr lang="en-US" sz="936" b="1" dirty="0">
-                <a:solidFill>
-                  <a:srgbClr val="64748B"/>
-                </a:solidFill>
-                <a:latin typeface="ui-sans-serif" pitchFamily="34" charset="0"/>
-                <a:ea typeface="ui-sans-serif" pitchFamily="34" charset="-122"/>
-                <a:cs typeface="ui-sans-serif" pitchFamily="34" charset="-120"/>
-              </a:rPr>
-              <a:t>Pipeline summary</a:t>
-            </a:r>
-            <a:endParaRPr lang="en-US" sz="936" dirty="0"/>
-          </a:p>
-        </p:txBody>
-      </p:sp>
-      <p:sp>
-        <p:nvSpPr>
-          <p:cNvPr id="23" name="Text 19">
-            <a:extLst>
-              <a:ext uri="{FF2B5EF4-FFF2-40B4-BE49-F238E27FC236}">
-                <a16:creationId xmlns:a16="http://schemas.microsoft.com/office/drawing/2014/main" id="{10E7B64E-CC80-6ACB-9DC2-E27143F23B83}"/>
-              </a:ext>
-            </a:extLst>
-          </p:cNvPr>
-          <p:cNvSpPr/>
-          <p:nvPr/>
-        </p:nvSpPr>
-        <p:spPr>
-          <a:xfrm>
-            <a:off x="3624512" y="5150346"/>
-            <a:ext cx="1503929" cy="304800"/>
-          </a:xfrm>
-          <a:prstGeom prst="rect">
-            <a:avLst/>
-          </a:prstGeom>
-          <a:noFill/>
-          <a:ln/>
-        </p:spPr>
-        <p:txBody>
-          <a:bodyPr wrap="square" lIns="0" tIns="0" rIns="0" bIns="0" rtlCol="0" anchor="t"/>
-          <a:lstStyle/>
-          <a:p>
-            <a:pPr marL="0" indent="0" algn="ctr">
-              <a:lnSpc>
-                <a:spcPts val="2400"/>
-              </a:lnSpc>
-              <a:buNone/>
-            </a:pPr>
-            <a:r>
-              <a:rPr lang="en-US" sz="1800" b="1" dirty="0">
-                <a:solidFill>
-                  <a:srgbClr val="334155"/>
-                </a:solidFill>
-                <a:latin typeface="ui-sans-serif" pitchFamily="34" charset="0"/>
-                <a:ea typeface="ui-sans-serif" pitchFamily="34" charset="-122"/>
-                <a:cs typeface="ui-sans-serif" pitchFamily="34" charset="-120"/>
-              </a:rPr>
-              <a:t>→</a:t>
-            </a:r>
-            <a:endParaRPr lang="en-US" sz="1800" dirty="0"/>
-          </a:p>
-        </p:txBody>
-      </p:sp>
-      <p:sp>
-        <p:nvSpPr>
-          <p:cNvPr id="24" name="Text 20">
-            <a:extLst>
-              <a:ext uri="{FF2B5EF4-FFF2-40B4-BE49-F238E27FC236}">
-                <a16:creationId xmlns:a16="http://schemas.microsoft.com/office/drawing/2014/main" id="{3B33E3B9-D811-F929-E81D-CA4A60C4B2B8}"/>
-              </a:ext>
-            </a:extLst>
-          </p:cNvPr>
-          <p:cNvSpPr/>
-          <p:nvPr/>
-        </p:nvSpPr>
-        <p:spPr>
-          <a:xfrm>
-            <a:off x="6801992" y="5150346"/>
-            <a:ext cx="1503929" cy="304800"/>
-          </a:xfrm>
-          <a:prstGeom prst="rect">
-            <a:avLst/>
-          </a:prstGeom>
-          <a:noFill/>
-          <a:ln/>
-        </p:spPr>
-        <p:txBody>
-          <a:bodyPr wrap="square" lIns="0" tIns="0" rIns="0" bIns="0" rtlCol="0" anchor="t"/>
-          <a:lstStyle/>
-          <a:p>
-            <a:pPr marL="0" indent="0" algn="ctr">
-              <a:lnSpc>
-                <a:spcPts val="2400"/>
-              </a:lnSpc>
-              <a:buNone/>
-            </a:pPr>
-            <a:r>
-              <a:rPr lang="en-US" sz="1800" b="1" dirty="0">
-                <a:solidFill>
-                  <a:srgbClr val="334155"/>
-                </a:solidFill>
-                <a:latin typeface="ui-sans-serif" pitchFamily="34" charset="0"/>
-                <a:ea typeface="ui-sans-serif" pitchFamily="34" charset="-122"/>
-                <a:cs typeface="ui-sans-serif" pitchFamily="34" charset="-120"/>
-              </a:rPr>
-              <a:t>→</a:t>
-            </a:r>
-            <a:endParaRPr lang="en-US" sz="1800" dirty="0"/>
+                <a:effectLst/>
+                <a:latin typeface="ui-sans-serif"/>
+              </a:rPr>
+              <a:t>Still informative, but should be treated as the noisier year until further filtering is done.</a:t>
+            </a:r>
           </a:p>
         </p:txBody>
       </p:sp>
     </p:spTree>
     <p:extLst>
       <p:ext uri="{BB962C8B-B14F-4D97-AF65-F5344CB8AC3E}">
-        <p14:creationId xmlns:p14="http://schemas.microsoft.com/office/powerpoint/2010/main" val="3687530064"/>
+        <p14:creationId xmlns:p14="http://schemas.microsoft.com/office/powerpoint/2010/main" val="1595840749"/>
       </p:ext>
     </p:extLst>
   </p:cSld>
@@ -6433,7 +6230,13 @@
   <p:cSld>
     <p:spTree>
       <p:nvGrpSpPr>
-        <p:cNvPr id="1" name=""/>
+        <p:cNvPr id="1" name="">
+          <a:extLst>
+            <a:ext uri="{FF2B5EF4-FFF2-40B4-BE49-F238E27FC236}">
+              <a16:creationId xmlns:a16="http://schemas.microsoft.com/office/drawing/2014/main" id="{1DC4D83F-1492-2969-F898-89D9456E414A}"/>
+            </a:ext>
+          </a:extLst>
+        </p:cNvPr>
         <p:cNvGrpSpPr/>
         <p:nvPr/>
       </p:nvGrpSpPr>
@@ -6447,415 +6250,20 @@
       </p:grpSpPr>
       <p:sp>
         <p:nvSpPr>
-          <p:cNvPr id="2" name="Text 0"/>
+          <p:cNvPr id="11" name="Text 7">
+            <a:extLst>
+              <a:ext uri="{FF2B5EF4-FFF2-40B4-BE49-F238E27FC236}">
+                <a16:creationId xmlns:a16="http://schemas.microsoft.com/office/drawing/2014/main" id="{67C5FCDF-8339-305A-F54E-83EA99DB128E}"/>
+              </a:ext>
+            </a:extLst>
+          </p:cNvPr>
           <p:cNvSpPr/>
           <p:nvPr/>
         </p:nvSpPr>
         <p:spPr>
           <a:xfrm>
-            <a:off x="609600" y="1731764"/>
-            <a:ext cx="5043091" cy="2209800"/>
-          </a:xfrm>
-          <a:prstGeom prst="roundRect">
-            <a:avLst>
-              <a:gd name="adj" fmla="val 132414"/>
-            </a:avLst>
-          </a:prstGeom>
-          <a:solidFill>
-            <a:srgbClr val="FFFFFF">
-              <a:alpha val="84000"/>
-            </a:srgbClr>
-          </a:solidFill>
-          <a:ln w="9525">
-            <a:solidFill>
-              <a:srgbClr val="0F172A"/>
-            </a:solidFill>
-          </a:ln>
-          <a:effectLst>
-            <a:outerShdw blurRad="323850" dist="152400" dir="5400000" algn="bl" rotWithShape="0">
-              <a:srgbClr val="0F172A">
-                <a:alpha val="6000"/>
-              </a:srgbClr>
-            </a:outerShdw>
-          </a:effectLst>
-        </p:spPr>
-        <p:txBody>
-          <a:bodyPr wrap="none" lIns="0" tIns="0" rIns="0" bIns="0" rtlCol="0" anchor="ctr">
-            <a:normAutofit/>
-          </a:bodyPr>
-          <a:lstStyle/>
-          <a:p>
-            <a:endParaRPr lang="en-US" sz="2400" dirty="0"/>
-          </a:p>
-        </p:txBody>
-      </p:sp>
-      <p:sp>
-        <p:nvSpPr>
-          <p:cNvPr id="3" name="Text 1"/>
-          <p:cNvSpPr/>
-          <p:nvPr/>
-        </p:nvSpPr>
-        <p:spPr>
-          <a:xfrm>
-            <a:off x="609600" y="4144764"/>
-            <a:ext cx="5043091" cy="1905000"/>
-          </a:xfrm>
-          <a:prstGeom prst="roundRect">
-            <a:avLst>
-              <a:gd name="adj" fmla="val 153600"/>
-            </a:avLst>
-          </a:prstGeom>
-          <a:solidFill>
-            <a:srgbClr val="FFFFFF">
-              <a:alpha val="84000"/>
-            </a:srgbClr>
-          </a:solidFill>
-          <a:ln w="9525">
-            <a:solidFill>
-              <a:srgbClr val="0F172A"/>
-            </a:solidFill>
-          </a:ln>
-          <a:effectLst>
-            <a:outerShdw blurRad="323850" dist="152400" dir="5400000" algn="bl" rotWithShape="0">
-              <a:srgbClr val="0F172A">
-                <a:alpha val="6000"/>
-              </a:srgbClr>
-            </a:outerShdw>
-          </a:effectLst>
-        </p:spPr>
-        <p:txBody>
-          <a:bodyPr wrap="none" lIns="0" tIns="0" rIns="0" bIns="0" rtlCol="0" anchor="ctr">
-            <a:normAutofit/>
-          </a:bodyPr>
-          <a:lstStyle/>
-          <a:p>
-            <a:endParaRPr lang="en-US" sz="2400" dirty="0"/>
-          </a:p>
-        </p:txBody>
-      </p:sp>
-      <p:sp>
-        <p:nvSpPr>
-          <p:cNvPr id="4" name="Text 2"/>
-          <p:cNvSpPr/>
-          <p:nvPr/>
-        </p:nvSpPr>
-        <p:spPr>
-          <a:xfrm>
-            <a:off x="609600" y="6252964"/>
-            <a:ext cx="5043091" cy="2209800"/>
-          </a:xfrm>
-          <a:prstGeom prst="roundRect">
-            <a:avLst>
-              <a:gd name="adj" fmla="val 132414"/>
-            </a:avLst>
-          </a:prstGeom>
-          <a:solidFill>
-            <a:srgbClr val="FFFFFF">
-              <a:alpha val="84000"/>
-            </a:srgbClr>
-          </a:solidFill>
-          <a:ln w="9525">
-            <a:solidFill>
-              <a:srgbClr val="0F172A"/>
-            </a:solidFill>
-          </a:ln>
-          <a:effectLst>
-            <a:outerShdw blurRad="323850" dist="152400" dir="5400000" algn="bl" rotWithShape="0">
-              <a:srgbClr val="0F172A">
-                <a:alpha val="6000"/>
-              </a:srgbClr>
-            </a:outerShdw>
-          </a:effectLst>
-        </p:spPr>
-        <p:txBody>
-          <a:bodyPr wrap="none" lIns="0" tIns="0" rIns="0" bIns="0" rtlCol="0" anchor="ctr">
-            <a:normAutofit/>
-          </a:bodyPr>
-          <a:lstStyle/>
-          <a:p>
-            <a:endParaRPr lang="en-US" sz="2400" dirty="0"/>
-          </a:p>
-        </p:txBody>
-      </p:sp>
-      <p:sp>
-        <p:nvSpPr>
-          <p:cNvPr id="5" name="Text 3"/>
-          <p:cNvSpPr/>
-          <p:nvPr/>
-        </p:nvSpPr>
-        <p:spPr>
-          <a:xfrm>
-            <a:off x="6008291" y="-1604763"/>
-            <a:ext cx="5574109" cy="5564188"/>
-          </a:xfrm>
-          <a:prstGeom prst="roundRect">
-            <a:avLst>
-              <a:gd name="adj" fmla="val 52588"/>
-            </a:avLst>
-          </a:prstGeom>
-          <a:solidFill>
-            <a:srgbClr val="FFFFFF">
-              <a:alpha val="84000"/>
-            </a:srgbClr>
-          </a:solidFill>
-          <a:ln w="9525">
-            <a:solidFill>
-              <a:srgbClr val="0F172A"/>
-            </a:solidFill>
-          </a:ln>
-          <a:effectLst>
-            <a:outerShdw blurRad="323850" dist="152400" dir="5400000" algn="bl" rotWithShape="0">
-              <a:srgbClr val="0F172A">
-                <a:alpha val="6000"/>
-              </a:srgbClr>
-            </a:outerShdw>
-          </a:effectLst>
-        </p:spPr>
-        <p:txBody>
-          <a:bodyPr wrap="none" lIns="0" tIns="0" rIns="0" bIns="0" rtlCol="0" anchor="ctr">
-            <a:normAutofit/>
-          </a:bodyPr>
-          <a:lstStyle/>
-          <a:p>
-            <a:endParaRPr lang="en-US" sz="2400" dirty="0"/>
-          </a:p>
-        </p:txBody>
-      </p:sp>
-      <p:sp>
-        <p:nvSpPr>
-          <p:cNvPr id="6" name="Text 4"/>
-          <p:cNvSpPr/>
-          <p:nvPr/>
-        </p:nvSpPr>
-        <p:spPr>
-          <a:xfrm>
-            <a:off x="6274991" y="-710208"/>
-            <a:ext cx="1544637" cy="2142331"/>
-          </a:xfrm>
-          <a:prstGeom prst="roundRect">
-            <a:avLst>
-              <a:gd name="adj" fmla="val 189435"/>
-            </a:avLst>
-          </a:prstGeom>
-          <a:solidFill>
-            <a:srgbClr val="FFFFFF">
-              <a:alpha val="90000"/>
-            </a:srgbClr>
-          </a:solidFill>
-          <a:ln w="9525">
-            <a:solidFill>
-              <a:srgbClr val="0F172A"/>
-            </a:solidFill>
-          </a:ln>
-          <a:effectLst>
-            <a:outerShdw blurRad="285750" dist="133350" dir="5400000" algn="bl" rotWithShape="0">
-              <a:srgbClr val="0F172A">
-                <a:alpha val="6000"/>
-              </a:srgbClr>
-            </a:outerShdw>
-          </a:effectLst>
-        </p:spPr>
-        <p:txBody>
-          <a:bodyPr wrap="none" lIns="0" tIns="0" rIns="0" bIns="0" rtlCol="0" anchor="ctr">
-            <a:normAutofit/>
-          </a:bodyPr>
-          <a:lstStyle/>
-          <a:p>
-            <a:endParaRPr lang="en-US" sz="2400" dirty="0"/>
-          </a:p>
-        </p:txBody>
-      </p:sp>
-      <p:sp>
-        <p:nvSpPr>
-          <p:cNvPr id="7" name="Text 5"/>
-          <p:cNvSpPr/>
-          <p:nvPr/>
-        </p:nvSpPr>
-        <p:spPr>
-          <a:xfrm>
-            <a:off x="8022829" y="-710208"/>
-            <a:ext cx="1544836" cy="2142331"/>
-          </a:xfrm>
-          <a:prstGeom prst="roundRect">
-            <a:avLst>
-              <a:gd name="adj" fmla="val 189410"/>
-            </a:avLst>
-          </a:prstGeom>
-          <a:solidFill>
-            <a:srgbClr val="FFFFFF">
-              <a:alpha val="90000"/>
-            </a:srgbClr>
-          </a:solidFill>
-          <a:ln w="9525">
-            <a:solidFill>
-              <a:srgbClr val="0F172A"/>
-            </a:solidFill>
-          </a:ln>
-          <a:effectLst>
-            <a:outerShdw blurRad="285750" dist="133350" dir="5400000" algn="bl" rotWithShape="0">
-              <a:srgbClr val="0F172A">
-                <a:alpha val="6000"/>
-              </a:srgbClr>
-            </a:outerShdw>
-          </a:effectLst>
-        </p:spPr>
-        <p:txBody>
-          <a:bodyPr wrap="none" lIns="0" tIns="0" rIns="0" bIns="0" rtlCol="0" anchor="ctr">
-            <a:normAutofit/>
-          </a:bodyPr>
-          <a:lstStyle/>
-          <a:p>
-            <a:endParaRPr lang="en-US" sz="2400" dirty="0"/>
-          </a:p>
-        </p:txBody>
-      </p:sp>
-      <p:sp>
-        <p:nvSpPr>
-          <p:cNvPr id="8" name="Text 6"/>
-          <p:cNvSpPr/>
-          <p:nvPr/>
-        </p:nvSpPr>
-        <p:spPr>
-          <a:xfrm>
-            <a:off x="9770864" y="-710208"/>
-            <a:ext cx="1544637" cy="2142331"/>
-          </a:xfrm>
-          <a:prstGeom prst="roundRect">
-            <a:avLst>
-              <a:gd name="adj" fmla="val 189435"/>
-            </a:avLst>
-          </a:prstGeom>
-          <a:solidFill>
-            <a:srgbClr val="FFFFFF">
-              <a:alpha val="90000"/>
-            </a:srgbClr>
-          </a:solidFill>
-          <a:ln w="9525">
-            <a:solidFill>
-              <a:srgbClr val="0F172A"/>
-            </a:solidFill>
-          </a:ln>
-          <a:effectLst>
-            <a:outerShdw blurRad="285750" dist="133350" dir="5400000" algn="bl" rotWithShape="0">
-              <a:srgbClr val="0F172A">
-                <a:alpha val="6000"/>
-              </a:srgbClr>
-            </a:outerShdw>
-          </a:effectLst>
-        </p:spPr>
-        <p:txBody>
-          <a:bodyPr wrap="none" lIns="0" tIns="0" rIns="0" bIns="0" rtlCol="0" anchor="ctr">
-            <a:normAutofit/>
-          </a:bodyPr>
-          <a:lstStyle/>
-          <a:p>
-            <a:endParaRPr lang="en-US" sz="2400" dirty="0"/>
-          </a:p>
-        </p:txBody>
-      </p:sp>
-      <p:sp>
-        <p:nvSpPr>
-          <p:cNvPr id="9" name="Text 7"/>
-          <p:cNvSpPr/>
-          <p:nvPr/>
-        </p:nvSpPr>
-        <p:spPr>
-          <a:xfrm>
-            <a:off x="6274991" y="2041724"/>
-            <a:ext cx="5040709" cy="177800"/>
-          </a:xfrm>
-          <a:prstGeom prst="roundRect">
-            <a:avLst>
-              <a:gd name="adj" fmla="val 68502857"/>
-            </a:avLst>
-          </a:prstGeom>
-          <a:solidFill>
-            <a:srgbClr val="DCEFF3"/>
-          </a:solidFill>
-          <a:ln/>
-        </p:spPr>
-        <p:txBody>
-          <a:bodyPr wrap="none" lIns="0" tIns="0" rIns="0" bIns="0" rtlCol="0" anchor="ctr">
-            <a:normAutofit fontScale="40000" lnSpcReduction="20000"/>
-          </a:bodyPr>
-          <a:lstStyle/>
-          <a:p>
-            <a:endParaRPr lang="en-US" sz="2400" dirty="0"/>
-          </a:p>
-        </p:txBody>
-      </p:sp>
-      <p:sp>
-        <p:nvSpPr>
-          <p:cNvPr id="10" name="Text 8"/>
-          <p:cNvSpPr/>
-          <p:nvPr/>
-        </p:nvSpPr>
-        <p:spPr>
-          <a:xfrm>
-            <a:off x="6274991" y="2778324"/>
-            <a:ext cx="5040709" cy="177800"/>
-          </a:xfrm>
-          <a:prstGeom prst="roundRect">
-            <a:avLst>
-              <a:gd name="adj" fmla="val 68502857"/>
-            </a:avLst>
-          </a:prstGeom>
-          <a:solidFill>
-            <a:srgbClr val="DCEFF3"/>
-          </a:solidFill>
-          <a:ln/>
-        </p:spPr>
-        <p:txBody>
-          <a:bodyPr wrap="none" lIns="0" tIns="0" rIns="0" bIns="0" rtlCol="0" anchor="ctr">
-            <a:normAutofit fontScale="40000" lnSpcReduction="20000"/>
-          </a:bodyPr>
-          <a:lstStyle/>
-          <a:p>
-            <a:endParaRPr lang="en-US" sz="2400" dirty="0"/>
-          </a:p>
-        </p:txBody>
-      </p:sp>
-      <p:sp>
-        <p:nvSpPr>
-          <p:cNvPr id="11" name="Text 9"/>
-          <p:cNvSpPr/>
-          <p:nvPr/>
-        </p:nvSpPr>
-        <p:spPr>
-          <a:xfrm>
-            <a:off x="6274991" y="3514924"/>
-            <a:ext cx="5040709" cy="177800"/>
-          </a:xfrm>
-          <a:prstGeom prst="roundRect">
-            <a:avLst>
-              <a:gd name="adj" fmla="val 68502857"/>
-            </a:avLst>
-          </a:prstGeom>
-          <a:solidFill>
-            <a:srgbClr val="DCEFF3"/>
-          </a:solidFill>
-          <a:ln/>
-        </p:spPr>
-        <p:txBody>
-          <a:bodyPr wrap="none" lIns="0" tIns="0" rIns="0" bIns="0" rtlCol="0" anchor="ctr">
-            <a:normAutofit fontScale="40000" lnSpcReduction="20000"/>
-          </a:bodyPr>
-          <a:lstStyle/>
-          <a:p>
-            <a:endParaRPr lang="en-US" sz="2400" dirty="0"/>
-          </a:p>
-        </p:txBody>
-      </p:sp>
-      <p:sp>
-        <p:nvSpPr>
-          <p:cNvPr id="12" name="Text 10"/>
-          <p:cNvSpPr/>
-          <p:nvPr/>
-        </p:nvSpPr>
-        <p:spPr>
-          <a:xfrm>
-            <a:off x="609600" y="-1604764"/>
-            <a:ext cx="5143952" cy="237728"/>
+            <a:off x="834280" y="392448"/>
+            <a:ext cx="2678465" cy="259402"/>
           </a:xfrm>
           <a:prstGeom prst="rect">
             <a:avLst/>
@@ -6867,36 +6275,35 @@
           <a:bodyPr wrap="square" lIns="0" tIns="0" rIns="0" bIns="0" rtlCol="0" anchor="t"/>
           <a:lstStyle/>
           <a:p>
-            <a:pPr>
-              <a:lnSpc>
-                <a:spcPts val="1872"/>
-              </a:lnSpc>
-            </a:pPr>
-            <a:r>
-              <a:rPr lang="en-US" sz="1248" b="1" dirty="0">
-                <a:solidFill>
-                  <a:srgbClr val="64748B"/>
-                </a:solidFill>
-                <a:latin typeface="ui-sans-serif" pitchFamily="34" charset="0"/>
-                <a:ea typeface="ui-sans-serif" pitchFamily="34" charset="-122"/>
-                <a:cs typeface="ui-sans-serif" pitchFamily="34" charset="-120"/>
-              </a:rPr>
-              <a:t>Methods</a:t>
-            </a:r>
-            <a:endParaRPr lang="en-US" sz="1248" dirty="0"/>
-          </a:p>
-        </p:txBody>
-      </p:sp>
-      <p:sp>
-        <p:nvSpPr>
-          <p:cNvPr id="13" name="Text 11"/>
+            <a:r>
+              <a:rPr lang="en-CA" cap="all" dirty="0"/>
+              <a:t>EVALUATION</a:t>
+            </a:r>
+          </a:p>
+          <a:p>
+            <a:br>
+              <a:rPr lang="en-CA" sz="2000" dirty="0"/>
+            </a:br>
+            <a:endParaRPr lang="en-US" sz="2000" dirty="0"/>
+          </a:p>
+        </p:txBody>
+      </p:sp>
+      <p:sp>
+        <p:nvSpPr>
+          <p:cNvPr id="12" name="Text 8">
+            <a:extLst>
+              <a:ext uri="{FF2B5EF4-FFF2-40B4-BE49-F238E27FC236}">
+                <a16:creationId xmlns:a16="http://schemas.microsoft.com/office/drawing/2014/main" id="{3A76520A-9964-E8AA-C61F-9C6B76BFE39A}"/>
+              </a:ext>
+            </a:extLst>
+          </p:cNvPr>
           <p:cNvSpPr/>
           <p:nvPr/>
         </p:nvSpPr>
         <p:spPr>
           <a:xfrm>
-            <a:off x="609600" y="-1265436"/>
-            <a:ext cx="5043091" cy="2743200"/>
+            <a:off x="834279" y="766602"/>
+            <a:ext cx="10455057" cy="618570"/>
           </a:xfrm>
           <a:prstGeom prst="rect">
             <a:avLst/>
@@ -6908,36 +6315,37 @@
           <a:bodyPr wrap="square" lIns="0" tIns="0" rIns="0" bIns="0" rtlCol="0" anchor="t"/>
           <a:lstStyle/>
           <a:p>
-            <a:pPr>
-              <a:lnSpc>
-                <a:spcPts val="7200"/>
-              </a:lnSpc>
-            </a:pPr>
-            <a:r>
-              <a:rPr lang="en-US" sz="4800" b="1" dirty="0">
-                <a:solidFill>
-                  <a:srgbClr val="0F172A"/>
-                </a:solidFill>
-                <a:latin typeface="Manrope" pitchFamily="34" charset="0"/>
-                <a:ea typeface="Manrope" pitchFamily="34" charset="-122"/>
-                <a:cs typeface="Manrope" pitchFamily="34" charset="-120"/>
-              </a:rPr>
-              <a:t>Simple models first, then explicit backtesting</a:t>
-            </a:r>
-            <a:endParaRPr lang="en-US" sz="4800" dirty="0"/>
-          </a:p>
-        </p:txBody>
-      </p:sp>
-      <p:sp>
-        <p:nvSpPr>
-          <p:cNvPr id="14" name="Text 12"/>
+            <a:r>
+              <a:rPr lang="en-US" sz="3200" b="1" dirty="0"/>
+              <a:t>Forecast behavior and </a:t>
+            </a:r>
+            <a:r>
+              <a:rPr lang="en-US" sz="3200" b="1" dirty="0" err="1"/>
+              <a:t>backtest</a:t>
+            </a:r>
+            <a:r>
+              <a:rPr lang="en-US" sz="3200" b="1" dirty="0"/>
+              <a:t> accuracy</a:t>
+            </a:r>
+          </a:p>
+        </p:txBody>
+      </p:sp>
+      <p:sp>
+        <p:nvSpPr>
+          <p:cNvPr id="13" name="Text 9">
+            <a:extLst>
+              <a:ext uri="{FF2B5EF4-FFF2-40B4-BE49-F238E27FC236}">
+                <a16:creationId xmlns:a16="http://schemas.microsoft.com/office/drawing/2014/main" id="{213CF6CE-B7E4-A0FD-E139-22913F43D5AE}"/>
+              </a:ext>
+            </a:extLst>
+          </p:cNvPr>
           <p:cNvSpPr/>
           <p:nvPr/>
         </p:nvSpPr>
         <p:spPr>
           <a:xfrm>
-            <a:off x="876301" y="1998464"/>
-            <a:ext cx="4599884" cy="355600"/>
+            <a:off x="834279" y="2362199"/>
+            <a:ext cx="4156621" cy="1376881"/>
           </a:xfrm>
           <a:prstGeom prst="rect">
             <a:avLst/>
@@ -6949,888 +6357,684 @@
           <a:bodyPr wrap="square" lIns="0" tIns="0" rIns="0" bIns="0" rtlCol="0" anchor="t"/>
           <a:lstStyle/>
           <a:p>
-            <a:pPr>
-              <a:lnSpc>
-                <a:spcPts val="2800"/>
-              </a:lnSpc>
+            <a:pPr marL="171450" indent="-171450">
+              <a:buFont typeface="Arial" panose="020B0604020202020204" pitchFamily="34" charset="0"/>
+              <a:buChar char="•"/>
             </a:pPr>
             <a:r>
-              <a:rPr lang="en-US" b="1" dirty="0">
-                <a:solidFill>
-                  <a:srgbClr val="0F172A"/>
-                </a:solidFill>
-                <a:latin typeface="ui-sans-serif" pitchFamily="34" charset="0"/>
-                <a:ea typeface="ui-sans-serif" pitchFamily="34" charset="-122"/>
-                <a:cs typeface="ui-sans-serif" pitchFamily="34" charset="-120"/>
-              </a:rPr>
-              <a:t>Forecasting menu</a:t>
-            </a:r>
-            <a:endParaRPr lang="en-US" dirty="0"/>
-          </a:p>
-        </p:txBody>
-      </p:sp>
-      <p:sp>
-        <p:nvSpPr>
-          <p:cNvPr id="15" name="Text 13"/>
-          <p:cNvSpPr/>
+              <a:rPr lang="en-US" sz="1200" dirty="0">
+                <a:latin typeface="Aptos" panose="020B0004020202020204" pitchFamily="34" charset="0"/>
+              </a:rPr>
+              <a:t>Naive, moving average, and Prophet-like baselines stay relatively flat and produce similar straight-line forecasts.</a:t>
+            </a:r>
+          </a:p>
+          <a:p>
+            <a:pPr marL="171450" indent="-171450">
+              <a:buFont typeface="Arial" panose="020B0604020202020204" pitchFamily="34" charset="0"/>
+              <a:buChar char="•"/>
+            </a:pPr>
+            <a:r>
+              <a:rPr lang="en-US" sz="1200" dirty="0">
+                <a:latin typeface="Aptos" panose="020B0004020202020204" pitchFamily="34" charset="0"/>
+              </a:rPr>
+              <a:t>Exponential smoothing forecasts at a higher level than those baselines.</a:t>
+            </a:r>
+          </a:p>
+          <a:p>
+            <a:pPr marL="171450" indent="-171450">
+              <a:buFont typeface="Arial" panose="020B0604020202020204" pitchFamily="34" charset="0"/>
+              <a:buChar char="•"/>
+            </a:pPr>
+            <a:r>
+              <a:rPr lang="en-US" sz="1200" dirty="0">
+                <a:latin typeface="Aptos" panose="020B0004020202020204" pitchFamily="34" charset="0"/>
+              </a:rPr>
+              <a:t>Holt introduces an upward trend, which appears too aggressive for this dataset.</a:t>
+            </a:r>
+          </a:p>
+        </p:txBody>
+      </p:sp>
+      <p:sp>
+        <p:nvSpPr>
+          <p:cNvPr id="3" name="TextBox 2">
+            <a:extLst>
+              <a:ext uri="{FF2B5EF4-FFF2-40B4-BE49-F238E27FC236}">
+                <a16:creationId xmlns:a16="http://schemas.microsoft.com/office/drawing/2014/main" id="{D1E66417-47A2-14A2-0B6D-9B9D1CE63D4E}"/>
+              </a:ext>
+            </a:extLst>
+          </p:cNvPr>
+          <p:cNvSpPr txBox="1"/>
           <p:nvPr/>
         </p:nvSpPr>
         <p:spPr>
           <a:xfrm>
-            <a:off x="876300" y="2455664"/>
-            <a:ext cx="4509691" cy="1219200"/>
+            <a:off x="834279" y="1893867"/>
+            <a:ext cx="1942145" cy="369332"/>
           </a:xfrm>
           <a:prstGeom prst="rect">
             <a:avLst/>
           </a:prstGeom>
           <a:noFill/>
-          <a:ln/>
         </p:spPr>
         <p:txBody>
-          <a:bodyPr wrap="square" lIns="0" tIns="0" rIns="0" bIns="0" rtlCol="0" anchor="t"/>
-          <a:lstStyle/>
-          <a:p>
-            <a:pPr>
-              <a:lnSpc>
-                <a:spcPts val="2400"/>
-              </a:lnSpc>
+          <a:bodyPr wrap="square">
+            <a:spAutoFit/>
+          </a:bodyPr>
+          <a:lstStyle/>
+          <a:p>
+            <a:pPr algn="l">
+              <a:spcAft>
+                <a:spcPts val="900"/>
+              </a:spcAft>
+              <a:buNone/>
             </a:pPr>
             <a:r>
-              <a:rPr lang="en-US" sz="1600" dirty="0">
+              <a:rPr lang="en-CA" b="1" i="0" dirty="0">
                 <a:solidFill>
-                  <a:srgbClr val="334155"/>
+                  <a:srgbClr val="0F766E"/>
                 </a:solidFill>
-                <a:latin typeface="ui-sans-serif" pitchFamily="34" charset="0"/>
-                <a:ea typeface="ui-sans-serif" pitchFamily="34" charset="-122"/>
-                <a:cs typeface="ui-sans-serif" pitchFamily="34" charset="-120"/>
-              </a:rPr>
-              <a:t>Naive, moving average, exponential smoothing, Holt, Holt-Winters, SARIMA, and one clearly labeled experimental random forest option.</a:t>
-            </a:r>
-            <a:endParaRPr lang="en-US" sz="1600" dirty="0"/>
-          </a:p>
-        </p:txBody>
-      </p:sp>
-      <p:sp>
-        <p:nvSpPr>
-          <p:cNvPr id="16" name="Text 14"/>
-          <p:cNvSpPr/>
+                <a:effectLst/>
+                <a:latin typeface="ui-sans-serif"/>
+              </a:rPr>
+              <a:t>Model behavior</a:t>
+            </a:r>
+          </a:p>
+        </p:txBody>
+      </p:sp>
+      <p:sp>
+        <p:nvSpPr>
+          <p:cNvPr id="4" name="TextBox 3">
+            <a:extLst>
+              <a:ext uri="{FF2B5EF4-FFF2-40B4-BE49-F238E27FC236}">
+                <a16:creationId xmlns:a16="http://schemas.microsoft.com/office/drawing/2014/main" id="{37116B44-0DE9-3B80-282A-2CAB2E4DC688}"/>
+              </a:ext>
+            </a:extLst>
+          </p:cNvPr>
+          <p:cNvSpPr txBox="1"/>
           <p:nvPr/>
         </p:nvSpPr>
         <p:spPr>
           <a:xfrm>
-            <a:off x="876301" y="4411464"/>
-            <a:ext cx="4599884" cy="355600"/>
+            <a:off x="5690858" y="1893867"/>
+            <a:ext cx="2203764" cy="369332"/>
           </a:xfrm>
           <a:prstGeom prst="rect">
             <a:avLst/>
           </a:prstGeom>
           <a:noFill/>
-          <a:ln/>
         </p:spPr>
         <p:txBody>
-          <a:bodyPr wrap="square" lIns="0" tIns="0" rIns="0" bIns="0" rtlCol="0" anchor="t"/>
-          <a:lstStyle/>
-          <a:p>
-            <a:pPr>
-              <a:lnSpc>
-                <a:spcPts val="2800"/>
-              </a:lnSpc>
+          <a:bodyPr wrap="square">
+            <a:spAutoFit/>
+          </a:bodyPr>
+          <a:lstStyle/>
+          <a:p>
+            <a:pPr algn="l">
+              <a:spcAft>
+                <a:spcPts val="900"/>
+              </a:spcAft>
+              <a:buNone/>
             </a:pPr>
             <a:r>
-              <a:rPr lang="en-US" b="1" dirty="0">
+              <a:rPr lang="en-CA" b="1" i="0" dirty="0" err="1">
                 <a:solidFill>
-                  <a:srgbClr val="0F172A"/>
+                  <a:srgbClr val="0F766E"/>
                 </a:solidFill>
-                <a:latin typeface="ui-sans-serif" pitchFamily="34" charset="0"/>
-                <a:ea typeface="ui-sans-serif" pitchFamily="34" charset="-122"/>
-                <a:cs typeface="ui-sans-serif" pitchFamily="34" charset="-120"/>
-              </a:rPr>
-              <a:t>Evaluation</a:t>
-            </a:r>
-            <a:endParaRPr lang="en-US" dirty="0"/>
-          </a:p>
-        </p:txBody>
-      </p:sp>
-      <p:sp>
-        <p:nvSpPr>
-          <p:cNvPr id="17" name="Text 15"/>
-          <p:cNvSpPr/>
+                <a:effectLst/>
+                <a:latin typeface="ui-sans-serif"/>
+              </a:rPr>
+              <a:t>Backtest</a:t>
+            </a:r>
+            <a:r>
+              <a:rPr lang="en-CA" b="1" i="0" dirty="0">
+                <a:solidFill>
+                  <a:srgbClr val="0F766E"/>
+                </a:solidFill>
+                <a:effectLst/>
+                <a:latin typeface="ui-sans-serif"/>
+              </a:rPr>
+              <a:t> snapshot</a:t>
+            </a:r>
+          </a:p>
+        </p:txBody>
+      </p:sp>
+      <p:graphicFrame>
+        <p:nvGraphicFramePr>
+          <p:cNvPr id="2" name="Table 1">
+            <a:extLst>
+              <a:ext uri="{FF2B5EF4-FFF2-40B4-BE49-F238E27FC236}">
+                <a16:creationId xmlns:a16="http://schemas.microsoft.com/office/drawing/2014/main" id="{555F7480-588E-C36D-399C-5E8CB1F579C5}"/>
+              </a:ext>
+            </a:extLst>
+          </p:cNvPr>
+          <p:cNvGraphicFramePr>
+            <a:graphicFrameLocks noGrp="1"/>
+          </p:cNvGraphicFramePr>
+          <p:nvPr>
+            <p:extLst>
+              <p:ext uri="{D42A27DB-BD31-4B8C-83A1-F6EECF244321}">
+                <p14:modId xmlns:p14="http://schemas.microsoft.com/office/powerpoint/2010/main" val="2042427984"/>
+              </p:ext>
+            </p:extLst>
+          </p:nvPr>
+        </p:nvGraphicFramePr>
+        <p:xfrm>
+          <a:off x="5763786" y="2362199"/>
+          <a:ext cx="5421916" cy="1817732"/>
+        </p:xfrm>
+        <a:graphic>
+          <a:graphicData uri="http://schemas.openxmlformats.org/drawingml/2006/table">
+            <a:tbl>
+              <a:tblPr>
+                <a:tableStyleId>{2D5ABB26-0587-4C30-8999-92F81FD0307C}</a:tableStyleId>
+              </a:tblPr>
+              <a:tblGrid>
+                <a:gridCol w="1355479">
+                  <a:extLst>
+                    <a:ext uri="{9D8B030D-6E8A-4147-A177-3AD203B41FA5}">
+                      <a16:colId xmlns:a16="http://schemas.microsoft.com/office/drawing/2014/main" val="962916514"/>
+                    </a:ext>
+                  </a:extLst>
+                </a:gridCol>
+                <a:gridCol w="1355479">
+                  <a:extLst>
+                    <a:ext uri="{9D8B030D-6E8A-4147-A177-3AD203B41FA5}">
+                      <a16:colId xmlns:a16="http://schemas.microsoft.com/office/drawing/2014/main" val="3932105810"/>
+                    </a:ext>
+                  </a:extLst>
+                </a:gridCol>
+                <a:gridCol w="560614">
+                  <a:extLst>
+                    <a:ext uri="{9D8B030D-6E8A-4147-A177-3AD203B41FA5}">
+                      <a16:colId xmlns:a16="http://schemas.microsoft.com/office/drawing/2014/main" val="1739504729"/>
+                    </a:ext>
+                  </a:extLst>
+                </a:gridCol>
+                <a:gridCol w="2150344">
+                  <a:extLst>
+                    <a:ext uri="{9D8B030D-6E8A-4147-A177-3AD203B41FA5}">
+                      <a16:colId xmlns:a16="http://schemas.microsoft.com/office/drawing/2014/main" val="1699442636"/>
+                    </a:ext>
+                  </a:extLst>
+                </a:gridCol>
+              </a:tblGrid>
+              <a:tr h="121216">
+                <a:tc>
+                  <a:txBody>
+                    <a:bodyPr/>
+                    <a:lstStyle/>
+                    <a:p>
+                      <a:pPr>
+                        <a:buNone/>
+                      </a:pPr>
+                      <a:r>
+                        <a:rPr lang="en-CA" sz="1100" b="1">
+                          <a:effectLst/>
+                          <a:latin typeface="Aptos" panose="020B0004020202020204" pitchFamily="34" charset="0"/>
+                        </a:rPr>
+                        <a:t>Model</a:t>
+                      </a:r>
+                    </a:p>
+                  </a:txBody>
+                  <a:tcPr marL="41867" marR="41867" marT="20934" marB="34889" anchor="ctr"/>
+                </a:tc>
+                <a:tc>
+                  <a:txBody>
+                    <a:bodyPr/>
+                    <a:lstStyle/>
+                    <a:p>
+                      <a:pPr>
+                        <a:buNone/>
+                      </a:pPr>
+                      <a:r>
+                        <a:rPr lang="en-CA" sz="1100" b="1">
+                          <a:effectLst/>
+                          <a:latin typeface="Aptos" panose="020B0004020202020204" pitchFamily="34" charset="0"/>
+                        </a:rPr>
+                        <a:t>MAE</a:t>
+                      </a:r>
+                    </a:p>
+                  </a:txBody>
+                  <a:tcPr marL="41867" marR="41867" marT="20934" marB="34889" anchor="ctr"/>
+                </a:tc>
+                <a:tc>
+                  <a:txBody>
+                    <a:bodyPr/>
+                    <a:lstStyle/>
+                    <a:p>
+                      <a:pPr>
+                        <a:buNone/>
+                      </a:pPr>
+                      <a:r>
+                        <a:rPr lang="en-CA" sz="1100" b="1" dirty="0">
+                          <a:effectLst/>
+                          <a:latin typeface="Aptos" panose="020B0004020202020204" pitchFamily="34" charset="0"/>
+                        </a:rPr>
+                        <a:t>RMSE</a:t>
+                      </a:r>
+                    </a:p>
+                  </a:txBody>
+                  <a:tcPr marL="41867" marR="41867" marT="20934" marB="34889" anchor="ctr"/>
+                </a:tc>
+                <a:tc>
+                  <a:txBody>
+                    <a:bodyPr/>
+                    <a:lstStyle/>
+                    <a:p>
+                      <a:pPr>
+                        <a:buNone/>
+                      </a:pPr>
+                      <a:r>
+                        <a:rPr lang="en-CA" sz="1100" b="1" dirty="0">
+                          <a:effectLst/>
+                          <a:latin typeface="Aptos" panose="020B0004020202020204" pitchFamily="34" charset="0"/>
+                        </a:rPr>
+                        <a:t>Interpretation</a:t>
+                      </a:r>
+                    </a:p>
+                  </a:txBody>
+                  <a:tcPr marL="41867" marR="41867" marT="20934" marB="34889" anchor="ctr"/>
+                </a:tc>
+                <a:extLst>
+                  <a:ext uri="{0D108BD9-81ED-4DB2-BD59-A6C34878D82A}">
+                    <a16:rowId xmlns:a16="http://schemas.microsoft.com/office/drawing/2014/main" val="3972561920"/>
+                  </a:ext>
+                </a:extLst>
+              </a:tr>
+              <a:tr h="363648">
+                <a:tc>
+                  <a:txBody>
+                    <a:bodyPr/>
+                    <a:lstStyle/>
+                    <a:p>
+                      <a:pPr>
+                        <a:buNone/>
+                      </a:pPr>
+                      <a:r>
+                        <a:rPr lang="en-CA" sz="1100" b="1">
+                          <a:effectLst/>
+                          <a:latin typeface="Aptos" panose="020B0004020202020204" pitchFamily="34" charset="0"/>
+                        </a:rPr>
+                        <a:t>Exponential smoothing</a:t>
+                      </a:r>
+                    </a:p>
+                  </a:txBody>
+                  <a:tcPr marL="41867" marR="41867" marT="20934" marB="20934" anchor="ctr"/>
+                </a:tc>
+                <a:tc>
+                  <a:txBody>
+                    <a:bodyPr/>
+                    <a:lstStyle/>
+                    <a:p>
+                      <a:pPr>
+                        <a:buNone/>
+                      </a:pPr>
+                      <a:r>
+                        <a:rPr lang="en-CA" sz="1100">
+                          <a:effectLst/>
+                          <a:latin typeface="Aptos" panose="020B0004020202020204" pitchFamily="34" charset="0"/>
+                        </a:rPr>
+                        <a:t>31</a:t>
+                      </a:r>
+                    </a:p>
+                  </a:txBody>
+                  <a:tcPr marL="41867" marR="41867" marT="20934" marB="20934" anchor="ctr"/>
+                </a:tc>
+                <a:tc>
+                  <a:txBody>
+                    <a:bodyPr/>
+                    <a:lstStyle/>
+                    <a:p>
+                      <a:pPr>
+                        <a:buNone/>
+                      </a:pPr>
+                      <a:r>
+                        <a:rPr lang="en-CA" sz="1100">
+                          <a:effectLst/>
+                          <a:latin typeface="Aptos" panose="020B0004020202020204" pitchFamily="34" charset="0"/>
+                        </a:rPr>
+                        <a:t>37</a:t>
+                      </a:r>
+                    </a:p>
+                  </a:txBody>
+                  <a:tcPr marL="41867" marR="41867" marT="20934" marB="20934" anchor="ctr"/>
+                </a:tc>
+                <a:tc>
+                  <a:txBody>
+                    <a:bodyPr/>
+                    <a:lstStyle/>
+                    <a:p>
+                      <a:pPr>
+                        <a:buNone/>
+                      </a:pPr>
+                      <a:r>
+                        <a:rPr lang="nn-NO" sz="1100">
+                          <a:effectLst/>
+                          <a:latin typeface="Aptos" panose="020B0004020202020204" pitchFamily="34" charset="0"/>
+                        </a:rPr>
+                        <a:t>Best performer; strong baseline for operations.</a:t>
+                      </a:r>
+                    </a:p>
+                  </a:txBody>
+                  <a:tcPr marL="41867" marR="41867" marT="20934" marB="20934" anchor="ctr"/>
+                </a:tc>
+                <a:extLst>
+                  <a:ext uri="{0D108BD9-81ED-4DB2-BD59-A6C34878D82A}">
+                    <a16:rowId xmlns:a16="http://schemas.microsoft.com/office/drawing/2014/main" val="1462061425"/>
+                  </a:ext>
+                </a:extLst>
+              </a:tr>
+              <a:tr h="462825">
+                <a:tc>
+                  <a:txBody>
+                    <a:bodyPr/>
+                    <a:lstStyle/>
+                    <a:p>
+                      <a:pPr>
+                        <a:buNone/>
+                      </a:pPr>
+                      <a:r>
+                        <a:rPr lang="en-CA" sz="1100" b="1">
+                          <a:effectLst/>
+                          <a:latin typeface="Aptos" panose="020B0004020202020204" pitchFamily="34" charset="0"/>
+                        </a:rPr>
+                        <a:t>SARIMA</a:t>
+                      </a:r>
+                    </a:p>
+                  </a:txBody>
+                  <a:tcPr marL="41867" marR="41867" marT="20934" marB="20934" anchor="ctr"/>
+                </a:tc>
+                <a:tc>
+                  <a:txBody>
+                    <a:bodyPr/>
+                    <a:lstStyle/>
+                    <a:p>
+                      <a:pPr>
+                        <a:buNone/>
+                      </a:pPr>
+                      <a:r>
+                        <a:rPr lang="en-CA" sz="1100">
+                          <a:effectLst/>
+                          <a:latin typeface="Aptos" panose="020B0004020202020204" pitchFamily="34" charset="0"/>
+                        </a:rPr>
+                        <a:t>32</a:t>
+                      </a:r>
+                    </a:p>
+                  </a:txBody>
+                  <a:tcPr marL="41867" marR="41867" marT="20934" marB="20934" anchor="ctr"/>
+                </a:tc>
+                <a:tc>
+                  <a:txBody>
+                    <a:bodyPr/>
+                    <a:lstStyle/>
+                    <a:p>
+                      <a:pPr>
+                        <a:buNone/>
+                      </a:pPr>
+                      <a:r>
+                        <a:rPr lang="en-CA" sz="1100">
+                          <a:effectLst/>
+                          <a:latin typeface="Aptos" panose="020B0004020202020204" pitchFamily="34" charset="0"/>
+                        </a:rPr>
+                        <a:t>41</a:t>
+                      </a:r>
+                    </a:p>
+                  </a:txBody>
+                  <a:tcPr marL="41867" marR="41867" marT="20934" marB="20934" anchor="ctr"/>
+                </a:tc>
+                <a:tc>
+                  <a:txBody>
+                    <a:bodyPr/>
+                    <a:lstStyle/>
+                    <a:p>
+                      <a:pPr>
+                        <a:buNone/>
+                      </a:pPr>
+                      <a:r>
+                        <a:rPr lang="en-US" sz="1100">
+                          <a:effectLst/>
+                          <a:latin typeface="Aptos" panose="020B0004020202020204" pitchFamily="34" charset="0"/>
+                        </a:rPr>
+                        <a:t>Very competitive; good alternative when cleaned history supports it.</a:t>
+                      </a:r>
+                    </a:p>
+                  </a:txBody>
+                  <a:tcPr marL="41867" marR="41867" marT="20934" marB="20934" anchor="ctr"/>
+                </a:tc>
+                <a:extLst>
+                  <a:ext uri="{0D108BD9-81ED-4DB2-BD59-A6C34878D82A}">
+                    <a16:rowId xmlns:a16="http://schemas.microsoft.com/office/drawing/2014/main" val="1892153442"/>
+                  </a:ext>
+                </a:extLst>
+              </a:tr>
+              <a:tr h="264472">
+                <a:tc>
+                  <a:txBody>
+                    <a:bodyPr/>
+                    <a:lstStyle/>
+                    <a:p>
+                      <a:pPr>
+                        <a:buNone/>
+                      </a:pPr>
+                      <a:r>
+                        <a:rPr lang="en-CA" sz="1100" b="1">
+                          <a:effectLst/>
+                          <a:latin typeface="Aptos" panose="020B0004020202020204" pitchFamily="34" charset="0"/>
+                        </a:rPr>
+                        <a:t>Most baselines</a:t>
+                      </a:r>
+                    </a:p>
+                  </a:txBody>
+                  <a:tcPr marL="41867" marR="41867" marT="20934" marB="20934" anchor="ctr"/>
+                </a:tc>
+                <a:tc>
+                  <a:txBody>
+                    <a:bodyPr/>
+                    <a:lstStyle/>
+                    <a:p>
+                      <a:pPr>
+                        <a:buNone/>
+                      </a:pPr>
+                      <a:r>
+                        <a:rPr lang="en-CA" sz="1100">
+                          <a:effectLst/>
+                          <a:latin typeface="Aptos" panose="020B0004020202020204" pitchFamily="34" charset="0"/>
+                        </a:rPr>
+                        <a:t>~123</a:t>
+                      </a:r>
+                    </a:p>
+                  </a:txBody>
+                  <a:tcPr marL="41867" marR="41867" marT="20934" marB="20934" anchor="ctr"/>
+                </a:tc>
+                <a:tc>
+                  <a:txBody>
+                    <a:bodyPr/>
+                    <a:lstStyle/>
+                    <a:p>
+                      <a:pPr>
+                        <a:buNone/>
+                      </a:pPr>
+                      <a:r>
+                        <a:rPr lang="en-CA" sz="1100">
+                          <a:effectLst/>
+                          <a:latin typeface="Aptos" panose="020B0004020202020204" pitchFamily="34" charset="0"/>
+                        </a:rPr>
+                        <a:t>~128</a:t>
+                      </a:r>
+                    </a:p>
+                  </a:txBody>
+                  <a:tcPr marL="41867" marR="41867" marT="20934" marB="20934" anchor="ctr"/>
+                </a:tc>
+                <a:tc>
+                  <a:txBody>
+                    <a:bodyPr/>
+                    <a:lstStyle/>
+                    <a:p>
+                      <a:pPr>
+                        <a:buNone/>
+                      </a:pPr>
+                      <a:r>
+                        <a:rPr lang="en-US" sz="1100">
+                          <a:effectLst/>
+                          <a:latin typeface="Aptos" panose="020B0004020202020204" pitchFamily="34" charset="0"/>
+                        </a:rPr>
+                        <a:t>Too weak for primary planning use.</a:t>
+                      </a:r>
+                    </a:p>
+                  </a:txBody>
+                  <a:tcPr marL="41867" marR="41867" marT="20934" marB="20934" anchor="ctr"/>
+                </a:tc>
+                <a:extLst>
+                  <a:ext uri="{0D108BD9-81ED-4DB2-BD59-A6C34878D82A}">
+                    <a16:rowId xmlns:a16="http://schemas.microsoft.com/office/drawing/2014/main" val="729500487"/>
+                  </a:ext>
+                </a:extLst>
+              </a:tr>
+              <a:tr h="264472">
+                <a:tc>
+                  <a:txBody>
+                    <a:bodyPr/>
+                    <a:lstStyle/>
+                    <a:p>
+                      <a:pPr>
+                        <a:buNone/>
+                      </a:pPr>
+                      <a:r>
+                        <a:rPr lang="en-CA" sz="1100" b="1">
+                          <a:effectLst/>
+                          <a:latin typeface="Aptos" panose="020B0004020202020204" pitchFamily="34" charset="0"/>
+                        </a:rPr>
+                        <a:t>Holt</a:t>
+                      </a:r>
+                    </a:p>
+                  </a:txBody>
+                  <a:tcPr marL="41867" marR="41867" marT="20934" marB="20934" anchor="ctr"/>
+                </a:tc>
+                <a:tc>
+                  <a:txBody>
+                    <a:bodyPr/>
+                    <a:lstStyle/>
+                    <a:p>
+                      <a:pPr>
+                        <a:buNone/>
+                      </a:pPr>
+                      <a:r>
+                        <a:rPr lang="en-CA" sz="1100">
+                          <a:effectLst/>
+                          <a:latin typeface="Aptos" panose="020B0004020202020204" pitchFamily="34" charset="0"/>
+                        </a:rPr>
+                        <a:t>221</a:t>
+                      </a:r>
+                    </a:p>
+                  </a:txBody>
+                  <a:tcPr marL="41867" marR="41867" marT="20934" marB="20934" anchor="ctr"/>
+                </a:tc>
+                <a:tc>
+                  <a:txBody>
+                    <a:bodyPr/>
+                    <a:lstStyle/>
+                    <a:p>
+                      <a:pPr>
+                        <a:buNone/>
+                      </a:pPr>
+                      <a:r>
+                        <a:rPr lang="en-CA" sz="1100">
+                          <a:effectLst/>
+                          <a:latin typeface="Aptos" panose="020B0004020202020204" pitchFamily="34" charset="0"/>
+                        </a:rPr>
+                        <a:t>258</a:t>
+                      </a:r>
+                    </a:p>
+                  </a:txBody>
+                  <a:tcPr marL="41867" marR="41867" marT="20934" marB="20934" anchor="ctr"/>
+                </a:tc>
+                <a:tc>
+                  <a:txBody>
+                    <a:bodyPr/>
+                    <a:lstStyle/>
+                    <a:p>
+                      <a:pPr>
+                        <a:buNone/>
+                      </a:pPr>
+                      <a:r>
+                        <a:rPr lang="en-US" sz="1100" dirty="0">
+                          <a:effectLst/>
+                          <a:latin typeface="Aptos" panose="020B0004020202020204" pitchFamily="34" charset="0"/>
+                        </a:rPr>
+                        <a:t>Trend overshoots; not suitable here.</a:t>
+                      </a:r>
+                    </a:p>
+                  </a:txBody>
+                  <a:tcPr marL="41867" marR="41867" marT="20934" marB="20934" anchor="ctr"/>
+                </a:tc>
+                <a:extLst>
+                  <a:ext uri="{0D108BD9-81ED-4DB2-BD59-A6C34878D82A}">
+                    <a16:rowId xmlns:a16="http://schemas.microsoft.com/office/drawing/2014/main" val="20697827"/>
+                  </a:ext>
+                </a:extLst>
+              </a:tr>
+            </a:tbl>
+          </a:graphicData>
+        </a:graphic>
+      </p:graphicFrame>
+      <p:sp>
+        <p:nvSpPr>
+          <p:cNvPr id="9" name="TextBox 8">
+            <a:extLst>
+              <a:ext uri="{FF2B5EF4-FFF2-40B4-BE49-F238E27FC236}">
+                <a16:creationId xmlns:a16="http://schemas.microsoft.com/office/drawing/2014/main" id="{C3E8EB85-F41D-6BCC-7DD9-0242107E3801}"/>
+              </a:ext>
+            </a:extLst>
+          </p:cNvPr>
+          <p:cNvSpPr txBox="1"/>
           <p:nvPr/>
         </p:nvSpPr>
         <p:spPr>
           <a:xfrm>
-            <a:off x="876300" y="4868664"/>
-            <a:ext cx="4509691" cy="914400"/>
+            <a:off x="834973" y="4895348"/>
+            <a:ext cx="10522054" cy="523220"/>
           </a:xfrm>
           <a:prstGeom prst="rect">
             <a:avLst/>
           </a:prstGeom>
           <a:noFill/>
-          <a:ln/>
         </p:spPr>
         <p:txBody>
-          <a:bodyPr wrap="square" lIns="0" tIns="0" rIns="0" bIns="0" rtlCol="0" anchor="t"/>
-          <a:lstStyle/>
-          <a:p>
-            <a:pPr>
-              <a:lnSpc>
-                <a:spcPts val="2400"/>
-              </a:lnSpc>
-            </a:pPr>
-            <a:r>
-              <a:rPr lang="en-US" sz="1600" dirty="0">
+          <a:bodyPr wrap="square">
+            <a:spAutoFit/>
+          </a:bodyPr>
+          <a:lstStyle/>
+          <a:p>
+            <a:r>
+              <a:rPr lang="en-US" sz="1400" b="1" i="0" dirty="0">
                 <a:solidFill>
-                  <a:srgbClr val="334155"/>
+                  <a:srgbClr val="355163"/>
                 </a:solidFill>
-                <a:latin typeface="ui-sans-serif" pitchFamily="34" charset="0"/>
-                <a:ea typeface="ui-sans-serif" pitchFamily="34" charset="-122"/>
-                <a:cs typeface="ui-sans-serif" pitchFamily="34" charset="-120"/>
-              </a:rPr>
-              <a:t>A hold-out backtest on recent weeks reports MAE, RMSE, MAPE, and MAE as a share of average weekly exposure volume.</a:t>
-            </a:r>
-            <a:endParaRPr lang="en-US" sz="1600" dirty="0"/>
-          </a:p>
-        </p:txBody>
-      </p:sp>
-      <p:sp>
-        <p:nvSpPr>
-          <p:cNvPr id="18" name="Text 16"/>
-          <p:cNvSpPr/>
-          <p:nvPr/>
-        </p:nvSpPr>
-        <p:spPr>
-          <a:xfrm>
-            <a:off x="876301" y="6519664"/>
-            <a:ext cx="4599884" cy="355600"/>
-          </a:xfrm>
-          <a:prstGeom prst="rect">
-            <a:avLst/>
-          </a:prstGeom>
-          <a:noFill/>
-          <a:ln/>
-        </p:spPr>
-        <p:txBody>
-          <a:bodyPr wrap="square" lIns="0" tIns="0" rIns="0" bIns="0" rtlCol="0" anchor="t"/>
-          <a:lstStyle/>
-          <a:p>
-            <a:pPr>
-              <a:lnSpc>
-                <a:spcPts val="2800"/>
-              </a:lnSpc>
-            </a:pPr>
-            <a:r>
-              <a:rPr lang="en-US" b="1" dirty="0">
+                <a:effectLst/>
+                <a:latin typeface="ui-sans-serif"/>
+              </a:rPr>
+              <a:t>Main evaluation result:</a:t>
+            </a:r>
+            <a:r>
+              <a:rPr lang="en-US" sz="1400" b="0" i="0" dirty="0">
                 <a:solidFill>
-                  <a:srgbClr val="0F172A"/>
+                  <a:srgbClr val="355163"/>
                 </a:solidFill>
-                <a:latin typeface="ui-sans-serif" pitchFamily="34" charset="0"/>
-                <a:ea typeface="ui-sans-serif" pitchFamily="34" charset="-122"/>
-                <a:cs typeface="ui-sans-serif" pitchFamily="34" charset="-120"/>
-              </a:rPr>
-              <a:t>Design principle</a:t>
-            </a:r>
-            <a:endParaRPr lang="en-US" dirty="0"/>
-          </a:p>
-        </p:txBody>
-      </p:sp>
-      <p:sp>
-        <p:nvSpPr>
-          <p:cNvPr id="19" name="Text 17"/>
-          <p:cNvSpPr/>
-          <p:nvPr/>
-        </p:nvSpPr>
-        <p:spPr>
-          <a:xfrm>
-            <a:off x="876300" y="6976864"/>
-            <a:ext cx="4509691" cy="1219200"/>
-          </a:xfrm>
-          <a:prstGeom prst="rect">
-            <a:avLst/>
-          </a:prstGeom>
-          <a:noFill/>
-          <a:ln/>
-        </p:spPr>
-        <p:txBody>
-          <a:bodyPr wrap="square" lIns="0" tIns="0" rIns="0" bIns="0" rtlCol="0" anchor="t"/>
-          <a:lstStyle/>
-          <a:p>
-            <a:pPr>
-              <a:lnSpc>
-                <a:spcPts val="2400"/>
-              </a:lnSpc>
-            </a:pPr>
-            <a:r>
-              <a:rPr lang="en-US" sz="1600" dirty="0">
-                <a:solidFill>
-                  <a:srgbClr val="334155"/>
-                </a:solidFill>
-                <a:latin typeface="ui-sans-serif" pitchFamily="34" charset="0"/>
-                <a:ea typeface="ui-sans-serif" pitchFamily="34" charset="-122"/>
-                <a:cs typeface="ui-sans-serif" pitchFamily="34" charset="-120"/>
-              </a:rPr>
-              <a:t>The project prioritizes interpretability over black-box performance so non-technical managers can judge reliability before acting.</a:t>
-            </a:r>
-            <a:endParaRPr lang="en-US" sz="1600" dirty="0"/>
-          </a:p>
-        </p:txBody>
-      </p:sp>
-      <p:sp>
-        <p:nvSpPr>
-          <p:cNvPr id="20" name="Text 18"/>
-          <p:cNvSpPr/>
-          <p:nvPr/>
-        </p:nvSpPr>
-        <p:spPr>
-          <a:xfrm>
-            <a:off x="6274991" y="-1338064"/>
-            <a:ext cx="5040709" cy="475456"/>
-          </a:xfrm>
-          <a:prstGeom prst="rect">
-            <a:avLst/>
-          </a:prstGeom>
-          <a:noFill/>
-          <a:ln/>
-        </p:spPr>
-        <p:txBody>
-          <a:bodyPr wrap="square" lIns="0" tIns="0" rIns="0" bIns="0" rtlCol="0" anchor="t"/>
-          <a:lstStyle/>
-          <a:p>
-            <a:pPr>
-              <a:lnSpc>
-                <a:spcPts val="1872"/>
-              </a:lnSpc>
-            </a:pPr>
-            <a:r>
-              <a:rPr lang="en-US" sz="1248" b="1" dirty="0">
-                <a:solidFill>
-                  <a:srgbClr val="64748B"/>
-                </a:solidFill>
-                <a:latin typeface="ui-sans-serif" pitchFamily="34" charset="0"/>
-                <a:ea typeface="ui-sans-serif" pitchFamily="34" charset="-122"/>
-                <a:cs typeface="ui-sans-serif" pitchFamily="34" charset="-120"/>
-              </a:rPr>
-              <a:t>How the dashboard communicates reliability</a:t>
-            </a:r>
-            <a:endParaRPr lang="en-US" sz="1248" dirty="0"/>
-          </a:p>
-        </p:txBody>
-      </p:sp>
-      <p:sp>
-        <p:nvSpPr>
-          <p:cNvPr id="21" name="Text 19"/>
-          <p:cNvSpPr/>
-          <p:nvPr/>
-        </p:nvSpPr>
-        <p:spPr>
-          <a:xfrm>
-            <a:off x="6531372" y="-453827"/>
-            <a:ext cx="1052512" cy="237728"/>
-          </a:xfrm>
-          <a:prstGeom prst="rect">
-            <a:avLst/>
-          </a:prstGeom>
-          <a:noFill/>
-          <a:ln/>
-        </p:spPr>
-        <p:txBody>
-          <a:bodyPr wrap="square" lIns="0" tIns="0" rIns="0" bIns="0" rtlCol="0" anchor="t"/>
-          <a:lstStyle/>
-          <a:p>
-            <a:pPr>
-              <a:lnSpc>
-                <a:spcPts val="1872"/>
-              </a:lnSpc>
-            </a:pPr>
-            <a:r>
-              <a:rPr lang="en-US" sz="1248" b="1" dirty="0">
-                <a:solidFill>
-                  <a:srgbClr val="64748B"/>
-                </a:solidFill>
-                <a:latin typeface="ui-sans-serif" pitchFamily="34" charset="0"/>
-                <a:ea typeface="ui-sans-serif" pitchFamily="34" charset="-122"/>
-                <a:cs typeface="ui-sans-serif" pitchFamily="34" charset="-120"/>
-              </a:rPr>
-              <a:t>MAE</a:t>
-            </a:r>
-            <a:endParaRPr lang="en-US" sz="1248" dirty="0"/>
-          </a:p>
-        </p:txBody>
-      </p:sp>
-      <p:sp>
-        <p:nvSpPr>
-          <p:cNvPr id="22" name="Text 20"/>
-          <p:cNvSpPr/>
-          <p:nvPr/>
-        </p:nvSpPr>
-        <p:spPr>
-          <a:xfrm>
-            <a:off x="6531372" y="-216099"/>
-            <a:ext cx="1052512" cy="579040"/>
-          </a:xfrm>
-          <a:prstGeom prst="rect">
-            <a:avLst/>
-          </a:prstGeom>
-          <a:noFill/>
-          <a:ln/>
-        </p:spPr>
-        <p:txBody>
-          <a:bodyPr wrap="square" lIns="0" tIns="0" rIns="0" bIns="0" rtlCol="0" anchor="t"/>
-          <a:lstStyle/>
-          <a:p>
-            <a:pPr>
-              <a:lnSpc>
-                <a:spcPts val="4560"/>
-              </a:lnSpc>
-            </a:pPr>
-            <a:r>
-              <a:rPr lang="en-US" sz="4800" b="1" dirty="0">
-                <a:solidFill>
-                  <a:srgbClr val="0F172A"/>
-                </a:solidFill>
-                <a:latin typeface="ui-sans-serif" pitchFamily="34" charset="0"/>
-                <a:ea typeface="ui-sans-serif" pitchFamily="34" charset="-122"/>
-                <a:cs typeface="ui-sans-serif" pitchFamily="34" charset="-120"/>
-              </a:rPr>
-              <a:t>0</a:t>
-            </a:r>
-            <a:endParaRPr lang="en-US" sz="4800" dirty="0"/>
-          </a:p>
-        </p:txBody>
-      </p:sp>
-      <p:sp>
-        <p:nvSpPr>
-          <p:cNvPr id="23" name="Text 21"/>
-          <p:cNvSpPr/>
-          <p:nvPr/>
-        </p:nvSpPr>
-        <p:spPr>
-          <a:xfrm>
-            <a:off x="6531372" y="413743"/>
-            <a:ext cx="1031875" cy="762000"/>
-          </a:xfrm>
-          <a:prstGeom prst="rect">
-            <a:avLst/>
-          </a:prstGeom>
-          <a:noFill/>
-          <a:ln/>
-        </p:spPr>
-        <p:txBody>
-          <a:bodyPr wrap="square" lIns="0" tIns="0" rIns="0" bIns="0" rtlCol="0" anchor="t"/>
-          <a:lstStyle/>
-          <a:p>
-            <a:pPr>
-              <a:lnSpc>
-                <a:spcPts val="2000"/>
-              </a:lnSpc>
-            </a:pPr>
-            <a:r>
-              <a:rPr lang="en-US" sz="1400" dirty="0">
-                <a:solidFill>
-                  <a:srgbClr val="64748B"/>
-                </a:solidFill>
-                <a:latin typeface="ui-sans-serif" pitchFamily="34" charset="0"/>
-                <a:ea typeface="ui-sans-serif" pitchFamily="34" charset="-122"/>
-                <a:cs typeface="ui-sans-serif" pitchFamily="34" charset="-120"/>
-              </a:rPr>
-              <a:t>Typical miss per week</a:t>
-            </a:r>
-            <a:endParaRPr lang="en-US" sz="1400" dirty="0"/>
-          </a:p>
-        </p:txBody>
-      </p:sp>
-      <p:sp>
-        <p:nvSpPr>
-          <p:cNvPr id="24" name="Text 22"/>
-          <p:cNvSpPr/>
-          <p:nvPr/>
-        </p:nvSpPr>
-        <p:spPr>
-          <a:xfrm>
-            <a:off x="8279209" y="-453827"/>
-            <a:ext cx="1052715" cy="237728"/>
-          </a:xfrm>
-          <a:prstGeom prst="rect">
-            <a:avLst/>
-          </a:prstGeom>
-          <a:noFill/>
-          <a:ln/>
-        </p:spPr>
-        <p:txBody>
-          <a:bodyPr wrap="square" lIns="0" tIns="0" rIns="0" bIns="0" rtlCol="0" anchor="t"/>
-          <a:lstStyle/>
-          <a:p>
-            <a:pPr>
-              <a:lnSpc>
-                <a:spcPts val="1872"/>
-              </a:lnSpc>
-            </a:pPr>
-            <a:r>
-              <a:rPr lang="en-US" sz="1248" b="1" dirty="0">
-                <a:solidFill>
-                  <a:srgbClr val="64748B"/>
-                </a:solidFill>
-                <a:latin typeface="ui-sans-serif" pitchFamily="34" charset="0"/>
-                <a:ea typeface="ui-sans-serif" pitchFamily="34" charset="-122"/>
-                <a:cs typeface="ui-sans-serif" pitchFamily="34" charset="-120"/>
-              </a:rPr>
-              <a:t>RMSE</a:t>
-            </a:r>
-            <a:endParaRPr lang="en-US" sz="1248" dirty="0"/>
-          </a:p>
-        </p:txBody>
-      </p:sp>
-      <p:sp>
-        <p:nvSpPr>
-          <p:cNvPr id="25" name="Text 23"/>
-          <p:cNvSpPr/>
-          <p:nvPr/>
-        </p:nvSpPr>
-        <p:spPr>
-          <a:xfrm>
-            <a:off x="8279209" y="-216099"/>
-            <a:ext cx="1052715" cy="579040"/>
-          </a:xfrm>
-          <a:prstGeom prst="rect">
-            <a:avLst/>
-          </a:prstGeom>
-          <a:noFill/>
-          <a:ln/>
-        </p:spPr>
-        <p:txBody>
-          <a:bodyPr wrap="square" lIns="0" tIns="0" rIns="0" bIns="0" rtlCol="0" anchor="t"/>
-          <a:lstStyle/>
-          <a:p>
-            <a:pPr>
-              <a:lnSpc>
-                <a:spcPts val="4560"/>
-              </a:lnSpc>
-            </a:pPr>
-            <a:r>
-              <a:rPr lang="en-US" sz="4800" b="1" dirty="0">
-                <a:solidFill>
-                  <a:srgbClr val="0F172A"/>
-                </a:solidFill>
-                <a:latin typeface="ui-sans-serif" pitchFamily="34" charset="0"/>
-                <a:ea typeface="ui-sans-serif" pitchFamily="34" charset="-122"/>
-                <a:cs typeface="ui-sans-serif" pitchFamily="34" charset="-120"/>
-              </a:rPr>
-              <a:t>0</a:t>
-            </a:r>
-            <a:endParaRPr lang="en-US" sz="4800" dirty="0"/>
-          </a:p>
-        </p:txBody>
-      </p:sp>
-      <p:sp>
-        <p:nvSpPr>
-          <p:cNvPr id="26" name="Text 24"/>
-          <p:cNvSpPr/>
-          <p:nvPr/>
-        </p:nvSpPr>
-        <p:spPr>
-          <a:xfrm>
-            <a:off x="8279210" y="413743"/>
-            <a:ext cx="1032073" cy="762000"/>
-          </a:xfrm>
-          <a:prstGeom prst="rect">
-            <a:avLst/>
-          </a:prstGeom>
-          <a:noFill/>
-          <a:ln/>
-        </p:spPr>
-        <p:txBody>
-          <a:bodyPr wrap="square" lIns="0" tIns="0" rIns="0" bIns="0" rtlCol="0" anchor="t"/>
-          <a:lstStyle/>
-          <a:p>
-            <a:pPr>
-              <a:lnSpc>
-                <a:spcPts val="2000"/>
-              </a:lnSpc>
-            </a:pPr>
-            <a:r>
-              <a:rPr lang="en-US" sz="1400" dirty="0">
-                <a:solidFill>
-                  <a:srgbClr val="64748B"/>
-                </a:solidFill>
-                <a:latin typeface="ui-sans-serif" pitchFamily="34" charset="0"/>
-                <a:ea typeface="ui-sans-serif" pitchFamily="34" charset="-122"/>
-                <a:cs typeface="ui-sans-serif" pitchFamily="34" charset="-120"/>
-              </a:rPr>
-              <a:t>Penalizes larger misses</a:t>
-            </a:r>
-            <a:endParaRPr lang="en-US" sz="1400" dirty="0"/>
-          </a:p>
-        </p:txBody>
-      </p:sp>
-      <p:sp>
-        <p:nvSpPr>
-          <p:cNvPr id="27" name="Text 25"/>
-          <p:cNvSpPr/>
-          <p:nvPr/>
-        </p:nvSpPr>
-        <p:spPr>
-          <a:xfrm>
-            <a:off x="10027245" y="-453827"/>
-            <a:ext cx="1052512" cy="237728"/>
-          </a:xfrm>
-          <a:prstGeom prst="rect">
-            <a:avLst/>
-          </a:prstGeom>
-          <a:noFill/>
-          <a:ln/>
-        </p:spPr>
-        <p:txBody>
-          <a:bodyPr wrap="square" lIns="0" tIns="0" rIns="0" bIns="0" rtlCol="0" anchor="t"/>
-          <a:lstStyle/>
-          <a:p>
-            <a:pPr>
-              <a:lnSpc>
-                <a:spcPts val="1872"/>
-              </a:lnSpc>
-            </a:pPr>
-            <a:r>
-              <a:rPr lang="en-US" sz="1248" b="1" dirty="0">
-                <a:solidFill>
-                  <a:srgbClr val="64748B"/>
-                </a:solidFill>
-                <a:latin typeface="ui-sans-serif" pitchFamily="34" charset="0"/>
-                <a:ea typeface="ui-sans-serif" pitchFamily="34" charset="-122"/>
-                <a:cs typeface="ui-sans-serif" pitchFamily="34" charset="-120"/>
-              </a:rPr>
-              <a:t>MAPE</a:t>
-            </a:r>
-            <a:endParaRPr lang="en-US" sz="1248" dirty="0"/>
-          </a:p>
-        </p:txBody>
-      </p:sp>
-      <p:sp>
-        <p:nvSpPr>
-          <p:cNvPr id="28" name="Text 26"/>
-          <p:cNvSpPr/>
-          <p:nvPr/>
-        </p:nvSpPr>
-        <p:spPr>
-          <a:xfrm>
-            <a:off x="10027245" y="-216099"/>
-            <a:ext cx="1052512" cy="579040"/>
-          </a:xfrm>
-          <a:prstGeom prst="rect">
-            <a:avLst/>
-          </a:prstGeom>
-          <a:noFill/>
-          <a:ln/>
-        </p:spPr>
-        <p:txBody>
-          <a:bodyPr wrap="square" lIns="0" tIns="0" rIns="0" bIns="0" rtlCol="0" anchor="t"/>
-          <a:lstStyle/>
-          <a:p>
-            <a:pPr>
-              <a:lnSpc>
-                <a:spcPts val="4560"/>
-              </a:lnSpc>
-            </a:pPr>
-            <a:r>
-              <a:rPr lang="en-US" sz="4800" b="1" dirty="0">
-                <a:solidFill>
-                  <a:srgbClr val="0F172A"/>
-                </a:solidFill>
-                <a:latin typeface="ui-sans-serif" pitchFamily="34" charset="0"/>
-                <a:ea typeface="ui-sans-serif" pitchFamily="34" charset="-122"/>
-                <a:cs typeface="ui-sans-serif" pitchFamily="34" charset="-120"/>
-              </a:rPr>
-              <a:t>0</a:t>
-            </a:r>
-            <a:endParaRPr lang="en-US" sz="4800" dirty="0"/>
-          </a:p>
-        </p:txBody>
-      </p:sp>
-      <p:sp>
-        <p:nvSpPr>
-          <p:cNvPr id="29" name="Text 27"/>
-          <p:cNvSpPr/>
-          <p:nvPr/>
-        </p:nvSpPr>
-        <p:spPr>
-          <a:xfrm>
-            <a:off x="10027245" y="413743"/>
-            <a:ext cx="1031875" cy="508000"/>
-          </a:xfrm>
-          <a:prstGeom prst="rect">
-            <a:avLst/>
-          </a:prstGeom>
-          <a:noFill/>
-          <a:ln/>
-        </p:spPr>
-        <p:txBody>
-          <a:bodyPr wrap="square" lIns="0" tIns="0" rIns="0" bIns="0" rtlCol="0" anchor="t"/>
-          <a:lstStyle/>
-          <a:p>
-            <a:pPr>
-              <a:lnSpc>
-                <a:spcPts val="2000"/>
-              </a:lnSpc>
-            </a:pPr>
-            <a:r>
-              <a:rPr lang="en-US" sz="1400" dirty="0">
-                <a:solidFill>
-                  <a:srgbClr val="64748B"/>
-                </a:solidFill>
-                <a:latin typeface="ui-sans-serif" pitchFamily="34" charset="0"/>
-                <a:ea typeface="ui-sans-serif" pitchFamily="34" charset="-122"/>
-                <a:cs typeface="ui-sans-serif" pitchFamily="34" charset="-120"/>
-              </a:rPr>
-              <a:t>Relative error</a:t>
-            </a:r>
-            <a:endParaRPr lang="en-US" sz="1400" dirty="0"/>
-          </a:p>
-        </p:txBody>
-      </p:sp>
-      <p:sp>
-        <p:nvSpPr>
-          <p:cNvPr id="30" name="Text 28"/>
-          <p:cNvSpPr/>
-          <p:nvPr/>
-        </p:nvSpPr>
-        <p:spPr>
-          <a:xfrm>
-            <a:off x="6274991" y="1686124"/>
-            <a:ext cx="1568447" cy="254000"/>
-          </a:xfrm>
-          <a:prstGeom prst="rect">
-            <a:avLst/>
-          </a:prstGeom>
-          <a:noFill/>
-          <a:ln/>
-        </p:spPr>
-        <p:txBody>
-          <a:bodyPr wrap="square" lIns="0" tIns="0" rIns="0" bIns="0" rtlCol="0" anchor="t"/>
-          <a:lstStyle/>
-          <a:p>
-            <a:pPr>
-              <a:lnSpc>
-                <a:spcPts val="2000"/>
-              </a:lnSpc>
-            </a:pPr>
-            <a:r>
-              <a:rPr lang="en-US" sz="1400" b="1" dirty="0">
-                <a:solidFill>
-                  <a:srgbClr val="0F172A"/>
-                </a:solidFill>
-                <a:latin typeface="ui-sans-serif" pitchFamily="34" charset="0"/>
-                <a:ea typeface="ui-sans-serif" pitchFamily="34" charset="-122"/>
-                <a:cs typeface="ui-sans-serif" pitchFamily="34" charset="-120"/>
-              </a:rPr>
-              <a:t>Interpretability</a:t>
-            </a:r>
-            <a:endParaRPr lang="en-US" sz="1400" dirty="0"/>
-          </a:p>
-        </p:txBody>
-      </p:sp>
-      <p:sp>
-        <p:nvSpPr>
-          <p:cNvPr id="31" name="Text 29"/>
-          <p:cNvSpPr/>
-          <p:nvPr/>
-        </p:nvSpPr>
-        <p:spPr>
-          <a:xfrm>
-            <a:off x="10851952" y="1686124"/>
-            <a:ext cx="473024" cy="254000"/>
-          </a:xfrm>
-          <a:prstGeom prst="rect">
-            <a:avLst/>
-          </a:prstGeom>
-          <a:noFill/>
-          <a:ln/>
-        </p:spPr>
-        <p:txBody>
-          <a:bodyPr wrap="square" lIns="0" tIns="0" rIns="0" bIns="0" rtlCol="0" anchor="t"/>
-          <a:lstStyle/>
-          <a:p>
-            <a:pPr>
-              <a:lnSpc>
-                <a:spcPts val="2000"/>
-              </a:lnSpc>
-            </a:pPr>
-            <a:r>
-              <a:rPr lang="en-US" sz="1400" b="1" dirty="0">
-                <a:solidFill>
-                  <a:srgbClr val="0F172A"/>
-                </a:solidFill>
-                <a:latin typeface="ui-sans-serif" pitchFamily="34" charset="0"/>
-                <a:ea typeface="ui-sans-serif" pitchFamily="34" charset="-122"/>
-                <a:cs typeface="ui-sans-serif" pitchFamily="34" charset="-120"/>
-              </a:rPr>
-              <a:t>High</a:t>
-            </a:r>
-            <a:endParaRPr lang="en-US" sz="1400" dirty="0"/>
-          </a:p>
-        </p:txBody>
-      </p:sp>
-      <p:sp>
-        <p:nvSpPr>
-          <p:cNvPr id="32" name="Text 30"/>
-          <p:cNvSpPr/>
-          <p:nvPr/>
-        </p:nvSpPr>
-        <p:spPr>
-          <a:xfrm>
-            <a:off x="6274991" y="2422724"/>
-            <a:ext cx="2367344" cy="254000"/>
-          </a:xfrm>
-          <a:prstGeom prst="rect">
-            <a:avLst/>
-          </a:prstGeom>
-          <a:noFill/>
-          <a:ln/>
-        </p:spPr>
-        <p:txBody>
-          <a:bodyPr wrap="square" lIns="0" tIns="0" rIns="0" bIns="0" rtlCol="0" anchor="t"/>
-          <a:lstStyle/>
-          <a:p>
-            <a:pPr>
-              <a:lnSpc>
-                <a:spcPts val="2000"/>
-              </a:lnSpc>
-            </a:pPr>
-            <a:r>
-              <a:rPr lang="en-US" sz="1400" b="1" dirty="0">
-                <a:solidFill>
-                  <a:srgbClr val="0F172A"/>
-                </a:solidFill>
-                <a:latin typeface="ui-sans-serif" pitchFamily="34" charset="0"/>
-                <a:ea typeface="ui-sans-serif" pitchFamily="34" charset="-122"/>
-                <a:cs typeface="ui-sans-serif" pitchFamily="34" charset="-120"/>
-              </a:rPr>
-              <a:t>Operational usefulness</a:t>
-            </a:r>
-            <a:endParaRPr lang="en-US" sz="1400" dirty="0"/>
-          </a:p>
-        </p:txBody>
-      </p:sp>
-      <p:sp>
-        <p:nvSpPr>
-          <p:cNvPr id="33" name="Text 31"/>
-          <p:cNvSpPr/>
-          <p:nvPr/>
-        </p:nvSpPr>
-        <p:spPr>
-          <a:xfrm>
-            <a:off x="10638829" y="2422724"/>
-            <a:ext cx="690408" cy="254000"/>
-          </a:xfrm>
-          <a:prstGeom prst="rect">
-            <a:avLst/>
-          </a:prstGeom>
-          <a:noFill/>
-          <a:ln/>
-        </p:spPr>
-        <p:txBody>
-          <a:bodyPr wrap="square" lIns="0" tIns="0" rIns="0" bIns="0" rtlCol="0" anchor="t"/>
-          <a:lstStyle/>
-          <a:p>
-            <a:pPr>
-              <a:lnSpc>
-                <a:spcPts val="2000"/>
-              </a:lnSpc>
-            </a:pPr>
-            <a:r>
-              <a:rPr lang="en-US" sz="1400" b="1" dirty="0">
-                <a:solidFill>
-                  <a:srgbClr val="0F172A"/>
-                </a:solidFill>
-                <a:latin typeface="ui-sans-serif" pitchFamily="34" charset="0"/>
-                <a:ea typeface="ui-sans-serif" pitchFamily="34" charset="-122"/>
-                <a:cs typeface="ui-sans-serif" pitchFamily="34" charset="-120"/>
-              </a:rPr>
-              <a:t>Strong</a:t>
-            </a:r>
-            <a:endParaRPr lang="en-US" sz="1400" dirty="0"/>
-          </a:p>
-        </p:txBody>
-      </p:sp>
-      <p:sp>
-        <p:nvSpPr>
-          <p:cNvPr id="34" name="Text 32"/>
-          <p:cNvSpPr/>
-          <p:nvPr/>
-        </p:nvSpPr>
-        <p:spPr>
-          <a:xfrm>
-            <a:off x="6274991" y="3159324"/>
-            <a:ext cx="2180928" cy="254000"/>
-          </a:xfrm>
-          <a:prstGeom prst="rect">
-            <a:avLst/>
-          </a:prstGeom>
-          <a:noFill/>
-          <a:ln/>
-        </p:spPr>
-        <p:txBody>
-          <a:bodyPr wrap="square" lIns="0" tIns="0" rIns="0" bIns="0" rtlCol="0" anchor="t"/>
-          <a:lstStyle/>
-          <a:p>
-            <a:pPr>
-              <a:lnSpc>
-                <a:spcPts val="2000"/>
-              </a:lnSpc>
-            </a:pPr>
-            <a:r>
-              <a:rPr lang="en-US" sz="1400" b="1" dirty="0">
-                <a:solidFill>
-                  <a:srgbClr val="0F172A"/>
-                </a:solidFill>
-                <a:latin typeface="ui-sans-serif" pitchFamily="34" charset="0"/>
-                <a:ea typeface="ui-sans-serif" pitchFamily="34" charset="-122"/>
-                <a:cs typeface="ui-sans-serif" pitchFamily="34" charset="-120"/>
-              </a:rPr>
-              <a:t>Black-box complexity</a:t>
-            </a:r>
-            <a:endParaRPr lang="en-US" sz="1400" dirty="0"/>
-          </a:p>
-        </p:txBody>
-      </p:sp>
-      <p:sp>
-        <p:nvSpPr>
-          <p:cNvPr id="35" name="Text 33"/>
-          <p:cNvSpPr/>
-          <p:nvPr/>
-        </p:nvSpPr>
-        <p:spPr>
-          <a:xfrm>
-            <a:off x="10915848" y="3159324"/>
-            <a:ext cx="407848" cy="254000"/>
-          </a:xfrm>
-          <a:prstGeom prst="rect">
-            <a:avLst/>
-          </a:prstGeom>
-          <a:noFill/>
-          <a:ln/>
-        </p:spPr>
-        <p:txBody>
-          <a:bodyPr wrap="square" lIns="0" tIns="0" rIns="0" bIns="0" rtlCol="0" anchor="t"/>
-          <a:lstStyle/>
-          <a:p>
-            <a:pPr>
-              <a:lnSpc>
-                <a:spcPts val="2000"/>
-              </a:lnSpc>
-            </a:pPr>
-            <a:r>
-              <a:rPr lang="en-US" sz="1400" b="1" dirty="0">
-                <a:solidFill>
-                  <a:srgbClr val="0F172A"/>
-                </a:solidFill>
-                <a:latin typeface="ui-sans-serif" pitchFamily="34" charset="0"/>
-                <a:ea typeface="ui-sans-serif" pitchFamily="34" charset="-122"/>
-                <a:cs typeface="ui-sans-serif" pitchFamily="34" charset="-120"/>
-              </a:rPr>
-              <a:t>Low</a:t>
-            </a:r>
-            <a:endParaRPr lang="en-US" sz="1400" dirty="0"/>
+                <a:effectLst/>
+                <a:latin typeface="ui-sans-serif"/>
+              </a:rPr>
+              <a:t> the app is not just displaying forecasts; it quantitatively shows which models are trustworthy enough for planning. Exponential smoothing and SARIMA are the strongest candidates, while simpler flat baselines and Holt serve mainly as comparison points.</a:t>
+            </a:r>
+            <a:endParaRPr lang="en-CA" sz="1400" dirty="0"/>
           </a:p>
         </p:txBody>
       </p:sp>
     </p:spTree>
+    <p:extLst>
+      <p:ext uri="{BB962C8B-B14F-4D97-AF65-F5344CB8AC3E}">
+        <p14:creationId xmlns:p14="http://schemas.microsoft.com/office/powerpoint/2010/main" val="546682087"/>
+      </p:ext>
+    </p:extLst>
   </p:cSld>
   <p:clrMapOvr>
     <a:masterClrMapping/>
@@ -7843,7 +7047,13 @@
   <p:cSld>
     <p:spTree>
       <p:nvGrpSpPr>
-        <p:cNvPr id="1" name=""/>
+        <p:cNvPr id="1" name="">
+          <a:extLst>
+            <a:ext uri="{FF2B5EF4-FFF2-40B4-BE49-F238E27FC236}">
+              <a16:creationId xmlns:a16="http://schemas.microsoft.com/office/drawing/2014/main" id="{71E00A6D-DCF1-BEBE-BC91-3678DFAEDFD0}"/>
+            </a:ext>
+          </a:extLst>
+        </p:cNvPr>
         <p:cNvGrpSpPr/>
         <p:nvPr/>
       </p:nvGrpSpPr>
@@ -7857,392 +7067,20 @@
       </p:grpSpPr>
       <p:sp>
         <p:nvSpPr>
-          <p:cNvPr id="2" name="Text 0"/>
+          <p:cNvPr id="11" name="Text 7">
+            <a:extLst>
+              <a:ext uri="{FF2B5EF4-FFF2-40B4-BE49-F238E27FC236}">
+                <a16:creationId xmlns:a16="http://schemas.microsoft.com/office/drawing/2014/main" id="{C983192B-71CF-98C7-FB94-2F5BEA62B1C0}"/>
+              </a:ext>
+            </a:extLst>
+          </p:cNvPr>
           <p:cNvSpPr/>
           <p:nvPr/>
         </p:nvSpPr>
         <p:spPr>
           <a:xfrm>
-            <a:off x="609601" y="1379538"/>
-            <a:ext cx="5573911" cy="6571853"/>
-          </a:xfrm>
-          <a:prstGeom prst="roundRect">
-            <a:avLst>
-              <a:gd name="adj" fmla="val 52496"/>
-            </a:avLst>
-          </a:prstGeom>
-          <a:solidFill>
-            <a:srgbClr val="FFFFFF">
-              <a:alpha val="84000"/>
-            </a:srgbClr>
-          </a:solidFill>
-          <a:ln w="9525">
-            <a:solidFill>
-              <a:srgbClr val="0F172A"/>
-            </a:solidFill>
-          </a:ln>
-          <a:effectLst>
-            <a:outerShdw blurRad="323850" dist="152400" dir="5400000" algn="bl" rotWithShape="0">
-              <a:srgbClr val="0F172A">
-                <a:alpha val="6000"/>
-              </a:srgbClr>
-            </a:outerShdw>
-          </a:effectLst>
-        </p:spPr>
-        <p:txBody>
-          <a:bodyPr wrap="none" lIns="0" tIns="0" rIns="0" bIns="0" rtlCol="0" anchor="ctr">
-            <a:normAutofit/>
-          </a:bodyPr>
-          <a:lstStyle/>
-          <a:p>
-            <a:endParaRPr lang="en-US" sz="2400" dirty="0"/>
-          </a:p>
-        </p:txBody>
-      </p:sp>
-      <p:sp>
-        <p:nvSpPr>
-          <p:cNvPr id="3" name="Text 1"/>
-          <p:cNvSpPr/>
-          <p:nvPr/>
-        </p:nvSpPr>
-        <p:spPr>
-          <a:xfrm>
-            <a:off x="876301" y="2036365"/>
-            <a:ext cx="2418556" cy="2849563"/>
-          </a:xfrm>
-          <a:prstGeom prst="roundRect">
-            <a:avLst>
-              <a:gd name="adj" fmla="val 120985"/>
-            </a:avLst>
-          </a:prstGeom>
-          <a:solidFill>
-            <a:srgbClr val="FFFFFF">
-              <a:alpha val="90000"/>
-            </a:srgbClr>
-          </a:solidFill>
-          <a:ln w="9525">
-            <a:solidFill>
-              <a:srgbClr val="0F172A"/>
-            </a:solidFill>
-          </a:ln>
-          <a:effectLst>
-            <a:outerShdw blurRad="285750" dist="133350" dir="5400000" algn="bl" rotWithShape="0">
-              <a:srgbClr val="0F172A">
-                <a:alpha val="6000"/>
-              </a:srgbClr>
-            </a:outerShdw>
-          </a:effectLst>
-        </p:spPr>
-        <p:txBody>
-          <a:bodyPr wrap="none" lIns="0" tIns="0" rIns="0" bIns="0" rtlCol="0" anchor="ctr">
-            <a:normAutofit/>
-          </a:bodyPr>
-          <a:lstStyle/>
-          <a:p>
-            <a:endParaRPr lang="en-US" sz="2400" dirty="0"/>
-          </a:p>
-        </p:txBody>
-      </p:sp>
-      <p:sp>
-        <p:nvSpPr>
-          <p:cNvPr id="4" name="Text 2"/>
-          <p:cNvSpPr/>
-          <p:nvPr/>
-        </p:nvSpPr>
-        <p:spPr>
-          <a:xfrm>
-            <a:off x="3498056" y="2036365"/>
-            <a:ext cx="2418755" cy="2849563"/>
-          </a:xfrm>
-          <a:prstGeom prst="roundRect">
-            <a:avLst>
-              <a:gd name="adj" fmla="val 120975"/>
-            </a:avLst>
-          </a:prstGeom>
-          <a:solidFill>
-            <a:srgbClr val="FFFFFF">
-              <a:alpha val="90000"/>
-            </a:srgbClr>
-          </a:solidFill>
-          <a:ln w="9525">
-            <a:solidFill>
-              <a:srgbClr val="0F172A"/>
-            </a:solidFill>
-          </a:ln>
-          <a:effectLst>
-            <a:outerShdw blurRad="285750" dist="133350" dir="5400000" algn="bl" rotWithShape="0">
-              <a:srgbClr val="0F172A">
-                <a:alpha val="6000"/>
-              </a:srgbClr>
-            </a:outerShdw>
-          </a:effectLst>
-        </p:spPr>
-        <p:txBody>
-          <a:bodyPr wrap="none" lIns="0" tIns="0" rIns="0" bIns="0" rtlCol="0" anchor="ctr">
-            <a:normAutofit/>
-          </a:bodyPr>
-          <a:lstStyle/>
-          <a:p>
-            <a:endParaRPr lang="en-US" sz="2400" dirty="0"/>
-          </a:p>
-        </p:txBody>
-      </p:sp>
-      <p:sp>
-        <p:nvSpPr>
-          <p:cNvPr id="5" name="Text 3"/>
-          <p:cNvSpPr/>
-          <p:nvPr/>
-        </p:nvSpPr>
-        <p:spPr>
-          <a:xfrm>
-            <a:off x="876301" y="5089128"/>
-            <a:ext cx="2418556" cy="2595563"/>
-          </a:xfrm>
-          <a:prstGeom prst="roundRect">
-            <a:avLst>
-              <a:gd name="adj" fmla="val 120985"/>
-            </a:avLst>
-          </a:prstGeom>
-          <a:solidFill>
-            <a:srgbClr val="FFFFFF">
-              <a:alpha val="90000"/>
-            </a:srgbClr>
-          </a:solidFill>
-          <a:ln w="9525">
-            <a:solidFill>
-              <a:srgbClr val="0F172A"/>
-            </a:solidFill>
-          </a:ln>
-          <a:effectLst>
-            <a:outerShdw blurRad="285750" dist="133350" dir="5400000" algn="bl" rotWithShape="0">
-              <a:srgbClr val="0F172A">
-                <a:alpha val="6000"/>
-              </a:srgbClr>
-            </a:outerShdw>
-          </a:effectLst>
-        </p:spPr>
-        <p:txBody>
-          <a:bodyPr wrap="none" lIns="0" tIns="0" rIns="0" bIns="0" rtlCol="0" anchor="ctr">
-            <a:normAutofit/>
-          </a:bodyPr>
-          <a:lstStyle/>
-          <a:p>
-            <a:endParaRPr lang="en-US" sz="2400" dirty="0"/>
-          </a:p>
-        </p:txBody>
-      </p:sp>
-      <p:sp>
-        <p:nvSpPr>
-          <p:cNvPr id="6" name="Text 4"/>
-          <p:cNvSpPr/>
-          <p:nvPr/>
-        </p:nvSpPr>
-        <p:spPr>
-          <a:xfrm>
-            <a:off x="3498056" y="5089128"/>
-            <a:ext cx="2418755" cy="2595563"/>
-          </a:xfrm>
-          <a:prstGeom prst="roundRect">
-            <a:avLst>
-              <a:gd name="adj" fmla="val 120975"/>
-            </a:avLst>
-          </a:prstGeom>
-          <a:solidFill>
-            <a:srgbClr val="FFFFFF">
-              <a:alpha val="90000"/>
-            </a:srgbClr>
-          </a:solidFill>
-          <a:ln w="9525">
-            <a:solidFill>
-              <a:srgbClr val="0F172A"/>
-            </a:solidFill>
-          </a:ln>
-          <a:effectLst>
-            <a:outerShdw blurRad="285750" dist="133350" dir="5400000" algn="bl" rotWithShape="0">
-              <a:srgbClr val="0F172A">
-                <a:alpha val="6000"/>
-              </a:srgbClr>
-            </a:outerShdw>
-          </a:effectLst>
-        </p:spPr>
-        <p:txBody>
-          <a:bodyPr wrap="none" lIns="0" tIns="0" rIns="0" bIns="0" rtlCol="0" anchor="ctr">
-            <a:normAutofit/>
-          </a:bodyPr>
-          <a:lstStyle/>
-          <a:p>
-            <a:endParaRPr lang="en-US" sz="2400" dirty="0"/>
-          </a:p>
-        </p:txBody>
-      </p:sp>
-      <p:sp>
-        <p:nvSpPr>
-          <p:cNvPr id="7" name="Text 5"/>
-          <p:cNvSpPr/>
-          <p:nvPr/>
-        </p:nvSpPr>
-        <p:spPr>
-          <a:xfrm>
-            <a:off x="6539112" y="2108200"/>
-            <a:ext cx="5043289" cy="5114528"/>
-          </a:xfrm>
-          <a:prstGeom prst="roundRect">
-            <a:avLst>
-              <a:gd name="adj" fmla="val 58019"/>
-            </a:avLst>
-          </a:prstGeom>
-          <a:solidFill>
-            <a:srgbClr val="FFFFFF">
-              <a:alpha val="84000"/>
-            </a:srgbClr>
-          </a:solidFill>
-          <a:ln w="9525">
-            <a:solidFill>
-              <a:srgbClr val="0F172A"/>
-            </a:solidFill>
-          </a:ln>
-          <a:effectLst>
-            <a:outerShdw blurRad="323850" dist="152400" dir="5400000" algn="bl" rotWithShape="0">
-              <a:srgbClr val="0F172A">
-                <a:alpha val="6000"/>
-              </a:srgbClr>
-            </a:outerShdw>
-          </a:effectLst>
-        </p:spPr>
-        <p:txBody>
-          <a:bodyPr wrap="none" lIns="0" tIns="0" rIns="0" bIns="0" rtlCol="0" anchor="ctr">
-            <a:normAutofit/>
-          </a:bodyPr>
-          <a:lstStyle/>
-          <a:p>
-            <a:endParaRPr lang="en-US" sz="2400" dirty="0"/>
-          </a:p>
-        </p:txBody>
-      </p:sp>
-      <p:sp>
-        <p:nvSpPr>
-          <p:cNvPr id="8" name="Text 6"/>
-          <p:cNvSpPr/>
-          <p:nvPr/>
-        </p:nvSpPr>
-        <p:spPr>
-          <a:xfrm>
-            <a:off x="6805811" y="5203428"/>
-            <a:ext cx="177800" cy="177800"/>
-          </a:xfrm>
-          <a:prstGeom prst="roundRect">
-            <a:avLst>
-              <a:gd name="adj" fmla="val 3428571"/>
-            </a:avLst>
-          </a:prstGeom>
-          <a:solidFill>
-            <a:srgbClr val="0891B2"/>
-          </a:solidFill>
-          <a:ln/>
-          <a:effectLst>
-            <a:outerShdw blurRad="101600" dist="50800" dir="16200000" algn="bl" rotWithShape="0">
-              <a:srgbClr val="0891B2">
-                <a:alpha val="12000"/>
-              </a:srgbClr>
-            </a:outerShdw>
-          </a:effectLst>
-        </p:spPr>
-        <p:txBody>
-          <a:bodyPr wrap="none" lIns="0" tIns="0" rIns="0" bIns="0" rtlCol="0" anchor="ctr">
-            <a:normAutofit fontScale="40000" lnSpcReduction="20000"/>
-          </a:bodyPr>
-          <a:lstStyle/>
-          <a:p>
-            <a:endParaRPr lang="en-US" sz="2400" dirty="0"/>
-          </a:p>
-        </p:txBody>
-      </p:sp>
-      <p:sp>
-        <p:nvSpPr>
-          <p:cNvPr id="9" name="Text 7"/>
-          <p:cNvSpPr/>
-          <p:nvPr/>
-        </p:nvSpPr>
-        <p:spPr>
-          <a:xfrm>
-            <a:off x="6805811" y="5660628"/>
-            <a:ext cx="177800" cy="177800"/>
-          </a:xfrm>
-          <a:prstGeom prst="roundRect">
-            <a:avLst>
-              <a:gd name="adj" fmla="val 3428571"/>
-            </a:avLst>
-          </a:prstGeom>
-          <a:solidFill>
-            <a:srgbClr val="0891B2"/>
-          </a:solidFill>
-          <a:ln/>
-          <a:effectLst>
-            <a:outerShdw blurRad="101600" dist="50800" dir="16200000" algn="bl" rotWithShape="0">
-              <a:srgbClr val="0891B2">
-                <a:alpha val="12000"/>
-              </a:srgbClr>
-            </a:outerShdw>
-          </a:effectLst>
-        </p:spPr>
-        <p:txBody>
-          <a:bodyPr wrap="none" lIns="0" tIns="0" rIns="0" bIns="0" rtlCol="0" anchor="ctr">
-            <a:normAutofit fontScale="40000" lnSpcReduction="20000"/>
-          </a:bodyPr>
-          <a:lstStyle/>
-          <a:p>
-            <a:endParaRPr lang="en-US" sz="2400" dirty="0"/>
-          </a:p>
-        </p:txBody>
-      </p:sp>
-      <p:sp>
-        <p:nvSpPr>
-          <p:cNvPr id="10" name="Text 8"/>
-          <p:cNvSpPr/>
-          <p:nvPr/>
-        </p:nvSpPr>
-        <p:spPr>
-          <a:xfrm>
-            <a:off x="6805811" y="6422628"/>
-            <a:ext cx="177800" cy="177800"/>
-          </a:xfrm>
-          <a:prstGeom prst="roundRect">
-            <a:avLst>
-              <a:gd name="adj" fmla="val 3428571"/>
-            </a:avLst>
-          </a:prstGeom>
-          <a:solidFill>
-            <a:srgbClr val="0891B2"/>
-          </a:solidFill>
-          <a:ln/>
-          <a:effectLst>
-            <a:outerShdw blurRad="101600" dist="50800" dir="16200000" algn="bl" rotWithShape="0">
-              <a:srgbClr val="0891B2">
-                <a:alpha val="12000"/>
-              </a:srgbClr>
-            </a:outerShdw>
-          </a:effectLst>
-        </p:spPr>
-        <p:txBody>
-          <a:bodyPr wrap="none" lIns="0" tIns="0" rIns="0" bIns="0" rtlCol="0" anchor="ctr">
-            <a:normAutofit fontScale="40000" lnSpcReduction="20000"/>
-          </a:bodyPr>
-          <a:lstStyle/>
-          <a:p>
-            <a:endParaRPr lang="en-US" sz="2400" dirty="0"/>
-          </a:p>
-        </p:txBody>
-      </p:sp>
-      <p:sp>
-        <p:nvSpPr>
-          <p:cNvPr id="11" name="Text 9"/>
-          <p:cNvSpPr/>
-          <p:nvPr/>
-        </p:nvSpPr>
-        <p:spPr>
-          <a:xfrm>
-            <a:off x="609600" y="-1093391"/>
-            <a:ext cx="11192256" cy="237728"/>
+            <a:off x="834280" y="392448"/>
+            <a:ext cx="2678465" cy="259402"/>
           </a:xfrm>
           <a:prstGeom prst="rect">
             <a:avLst/>
@@ -8254,36 +7092,35 @@
           <a:bodyPr wrap="square" lIns="0" tIns="0" rIns="0" bIns="0" rtlCol="0" anchor="t"/>
           <a:lstStyle/>
           <a:p>
-            <a:pPr>
-              <a:lnSpc>
-                <a:spcPts val="1872"/>
-              </a:lnSpc>
-            </a:pPr>
-            <a:r>
-              <a:rPr lang="en-US" sz="1248" b="1" dirty="0">
-                <a:solidFill>
-                  <a:srgbClr val="64748B"/>
-                </a:solidFill>
-                <a:latin typeface="ui-sans-serif" pitchFamily="34" charset="0"/>
-                <a:ea typeface="ui-sans-serif" pitchFamily="34" charset="-122"/>
-                <a:cs typeface="ui-sans-serif" pitchFamily="34" charset="-120"/>
-              </a:rPr>
-              <a:t>Application</a:t>
-            </a:r>
-            <a:endParaRPr lang="en-US" sz="1248" dirty="0"/>
-          </a:p>
-        </p:txBody>
-      </p:sp>
-      <p:sp>
-        <p:nvSpPr>
-          <p:cNvPr id="12" name="Text 10"/>
+            <a:r>
+              <a:rPr lang="en-CA" cap="all" dirty="0"/>
+              <a:t>AI Layer</a:t>
+            </a:r>
+          </a:p>
+          <a:p>
+            <a:br>
+              <a:rPr lang="en-CA" sz="2000" dirty="0"/>
+            </a:br>
+            <a:endParaRPr lang="en-US" sz="2000" dirty="0"/>
+          </a:p>
+        </p:txBody>
+      </p:sp>
+      <p:sp>
+        <p:nvSpPr>
+          <p:cNvPr id="12" name="Text 8">
+            <a:extLst>
+              <a:ext uri="{FF2B5EF4-FFF2-40B4-BE49-F238E27FC236}">
+                <a16:creationId xmlns:a16="http://schemas.microsoft.com/office/drawing/2014/main" id="{4FAA39F1-7DA0-A3A4-53DF-43E423D96979}"/>
+              </a:ext>
+            </a:extLst>
+          </p:cNvPr>
           <p:cNvSpPr/>
           <p:nvPr/>
         </p:nvSpPr>
         <p:spPr>
           <a:xfrm>
-            <a:off x="609600" y="-754063"/>
-            <a:ext cx="10972800" cy="1828800"/>
+            <a:off x="834279" y="766602"/>
+            <a:ext cx="10455057" cy="618570"/>
           </a:xfrm>
           <a:prstGeom prst="rect">
             <a:avLst/>
@@ -8295,36 +7132,29 @@
           <a:bodyPr wrap="square" lIns="0" tIns="0" rIns="0" bIns="0" rtlCol="0" anchor="t"/>
           <a:lstStyle/>
           <a:p>
-            <a:pPr>
-              <a:lnSpc>
-                <a:spcPts val="7200"/>
-              </a:lnSpc>
-            </a:pPr>
-            <a:r>
-              <a:rPr lang="en-US" sz="4800" b="1" dirty="0">
-                <a:solidFill>
-                  <a:srgbClr val="0F172A"/>
-                </a:solidFill>
-                <a:latin typeface="Manrope" pitchFamily="34" charset="0"/>
-                <a:ea typeface="Manrope" pitchFamily="34" charset="-122"/>
-                <a:cs typeface="Manrope" pitchFamily="34" charset="-120"/>
-              </a:rPr>
-              <a:t>What the EMS Forecaster actually delivers</a:t>
-            </a:r>
-            <a:endParaRPr lang="en-US" sz="4800" dirty="0"/>
-          </a:p>
-        </p:txBody>
-      </p:sp>
-      <p:sp>
-        <p:nvSpPr>
-          <p:cNvPr id="13" name="Text 11"/>
+            <a:r>
+              <a:rPr lang="en-US" sz="3200" b="1" dirty="0"/>
+              <a:t>How the AI recommendation is generated</a:t>
+            </a:r>
+          </a:p>
+        </p:txBody>
+      </p:sp>
+      <p:sp>
+        <p:nvSpPr>
+          <p:cNvPr id="13" name="Text 9">
+            <a:extLst>
+              <a:ext uri="{FF2B5EF4-FFF2-40B4-BE49-F238E27FC236}">
+                <a16:creationId xmlns:a16="http://schemas.microsoft.com/office/drawing/2014/main" id="{8B6D7DB8-DBA7-9F61-07DA-1507EC2D01EC}"/>
+              </a:ext>
+            </a:extLst>
+          </p:cNvPr>
           <p:cNvSpPr/>
           <p:nvPr/>
         </p:nvSpPr>
         <p:spPr>
           <a:xfrm>
-            <a:off x="876301" y="1646237"/>
-            <a:ext cx="5141321" cy="237728"/>
+            <a:off x="834279" y="2362199"/>
+            <a:ext cx="4156621" cy="1376881"/>
           </a:xfrm>
           <a:prstGeom prst="rect">
             <a:avLst/>
@@ -8336,765 +7166,654 @@
           <a:bodyPr wrap="square" lIns="0" tIns="0" rIns="0" bIns="0" rtlCol="0" anchor="t"/>
           <a:lstStyle/>
           <a:p>
-            <a:pPr>
-              <a:lnSpc>
-                <a:spcPts val="1872"/>
-              </a:lnSpc>
-            </a:pPr>
-            <a:r>
-              <a:rPr lang="en-US" sz="1248" b="1" dirty="0">
+            <a:r>
+              <a:rPr lang="en-US" sz="1000" i="1" dirty="0">
                 <a:solidFill>
-                  <a:srgbClr val="64748B"/>
+                  <a:srgbClr val="355163"/>
                 </a:solidFill>
-                <a:latin typeface="ui-sans-serif" pitchFamily="34" charset="0"/>
-                <a:ea typeface="ui-sans-serif" pitchFamily="34" charset="-122"/>
-                <a:cs typeface="ui-sans-serif" pitchFamily="34" charset="-120"/>
-              </a:rPr>
-              <a:t>Core dashboard features</a:t>
-            </a:r>
-            <a:endParaRPr lang="en-US" sz="1248" dirty="0"/>
-          </a:p>
-        </p:txBody>
-      </p:sp>
-      <p:sp>
-        <p:nvSpPr>
-          <p:cNvPr id="14" name="Text 12"/>
-          <p:cNvSpPr/>
+                <a:latin typeface="ui-monospace"/>
+              </a:rPr>
+              <a:t>You are an EMS operations advisor for a Canadian ambulance service.</a:t>
+            </a:r>
+            <a:br>
+              <a:rPr lang="en-US" sz="1000" i="1" dirty="0">
+                <a:solidFill>
+                  <a:srgbClr val="355163"/>
+                </a:solidFill>
+                <a:latin typeface="ui-monospace"/>
+              </a:rPr>
+            </a:br>
+            <a:br>
+              <a:rPr lang="en-US" sz="1000" i="1" dirty="0">
+                <a:solidFill>
+                  <a:srgbClr val="355163"/>
+                </a:solidFill>
+                <a:latin typeface="ui-monospace"/>
+              </a:rPr>
+            </a:br>
+            <a:r>
+              <a:rPr lang="en-US" sz="1000" i="1" dirty="0">
+                <a:solidFill>
+                  <a:srgbClr val="355163"/>
+                </a:solidFill>
+                <a:latin typeface="ui-monospace"/>
+              </a:rPr>
+              <a:t>Inputs:</a:t>
+            </a:r>
+            <a:br>
+              <a:rPr lang="en-US" sz="1000" i="1" dirty="0">
+                <a:solidFill>
+                  <a:srgbClr val="355163"/>
+                </a:solidFill>
+                <a:latin typeface="ui-monospace"/>
+              </a:rPr>
+            </a:br>
+            <a:r>
+              <a:rPr lang="en-US" sz="1000" i="1" dirty="0">
+                <a:solidFill>
+                  <a:srgbClr val="355163"/>
+                </a:solidFill>
+                <a:latin typeface="ui-monospace"/>
+              </a:rPr>
+              <a:t>- recent history summary</a:t>
+            </a:r>
+            <a:br>
+              <a:rPr lang="en-US" sz="1000" i="1" dirty="0">
+                <a:solidFill>
+                  <a:srgbClr val="355163"/>
+                </a:solidFill>
+                <a:latin typeface="ui-monospace"/>
+              </a:rPr>
+            </a:br>
+            <a:r>
+              <a:rPr lang="en-US" sz="1000" i="1" dirty="0">
+                <a:solidFill>
+                  <a:srgbClr val="355163"/>
+                </a:solidFill>
+                <a:latin typeface="ui-monospace"/>
+              </a:rPr>
+              <a:t>- selected forecasting model</a:t>
+            </a:r>
+            <a:br>
+              <a:rPr lang="en-US" sz="1000" i="1" dirty="0">
+                <a:solidFill>
+                  <a:srgbClr val="355163"/>
+                </a:solidFill>
+                <a:latin typeface="ui-monospace"/>
+              </a:rPr>
+            </a:br>
+            <a:r>
+              <a:rPr lang="en-US" sz="1000" i="1" dirty="0">
+                <a:solidFill>
+                  <a:srgbClr val="355163"/>
+                </a:solidFill>
+                <a:latin typeface="ui-monospace"/>
+              </a:rPr>
+              <a:t>- forecast horizon</a:t>
+            </a:r>
+            <a:br>
+              <a:rPr lang="en-US" sz="1000" i="1" dirty="0">
+                <a:solidFill>
+                  <a:srgbClr val="355163"/>
+                </a:solidFill>
+                <a:latin typeface="ui-monospace"/>
+              </a:rPr>
+            </a:br>
+            <a:r>
+              <a:rPr lang="en-US" sz="1000" i="1" dirty="0">
+                <a:solidFill>
+                  <a:srgbClr val="355163"/>
+                </a:solidFill>
+                <a:latin typeface="ui-monospace"/>
+              </a:rPr>
+              <a:t>- </a:t>
+            </a:r>
+            <a:r>
+              <a:rPr lang="en-US" sz="1000" i="1" dirty="0" err="1">
+                <a:solidFill>
+                  <a:srgbClr val="355163"/>
+                </a:solidFill>
+                <a:latin typeface="ui-monospace"/>
+              </a:rPr>
+              <a:t>backtest</a:t>
+            </a:r>
+            <a:r>
+              <a:rPr lang="en-US" sz="1000" i="1" dirty="0">
+                <a:solidFill>
+                  <a:srgbClr val="355163"/>
+                </a:solidFill>
+                <a:latin typeface="ui-monospace"/>
+              </a:rPr>
+              <a:t> MAE and RMSE</a:t>
+            </a:r>
+            <a:br>
+              <a:rPr lang="en-US" sz="1000" i="1" dirty="0">
+                <a:solidFill>
+                  <a:srgbClr val="355163"/>
+                </a:solidFill>
+                <a:latin typeface="ui-monospace"/>
+              </a:rPr>
+            </a:br>
+            <a:r>
+              <a:rPr lang="en-US" sz="1000" i="1" dirty="0">
+                <a:solidFill>
+                  <a:srgbClr val="355163"/>
+                </a:solidFill>
+                <a:latin typeface="ui-monospace"/>
+              </a:rPr>
+              <a:t>- planning interpretation of forecast uncertainty</a:t>
+            </a:r>
+            <a:br>
+              <a:rPr lang="en-US" sz="1000" i="1" dirty="0">
+                <a:solidFill>
+                  <a:srgbClr val="355163"/>
+                </a:solidFill>
+                <a:latin typeface="ui-monospace"/>
+              </a:rPr>
+            </a:br>
+            <a:br>
+              <a:rPr lang="en-US" sz="1000" i="1" dirty="0">
+                <a:solidFill>
+                  <a:srgbClr val="355163"/>
+                </a:solidFill>
+                <a:latin typeface="ui-monospace"/>
+              </a:rPr>
+            </a:br>
+            <a:r>
+              <a:rPr lang="en-US" sz="1000" i="1" dirty="0">
+                <a:solidFill>
+                  <a:srgbClr val="355163"/>
+                </a:solidFill>
+                <a:latin typeface="ui-monospace"/>
+              </a:rPr>
+              <a:t>Output request:</a:t>
+            </a:r>
+            <a:br>
+              <a:rPr lang="en-US" sz="1000" i="1" dirty="0">
+                <a:solidFill>
+                  <a:srgbClr val="355163"/>
+                </a:solidFill>
+                <a:latin typeface="ui-monospace"/>
+              </a:rPr>
+            </a:br>
+            <a:r>
+              <a:rPr lang="en-US" sz="1000" i="1" dirty="0">
+                <a:solidFill>
+                  <a:srgbClr val="355163"/>
+                </a:solidFill>
+                <a:latin typeface="ui-monospace"/>
+              </a:rPr>
+              <a:t>Write a short manager recommendation focused on staffing, training, PPE, and confidence level in plain language.</a:t>
+            </a:r>
+          </a:p>
+        </p:txBody>
+      </p:sp>
+      <p:sp>
+        <p:nvSpPr>
+          <p:cNvPr id="3" name="TextBox 2">
+            <a:extLst>
+              <a:ext uri="{FF2B5EF4-FFF2-40B4-BE49-F238E27FC236}">
+                <a16:creationId xmlns:a16="http://schemas.microsoft.com/office/drawing/2014/main" id="{78CE8F23-A82A-A995-8024-D5CE0BD90BA6}"/>
+              </a:ext>
+            </a:extLst>
+          </p:cNvPr>
+          <p:cNvSpPr txBox="1"/>
           <p:nvPr/>
         </p:nvSpPr>
         <p:spPr>
           <a:xfrm>
-            <a:off x="1132682" y="2292747"/>
-            <a:ext cx="1905793" cy="711200"/>
+            <a:off x="834279" y="1893867"/>
+            <a:ext cx="3819202" cy="369332"/>
           </a:xfrm>
           <a:prstGeom prst="rect">
             <a:avLst/>
           </a:prstGeom>
           <a:noFill/>
-          <a:ln/>
         </p:spPr>
         <p:txBody>
-          <a:bodyPr wrap="square" lIns="0" tIns="0" rIns="0" bIns="0" rtlCol="0" anchor="t"/>
-          <a:lstStyle/>
-          <a:p>
-            <a:pPr>
-              <a:lnSpc>
-                <a:spcPts val="2800"/>
-              </a:lnSpc>
+          <a:bodyPr wrap="square">
+            <a:spAutoFit/>
+          </a:bodyPr>
+          <a:lstStyle/>
+          <a:p>
+            <a:pPr algn="l">
+              <a:spcAft>
+                <a:spcPts val="900"/>
+              </a:spcAft>
+              <a:buNone/>
             </a:pPr>
             <a:r>
-              <a:rPr lang="en-US" b="1" dirty="0">
+              <a:rPr lang="en-US" b="1" i="0" dirty="0">
                 <a:solidFill>
-                  <a:srgbClr val="0F172A"/>
+                  <a:srgbClr val="0F766E"/>
                 </a:solidFill>
-                <a:latin typeface="ui-sans-serif" pitchFamily="34" charset="0"/>
-                <a:ea typeface="ui-sans-serif" pitchFamily="34" charset="-122"/>
-                <a:cs typeface="ui-sans-serif" pitchFamily="34" charset="-120"/>
-              </a:rPr>
-              <a:t>Interactive controls</a:t>
-            </a:r>
-            <a:endParaRPr lang="en-US" dirty="0"/>
-          </a:p>
-        </p:txBody>
-      </p:sp>
-      <p:sp>
-        <p:nvSpPr>
-          <p:cNvPr id="15" name="Text 13"/>
-          <p:cNvSpPr/>
+                <a:effectLst/>
+                <a:latin typeface="ui-sans-serif"/>
+              </a:rPr>
+              <a:t>Prompt inputs shown to the model</a:t>
+            </a:r>
+            <a:endParaRPr lang="en-CA" b="1" i="0" dirty="0">
+              <a:solidFill>
+                <a:srgbClr val="0F766E"/>
+              </a:solidFill>
+              <a:effectLst/>
+              <a:latin typeface="ui-sans-serif"/>
+            </a:endParaRPr>
+          </a:p>
+        </p:txBody>
+      </p:sp>
+      <p:sp>
+        <p:nvSpPr>
+          <p:cNvPr id="4" name="TextBox 3">
+            <a:extLst>
+              <a:ext uri="{FF2B5EF4-FFF2-40B4-BE49-F238E27FC236}">
+                <a16:creationId xmlns:a16="http://schemas.microsoft.com/office/drawing/2014/main" id="{12210598-2A3E-17C9-06FC-AD5405EFD4EC}"/>
+              </a:ext>
+            </a:extLst>
+          </p:cNvPr>
+          <p:cNvSpPr txBox="1"/>
           <p:nvPr/>
         </p:nvSpPr>
         <p:spPr>
           <a:xfrm>
-            <a:off x="1132682" y="3105547"/>
-            <a:ext cx="1905793" cy="1524000"/>
+            <a:off x="5690857" y="1893867"/>
+            <a:ext cx="5666863" cy="761747"/>
           </a:xfrm>
           <a:prstGeom prst="rect">
             <a:avLst/>
           </a:prstGeom>
           <a:noFill/>
-          <a:ln/>
         </p:spPr>
         <p:txBody>
-          <a:bodyPr wrap="square" lIns="0" tIns="0" rIns="0" bIns="0" rtlCol="0" anchor="t"/>
-          <a:lstStyle/>
-          <a:p>
-            <a:pPr>
-              <a:lnSpc>
-                <a:spcPts val="2000"/>
-              </a:lnSpc>
+          <a:bodyPr wrap="square">
+            <a:spAutoFit/>
+          </a:bodyPr>
+          <a:lstStyle/>
+          <a:p>
+            <a:pPr algn="l">
+              <a:spcAft>
+                <a:spcPts val="900"/>
+              </a:spcAft>
+              <a:buNone/>
             </a:pPr>
             <a:r>
-              <a:rPr lang="en-US" sz="1400" dirty="0">
+              <a:rPr lang="en-US" b="1" i="0" dirty="0">
                 <a:solidFill>
-                  <a:srgbClr val="334155"/>
+                  <a:srgbClr val="0F766E"/>
                 </a:solidFill>
-                <a:latin typeface="ui-sans-serif" pitchFamily="34" charset="0"/>
-                <a:ea typeface="ui-sans-serif" pitchFamily="34" charset="-122"/>
-                <a:cs typeface="ui-sans-serif" pitchFamily="34" charset="-120"/>
-              </a:rPr>
-              <a:t>Model choice, 1–24 week horizon, weather/events toggles, confidence band, and AI recommendation.</a:t>
-            </a:r>
-            <a:endParaRPr lang="en-US" sz="1400" dirty="0"/>
-          </a:p>
-        </p:txBody>
-      </p:sp>
-      <p:sp>
-        <p:nvSpPr>
-          <p:cNvPr id="16" name="Text 14"/>
-          <p:cNvSpPr/>
+                <a:effectLst/>
+                <a:latin typeface="ui-sans-serif"/>
+              </a:rPr>
+              <a:t>Model and provider options beside the result</a:t>
+            </a:r>
+          </a:p>
+          <a:p>
+            <a:pPr algn="l">
+              <a:spcAft>
+                <a:spcPts val="900"/>
+              </a:spcAft>
+              <a:buNone/>
+            </a:pPr>
+            <a:endParaRPr lang="en-CA" b="1" i="0" dirty="0">
+              <a:solidFill>
+                <a:srgbClr val="0F766E"/>
+              </a:solidFill>
+              <a:effectLst/>
+              <a:latin typeface="ui-sans-serif"/>
+            </a:endParaRPr>
+          </a:p>
+        </p:txBody>
+      </p:sp>
+      <p:sp>
+        <p:nvSpPr>
+          <p:cNvPr id="8" name="TextBox 7">
+            <a:extLst>
+              <a:ext uri="{FF2B5EF4-FFF2-40B4-BE49-F238E27FC236}">
+                <a16:creationId xmlns:a16="http://schemas.microsoft.com/office/drawing/2014/main" id="{861E6AD6-ACBE-389E-6233-C4A04E51348A}"/>
+              </a:ext>
+            </a:extLst>
+          </p:cNvPr>
+          <p:cNvSpPr txBox="1"/>
           <p:nvPr/>
         </p:nvSpPr>
         <p:spPr>
           <a:xfrm>
-            <a:off x="3754437" y="2292747"/>
-            <a:ext cx="1905992" cy="711200"/>
+            <a:off x="764755" y="4440046"/>
+            <a:ext cx="4295668" cy="954107"/>
           </a:xfrm>
           <a:prstGeom prst="rect">
             <a:avLst/>
           </a:prstGeom>
           <a:noFill/>
-          <a:ln/>
         </p:spPr>
         <p:txBody>
-          <a:bodyPr wrap="square" lIns="0" tIns="0" rIns="0" bIns="0" rtlCol="0" anchor="t"/>
-          <a:lstStyle/>
-          <a:p>
-            <a:pPr>
-              <a:lnSpc>
-                <a:spcPts val="2800"/>
-              </a:lnSpc>
+          <a:bodyPr wrap="square">
+            <a:spAutoFit/>
+          </a:bodyPr>
+          <a:lstStyle/>
+          <a:p>
+            <a:pPr algn="l">
+              <a:spcBef>
+                <a:spcPts val="1200"/>
+              </a:spcBef>
+              <a:buNone/>
             </a:pPr>
             <a:r>
-              <a:rPr lang="en-US" b="1" dirty="0">
+              <a:rPr lang="en-US" sz="1400" b="0" i="0" dirty="0">
                 <a:solidFill>
-                  <a:srgbClr val="0F172A"/>
+                  <a:srgbClr val="355163"/>
                 </a:solidFill>
-                <a:latin typeface="ui-sans-serif" pitchFamily="34" charset="0"/>
-                <a:ea typeface="ui-sans-serif" pitchFamily="34" charset="-122"/>
-                <a:cs typeface="ui-sans-serif" pitchFamily="34" charset="-120"/>
-              </a:rPr>
-              <a:t>Forecast visual</a:t>
-            </a:r>
-            <a:endParaRPr lang="en-US" dirty="0"/>
-          </a:p>
-        </p:txBody>
-      </p:sp>
-      <p:sp>
-        <p:nvSpPr>
-          <p:cNvPr id="17" name="Text 15"/>
-          <p:cNvSpPr/>
+                <a:effectLst/>
+                <a:latin typeface="ui-sans-serif"/>
+              </a:rPr>
+              <a:t>The prompt is grounded in actual model output, so the text recommendation is based on the forecast summary and its measured </a:t>
+            </a:r>
+            <a:r>
+              <a:rPr lang="en-US" sz="1400" b="0" i="0" dirty="0" err="1">
+                <a:solidFill>
+                  <a:srgbClr val="355163"/>
+                </a:solidFill>
+                <a:effectLst/>
+                <a:latin typeface="ui-sans-serif"/>
+              </a:rPr>
+              <a:t>backtest</a:t>
+            </a:r>
+            <a:r>
+              <a:rPr lang="en-US" sz="1400" b="0" i="0" dirty="0">
+                <a:solidFill>
+                  <a:srgbClr val="355163"/>
+                </a:solidFill>
+                <a:effectLst/>
+                <a:latin typeface="ui-sans-serif"/>
+              </a:rPr>
+              <a:t> reliability rather than generic AI advice.</a:t>
+            </a:r>
+          </a:p>
+        </p:txBody>
+      </p:sp>
+      <p:sp>
+        <p:nvSpPr>
+          <p:cNvPr id="14" name="TextBox 13">
+            <a:extLst>
+              <a:ext uri="{FF2B5EF4-FFF2-40B4-BE49-F238E27FC236}">
+                <a16:creationId xmlns:a16="http://schemas.microsoft.com/office/drawing/2014/main" id="{8B35B2AD-E6BF-87F2-DA44-5040D3F20C71}"/>
+              </a:ext>
+            </a:extLst>
+          </p:cNvPr>
+          <p:cNvSpPr txBox="1"/>
           <p:nvPr/>
         </p:nvSpPr>
         <p:spPr>
           <a:xfrm>
-            <a:off x="3754437" y="3105547"/>
-            <a:ext cx="1905992" cy="1270000"/>
+            <a:off x="5690857" y="2433748"/>
+            <a:ext cx="4449024" cy="3016210"/>
           </a:xfrm>
           <a:prstGeom prst="rect">
             <a:avLst/>
           </a:prstGeom>
           <a:noFill/>
-          <a:ln/>
         </p:spPr>
         <p:txBody>
-          <a:bodyPr wrap="square" lIns="0" tIns="0" rIns="0" bIns="0" rtlCol="0" anchor="t"/>
-          <a:lstStyle/>
-          <a:p>
-            <a:pPr>
-              <a:lnSpc>
-                <a:spcPts val="2000"/>
-              </a:lnSpc>
+          <a:bodyPr wrap="square">
+            <a:spAutoFit/>
+          </a:bodyPr>
+          <a:lstStyle/>
+          <a:p>
+            <a:pPr algn="l">
+              <a:buNone/>
             </a:pPr>
             <a:r>
-              <a:rPr lang="en-US" sz="1400" dirty="0">
+              <a:rPr lang="en-US" sz="1200" b="1" i="0" dirty="0">
                 <a:solidFill>
-                  <a:srgbClr val="334155"/>
+                  <a:srgbClr val="355163"/>
                 </a:solidFill>
-                <a:latin typeface="ui-sans-serif" pitchFamily="34" charset="0"/>
-                <a:ea typeface="ui-sans-serif" pitchFamily="34" charset="-122"/>
-                <a:cs typeface="ui-sans-serif" pitchFamily="34" charset="-120"/>
-              </a:rPr>
-              <a:t>Historical weekly exposures overlaid with forward forecasts and simple upper/lower bounds.</a:t>
-            </a:r>
-            <a:endParaRPr lang="en-US" sz="1400" dirty="0"/>
-          </a:p>
-        </p:txBody>
-      </p:sp>
-      <p:sp>
-        <p:nvSpPr>
-          <p:cNvPr id="18" name="Text 16"/>
-          <p:cNvSpPr/>
-          <p:nvPr/>
-        </p:nvSpPr>
-        <p:spPr>
-          <a:xfrm>
-            <a:off x="1132682" y="5345509"/>
-            <a:ext cx="1905793" cy="711200"/>
-          </a:xfrm>
-          <a:prstGeom prst="rect">
-            <a:avLst/>
-          </a:prstGeom>
-          <a:noFill/>
-          <a:ln/>
-        </p:spPr>
-        <p:txBody>
-          <a:bodyPr wrap="square" lIns="0" tIns="0" rIns="0" bIns="0" rtlCol="0" anchor="t"/>
-          <a:lstStyle/>
-          <a:p>
-            <a:pPr>
-              <a:lnSpc>
-                <a:spcPts val="2800"/>
-              </a:lnSpc>
+                <a:effectLst/>
+                <a:latin typeface="ui-sans-serif"/>
+              </a:rPr>
+              <a:t>Forecast models</a:t>
+            </a:r>
+            <a:br>
+              <a:rPr lang="en-US" sz="1200" b="0" i="0" dirty="0">
+                <a:solidFill>
+                  <a:srgbClr val="355163"/>
+                </a:solidFill>
+                <a:effectLst/>
+                <a:latin typeface="ui-sans-serif"/>
+              </a:rPr>
+            </a:br>
+            <a:r>
+              <a:rPr lang="en-US" sz="1200" b="0" i="0" dirty="0">
+                <a:solidFill>
+                  <a:srgbClr val="355163"/>
+                </a:solidFill>
+                <a:effectLst/>
+                <a:latin typeface="ui-sans-serif"/>
+              </a:rPr>
+              <a:t>Naive</a:t>
+            </a:r>
+            <a:br>
+              <a:rPr lang="en-US" sz="1200" b="0" i="0" dirty="0">
+                <a:solidFill>
+                  <a:srgbClr val="355163"/>
+                </a:solidFill>
+                <a:effectLst/>
+                <a:latin typeface="ui-sans-serif"/>
+              </a:rPr>
+            </a:br>
+            <a:r>
+              <a:rPr lang="en-US" sz="1200" b="0" i="0" dirty="0">
+                <a:solidFill>
+                  <a:srgbClr val="355163"/>
+                </a:solidFill>
+                <a:effectLst/>
+                <a:latin typeface="ui-sans-serif"/>
+              </a:rPr>
+              <a:t>Moving Average</a:t>
+            </a:r>
+            <a:br>
+              <a:rPr lang="en-US" sz="1200" b="0" i="0" dirty="0">
+                <a:solidFill>
+                  <a:srgbClr val="355163"/>
+                </a:solidFill>
+                <a:effectLst/>
+                <a:latin typeface="ui-sans-serif"/>
+              </a:rPr>
+            </a:br>
+            <a:r>
+              <a:rPr lang="en-US" sz="1200" b="0" i="0" dirty="0">
+                <a:solidFill>
+                  <a:srgbClr val="355163"/>
+                </a:solidFill>
+                <a:effectLst/>
+                <a:latin typeface="ui-sans-serif"/>
+              </a:rPr>
+              <a:t>Exponential Smoothing</a:t>
+            </a:r>
+            <a:br>
+              <a:rPr lang="en-US" sz="1200" b="0" i="0" dirty="0">
+                <a:solidFill>
+                  <a:srgbClr val="355163"/>
+                </a:solidFill>
+                <a:effectLst/>
+                <a:latin typeface="ui-sans-serif"/>
+              </a:rPr>
+            </a:br>
+            <a:r>
+              <a:rPr lang="en-US" sz="1200" b="0" i="0" dirty="0">
+                <a:solidFill>
+                  <a:srgbClr val="355163"/>
+                </a:solidFill>
+                <a:effectLst/>
+                <a:latin typeface="ui-sans-serif"/>
+              </a:rPr>
+              <a:t>Holt</a:t>
+            </a:r>
+            <a:br>
+              <a:rPr lang="en-US" sz="1200" b="0" i="0" dirty="0">
+                <a:solidFill>
+                  <a:srgbClr val="355163"/>
+                </a:solidFill>
+                <a:effectLst/>
+                <a:latin typeface="ui-sans-serif"/>
+              </a:rPr>
+            </a:br>
+            <a:r>
+              <a:rPr lang="en-US" sz="1200" b="0" i="0" dirty="0">
+                <a:solidFill>
+                  <a:srgbClr val="355163"/>
+                </a:solidFill>
+                <a:effectLst/>
+                <a:latin typeface="ui-sans-serif"/>
+              </a:rPr>
+              <a:t>Holt-Winters</a:t>
+            </a:r>
+            <a:br>
+              <a:rPr lang="en-US" sz="1200" b="0" i="0" dirty="0">
+                <a:solidFill>
+                  <a:srgbClr val="355163"/>
+                </a:solidFill>
+                <a:effectLst/>
+                <a:latin typeface="ui-sans-serif"/>
+              </a:rPr>
+            </a:br>
+            <a:r>
+              <a:rPr lang="en-US" sz="1200" b="0" i="0" dirty="0">
+                <a:solidFill>
+                  <a:srgbClr val="355163"/>
+                </a:solidFill>
+                <a:effectLst/>
+                <a:latin typeface="ui-sans-serif"/>
+              </a:rPr>
+              <a:t>SARIMA</a:t>
+            </a:r>
+          </a:p>
+          <a:p>
+            <a:pPr algn="l">
+              <a:buNone/>
             </a:pPr>
-            <a:r>
-              <a:rPr lang="en-US" b="1" dirty="0">
+            <a:endParaRPr lang="en-US" sz="1200" b="0" i="0" dirty="0">
+              <a:solidFill>
+                <a:srgbClr val="355163"/>
+              </a:solidFill>
+              <a:effectLst/>
+              <a:latin typeface="ui-sans-serif"/>
+            </a:endParaRPr>
+          </a:p>
+          <a:p>
+            <a:pPr algn="l">
+              <a:buNone/>
+            </a:pPr>
+            <a:r>
+              <a:rPr lang="en-US" sz="1200" b="1" i="0" dirty="0">
                 <a:solidFill>
-                  <a:srgbClr val="0F172A"/>
+                  <a:srgbClr val="355163"/>
                 </a:solidFill>
-                <a:latin typeface="ui-sans-serif" pitchFamily="34" charset="0"/>
-                <a:ea typeface="ui-sans-serif" pitchFamily="34" charset="-122"/>
-                <a:cs typeface="ui-sans-serif" pitchFamily="34" charset="-120"/>
-              </a:rPr>
-              <a:t>Accuracy panel</a:t>
-            </a:r>
-            <a:endParaRPr lang="en-US" dirty="0"/>
-          </a:p>
-        </p:txBody>
-      </p:sp>
-      <p:sp>
-        <p:nvSpPr>
-          <p:cNvPr id="19" name="Text 17"/>
-          <p:cNvSpPr/>
-          <p:nvPr/>
-        </p:nvSpPr>
-        <p:spPr>
-          <a:xfrm>
-            <a:off x="1132682" y="6158309"/>
-            <a:ext cx="1905793" cy="1270000"/>
-          </a:xfrm>
-          <a:prstGeom prst="rect">
-            <a:avLst/>
-          </a:prstGeom>
-          <a:noFill/>
-          <a:ln/>
-        </p:spPr>
-        <p:txBody>
-          <a:bodyPr wrap="square" lIns="0" tIns="0" rIns="0" bIns="0" rtlCol="0" anchor="t"/>
-          <a:lstStyle/>
-          <a:p>
-            <a:pPr>
-              <a:lnSpc>
-                <a:spcPts val="2000"/>
-              </a:lnSpc>
-            </a:pPr>
-            <a:r>
-              <a:rPr lang="en-US" sz="1400" dirty="0">
+                <a:effectLst/>
+                <a:latin typeface="ui-sans-serif"/>
+              </a:rPr>
+              <a:t>AI providers</a:t>
+            </a:r>
+            <a:br>
+              <a:rPr lang="en-US" sz="1200" b="0" i="0" dirty="0">
                 <a:solidFill>
-                  <a:srgbClr val="334155"/>
+                  <a:srgbClr val="355163"/>
                 </a:solidFill>
-                <a:latin typeface="ui-sans-serif" pitchFamily="34" charset="0"/>
-                <a:ea typeface="ui-sans-serif" pitchFamily="34" charset="-122"/>
-                <a:cs typeface="ui-sans-serif" pitchFamily="34" charset="-120"/>
-              </a:rPr>
-              <a:t>Backtest metrics shown beside the forecast so confidence is visible, not hidden.</a:t>
-            </a:r>
-            <a:endParaRPr lang="en-US" sz="1400" dirty="0"/>
-          </a:p>
-        </p:txBody>
-      </p:sp>
-      <p:sp>
-        <p:nvSpPr>
-          <p:cNvPr id="20" name="Text 18"/>
-          <p:cNvSpPr/>
-          <p:nvPr/>
-        </p:nvSpPr>
-        <p:spPr>
-          <a:xfrm>
-            <a:off x="3754437" y="5345509"/>
-            <a:ext cx="1905992" cy="711200"/>
-          </a:xfrm>
-          <a:prstGeom prst="rect">
-            <a:avLst/>
-          </a:prstGeom>
-          <a:noFill/>
-          <a:ln/>
-        </p:spPr>
-        <p:txBody>
-          <a:bodyPr wrap="square" lIns="0" tIns="0" rIns="0" bIns="0" rtlCol="0" anchor="t"/>
-          <a:lstStyle/>
-          <a:p>
-            <a:pPr>
-              <a:lnSpc>
-                <a:spcPts val="2800"/>
-              </a:lnSpc>
-            </a:pPr>
-            <a:r>
-              <a:rPr lang="en-US" b="1" dirty="0">
+                <a:effectLst/>
+                <a:latin typeface="ui-sans-serif"/>
+              </a:rPr>
+            </a:br>
+            <a:r>
+              <a:rPr lang="en-US" sz="1200" b="0" i="0" dirty="0">
                 <a:solidFill>
-                  <a:srgbClr val="0F172A"/>
+                  <a:srgbClr val="355163"/>
                 </a:solidFill>
-                <a:latin typeface="ui-sans-serif" pitchFamily="34" charset="0"/>
-                <a:ea typeface="ui-sans-serif" pitchFamily="34" charset="-122"/>
-                <a:cs typeface="ui-sans-serif" pitchFamily="34" charset="-120"/>
-              </a:rPr>
-              <a:t>Optional context</a:t>
-            </a:r>
-            <a:endParaRPr lang="en-US" dirty="0"/>
-          </a:p>
-        </p:txBody>
-      </p:sp>
-      <p:sp>
-        <p:nvSpPr>
-          <p:cNvPr id="21" name="Text 19"/>
-          <p:cNvSpPr/>
-          <p:nvPr/>
-        </p:nvSpPr>
-        <p:spPr>
-          <a:xfrm>
-            <a:off x="3754437" y="6158309"/>
-            <a:ext cx="1905992" cy="1270000"/>
-          </a:xfrm>
-          <a:prstGeom prst="rect">
-            <a:avLst/>
-          </a:prstGeom>
-          <a:noFill/>
-          <a:ln/>
-        </p:spPr>
-        <p:txBody>
-          <a:bodyPr wrap="square" lIns="0" tIns="0" rIns="0" bIns="0" rtlCol="0" anchor="t"/>
-          <a:lstStyle/>
-          <a:p>
-            <a:pPr>
-              <a:lnSpc>
-                <a:spcPts val="2000"/>
-              </a:lnSpc>
-            </a:pPr>
-            <a:r>
-              <a:rPr lang="en-US" sz="1400" dirty="0">
+                <a:effectLst/>
+                <a:latin typeface="ui-sans-serif"/>
+              </a:rPr>
+              <a:t>Gemini</a:t>
+            </a:r>
+            <a:br>
+              <a:rPr lang="en-US" sz="1200" b="0" i="0" dirty="0">
                 <a:solidFill>
-                  <a:srgbClr val="334155"/>
+                  <a:srgbClr val="355163"/>
                 </a:solidFill>
-                <a:latin typeface="ui-sans-serif" pitchFamily="34" charset="0"/>
-                <a:ea typeface="ui-sans-serif" pitchFamily="34" charset="-122"/>
-                <a:cs typeface="ui-sans-serif" pitchFamily="34" charset="-120"/>
-              </a:rPr>
-              <a:t>Open-Meteo weather and Ticketmaster events can be added as exploratory signals.</a:t>
-            </a:r>
-            <a:endParaRPr lang="en-US" sz="1400" dirty="0"/>
-          </a:p>
-        </p:txBody>
-      </p:sp>
-      <p:sp>
-        <p:nvSpPr>
-          <p:cNvPr id="22" name="Text 20"/>
-          <p:cNvSpPr/>
-          <p:nvPr/>
-        </p:nvSpPr>
-        <p:spPr>
-          <a:xfrm>
-            <a:off x="6805811" y="2374900"/>
-            <a:ext cx="4600087" cy="237728"/>
-          </a:xfrm>
-          <a:prstGeom prst="rect">
-            <a:avLst/>
-          </a:prstGeom>
-          <a:noFill/>
-          <a:ln/>
-        </p:spPr>
-        <p:txBody>
-          <a:bodyPr wrap="square" lIns="0" tIns="0" rIns="0" bIns="0" rtlCol="0" anchor="t"/>
-          <a:lstStyle/>
-          <a:p>
-            <a:pPr>
-              <a:lnSpc>
-                <a:spcPts val="1872"/>
-              </a:lnSpc>
-            </a:pPr>
-            <a:r>
-              <a:rPr lang="en-US" sz="1248" b="1" dirty="0">
+                <a:effectLst/>
+                <a:latin typeface="ui-sans-serif"/>
+              </a:rPr>
+            </a:br>
+            <a:r>
+              <a:rPr lang="en-US" sz="1200" b="0" i="0" dirty="0">
+                <a:solidFill>
+                  <a:srgbClr val="355163"/>
+                </a:solidFill>
+                <a:effectLst/>
+                <a:latin typeface="ui-sans-serif"/>
+              </a:rPr>
+              <a:t>OpenAI</a:t>
+            </a:r>
+            <a:br>
+              <a:rPr lang="en-US" sz="1200" b="0" i="0" dirty="0">
+                <a:solidFill>
+                  <a:srgbClr val="355163"/>
+                </a:solidFill>
+                <a:effectLst/>
+                <a:latin typeface="ui-sans-serif"/>
+              </a:rPr>
+            </a:br>
+            <a:r>
+              <a:rPr lang="en-US" sz="1200" b="0" i="0" dirty="0">
                 <a:solidFill>
                   <a:srgbClr val="64748B"/>
                 </a:solidFill>
-                <a:latin typeface="ui-sans-serif" pitchFamily="34" charset="0"/>
-                <a:ea typeface="ui-sans-serif" pitchFamily="34" charset="-122"/>
-                <a:cs typeface="ui-sans-serif" pitchFamily="34" charset="-120"/>
-              </a:rPr>
-              <a:t>Manager workflow in one screen</a:t>
-            </a:r>
-            <a:endParaRPr lang="en-US" sz="1248" dirty="0"/>
-          </a:p>
-        </p:txBody>
-      </p:sp>
-      <p:sp>
-        <p:nvSpPr>
-          <p:cNvPr id="23" name="Text 21"/>
-          <p:cNvSpPr/>
-          <p:nvPr/>
-        </p:nvSpPr>
-        <p:spPr>
-          <a:xfrm>
-            <a:off x="6991548" y="4720828"/>
-            <a:ext cx="279725" cy="203200"/>
-          </a:xfrm>
-          <a:prstGeom prst="rect">
-            <a:avLst/>
-          </a:prstGeom>
-          <a:noFill/>
-          <a:ln/>
-        </p:spPr>
-        <p:txBody>
-          <a:bodyPr wrap="square" lIns="0" tIns="0" rIns="0" bIns="0" rtlCol="0" anchor="t"/>
-          <a:lstStyle/>
-          <a:p>
-            <a:pPr>
-              <a:lnSpc>
-                <a:spcPts val="1600"/>
-              </a:lnSpc>
+                <a:effectLst/>
+                <a:latin typeface="ui-sans-serif"/>
+              </a:rPr>
+              <a:t>Claude placeholder</a:t>
+            </a:r>
+            <a:endParaRPr lang="en-US" sz="1200" b="0" i="0" dirty="0">
+              <a:solidFill>
+                <a:srgbClr val="355163"/>
+              </a:solidFill>
+              <a:effectLst/>
+              <a:latin typeface="ui-sans-serif"/>
+            </a:endParaRPr>
+          </a:p>
+          <a:p>
+            <a:pPr algn="l">
+              <a:spcBef>
+                <a:spcPts val="1200"/>
+              </a:spcBef>
+              <a:buNone/>
             </a:pPr>
             <a:r>
-              <a:rPr lang="en-US" sz="1200" b="1" dirty="0">
+              <a:rPr lang="en-US" sz="1200" b="1" i="0" dirty="0">
                 <a:solidFill>
-                  <a:srgbClr val="64748B"/>
+                  <a:srgbClr val="355163"/>
                 </a:solidFill>
-                <a:latin typeface="ui-sans-serif" pitchFamily="34" charset="0"/>
-                <a:ea typeface="ui-sans-serif" pitchFamily="34" charset="-122"/>
-                <a:cs typeface="ui-sans-serif" pitchFamily="34" charset="-120"/>
-              </a:rPr>
-              <a:t>W1</a:t>
-            </a:r>
-            <a:endParaRPr lang="en-US" sz="1200" dirty="0"/>
-          </a:p>
-        </p:txBody>
-      </p:sp>
-      <p:sp>
-        <p:nvSpPr>
-          <p:cNvPr id="24" name="Text 22"/>
-          <p:cNvSpPr/>
-          <p:nvPr/>
-        </p:nvSpPr>
-        <p:spPr>
-          <a:xfrm>
-            <a:off x="7764463" y="4720828"/>
-            <a:ext cx="279725" cy="203200"/>
-          </a:xfrm>
-          <a:prstGeom prst="rect">
-            <a:avLst/>
-          </a:prstGeom>
-          <a:noFill/>
-          <a:ln/>
-        </p:spPr>
-        <p:txBody>
-          <a:bodyPr wrap="square" lIns="0" tIns="0" rIns="0" bIns="0" rtlCol="0" anchor="t"/>
-          <a:lstStyle/>
-          <a:p>
-            <a:pPr>
-              <a:lnSpc>
-                <a:spcPts val="1600"/>
-              </a:lnSpc>
-            </a:pPr>
-            <a:r>
-              <a:rPr lang="en-US" sz="1200" b="1" dirty="0">
+                <a:effectLst/>
+                <a:latin typeface="ui-sans-serif"/>
+              </a:rPr>
+              <a:t>Notes:</a:t>
+            </a:r>
+            <a:r>
+              <a:rPr lang="en-US" sz="1200" b="0" i="0" dirty="0">
                 <a:solidFill>
-                  <a:srgbClr val="64748B"/>
+                  <a:srgbClr val="355163"/>
                 </a:solidFill>
-                <a:latin typeface="ui-sans-serif" pitchFamily="34" charset="0"/>
-                <a:ea typeface="ui-sans-serif" pitchFamily="34" charset="-122"/>
-                <a:cs typeface="ui-sans-serif" pitchFamily="34" charset="-120"/>
-              </a:rPr>
-              <a:t>W2</a:t>
-            </a:r>
-            <a:endParaRPr lang="en-US" sz="1200" dirty="0"/>
-          </a:p>
-        </p:txBody>
-      </p:sp>
-      <p:sp>
-        <p:nvSpPr>
-          <p:cNvPr id="25" name="Text 23"/>
-          <p:cNvSpPr/>
-          <p:nvPr/>
-        </p:nvSpPr>
-        <p:spPr>
-          <a:xfrm>
-            <a:off x="8537376" y="4720828"/>
-            <a:ext cx="279725" cy="203200"/>
-          </a:xfrm>
-          <a:prstGeom prst="rect">
-            <a:avLst/>
-          </a:prstGeom>
-          <a:noFill/>
-          <a:ln/>
-        </p:spPr>
-        <p:txBody>
-          <a:bodyPr wrap="square" lIns="0" tIns="0" rIns="0" bIns="0" rtlCol="0" anchor="t"/>
-          <a:lstStyle/>
-          <a:p>
-            <a:pPr>
-              <a:lnSpc>
-                <a:spcPts val="1600"/>
-              </a:lnSpc>
-            </a:pPr>
-            <a:r>
-              <a:rPr lang="en-US" sz="1200" b="1" dirty="0">
-                <a:solidFill>
-                  <a:srgbClr val="64748B"/>
-                </a:solidFill>
-                <a:latin typeface="ui-sans-serif" pitchFamily="34" charset="0"/>
-                <a:ea typeface="ui-sans-serif" pitchFamily="34" charset="-122"/>
-                <a:cs typeface="ui-sans-serif" pitchFamily="34" charset="-120"/>
-              </a:rPr>
-              <a:t>W3</a:t>
-            </a:r>
-            <a:endParaRPr lang="en-US" sz="1200" dirty="0"/>
-          </a:p>
-        </p:txBody>
-      </p:sp>
-      <p:sp>
-        <p:nvSpPr>
-          <p:cNvPr id="26" name="Text 24"/>
-          <p:cNvSpPr/>
-          <p:nvPr/>
-        </p:nvSpPr>
-        <p:spPr>
-          <a:xfrm>
-            <a:off x="9310291" y="4720828"/>
-            <a:ext cx="279725" cy="203200"/>
-          </a:xfrm>
-          <a:prstGeom prst="rect">
-            <a:avLst/>
-          </a:prstGeom>
-          <a:noFill/>
-          <a:ln/>
-        </p:spPr>
-        <p:txBody>
-          <a:bodyPr wrap="square" lIns="0" tIns="0" rIns="0" bIns="0" rtlCol="0" anchor="t"/>
-          <a:lstStyle/>
-          <a:p>
-            <a:pPr>
-              <a:lnSpc>
-                <a:spcPts val="1600"/>
-              </a:lnSpc>
-            </a:pPr>
-            <a:r>
-              <a:rPr lang="en-US" sz="1200" b="1" dirty="0">
-                <a:solidFill>
-                  <a:srgbClr val="64748B"/>
-                </a:solidFill>
-                <a:latin typeface="ui-sans-serif" pitchFamily="34" charset="0"/>
-                <a:ea typeface="ui-sans-serif" pitchFamily="34" charset="-122"/>
-                <a:cs typeface="ui-sans-serif" pitchFamily="34" charset="-120"/>
-              </a:rPr>
-              <a:t>W4</a:t>
-            </a:r>
-            <a:endParaRPr lang="en-US" sz="1200" dirty="0"/>
-          </a:p>
-        </p:txBody>
-      </p:sp>
-      <p:sp>
-        <p:nvSpPr>
-          <p:cNvPr id="27" name="Text 25"/>
-          <p:cNvSpPr/>
-          <p:nvPr/>
-        </p:nvSpPr>
-        <p:spPr>
-          <a:xfrm>
-            <a:off x="10051456" y="4720828"/>
-            <a:ext cx="344697" cy="203200"/>
-          </a:xfrm>
-          <a:prstGeom prst="rect">
-            <a:avLst/>
-          </a:prstGeom>
-          <a:noFill/>
-          <a:ln/>
-        </p:spPr>
-        <p:txBody>
-          <a:bodyPr wrap="square" lIns="0" tIns="0" rIns="0" bIns="0" rtlCol="0" anchor="t"/>
-          <a:lstStyle/>
-          <a:p>
-            <a:pPr>
-              <a:lnSpc>
-                <a:spcPts val="1600"/>
-              </a:lnSpc>
-            </a:pPr>
-            <a:r>
-              <a:rPr lang="en-US" sz="1200" b="1" dirty="0">
-                <a:solidFill>
-                  <a:srgbClr val="64748B"/>
-                </a:solidFill>
-                <a:latin typeface="ui-sans-serif" pitchFamily="34" charset="0"/>
-                <a:ea typeface="ui-sans-serif" pitchFamily="34" charset="-122"/>
-                <a:cs typeface="ui-sans-serif" pitchFamily="34" charset="-120"/>
-              </a:rPr>
-              <a:t>F+1</a:t>
-            </a:r>
-            <a:endParaRPr lang="en-US" sz="1200" dirty="0"/>
-          </a:p>
-        </p:txBody>
-      </p:sp>
-      <p:sp>
-        <p:nvSpPr>
-          <p:cNvPr id="28" name="Text 26"/>
-          <p:cNvSpPr/>
-          <p:nvPr/>
-        </p:nvSpPr>
-        <p:spPr>
-          <a:xfrm>
-            <a:off x="10824370" y="4720828"/>
-            <a:ext cx="344697" cy="203200"/>
-          </a:xfrm>
-          <a:prstGeom prst="rect">
-            <a:avLst/>
-          </a:prstGeom>
-          <a:noFill/>
-          <a:ln/>
-        </p:spPr>
-        <p:txBody>
-          <a:bodyPr wrap="square" lIns="0" tIns="0" rIns="0" bIns="0" rtlCol="0" anchor="t"/>
-          <a:lstStyle/>
-          <a:p>
-            <a:pPr>
-              <a:lnSpc>
-                <a:spcPts val="1600"/>
-              </a:lnSpc>
-            </a:pPr>
-            <a:r>
-              <a:rPr lang="en-US" sz="1200" b="1" dirty="0">
-                <a:solidFill>
-                  <a:srgbClr val="64748B"/>
-                </a:solidFill>
-                <a:latin typeface="ui-sans-serif" pitchFamily="34" charset="0"/>
-                <a:ea typeface="ui-sans-serif" pitchFamily="34" charset="-122"/>
-                <a:cs typeface="ui-sans-serif" pitchFamily="34" charset="-120"/>
-              </a:rPr>
-              <a:t>F+2</a:t>
-            </a:r>
-            <a:endParaRPr lang="en-US" sz="1200" dirty="0"/>
-          </a:p>
-        </p:txBody>
-      </p:sp>
-      <p:sp>
-        <p:nvSpPr>
-          <p:cNvPr id="29" name="Text 27"/>
-          <p:cNvSpPr/>
-          <p:nvPr/>
-        </p:nvSpPr>
-        <p:spPr>
-          <a:xfrm>
-            <a:off x="7136012" y="5152629"/>
-            <a:ext cx="836545" cy="241300"/>
-          </a:xfrm>
-          <a:prstGeom prst="rect">
-            <a:avLst/>
-          </a:prstGeom>
-          <a:noFill/>
-          <a:ln/>
-        </p:spPr>
-        <p:txBody>
-          <a:bodyPr wrap="square" lIns="0" tIns="0" rIns="0" bIns="0" rtlCol="0" anchor="t"/>
-          <a:lstStyle/>
-          <a:p>
-            <a:pPr>
-              <a:lnSpc>
-                <a:spcPts val="2400"/>
-              </a:lnSpc>
-            </a:pPr>
-            <a:r>
-              <a:rPr lang="en-US" sz="1600" b="1" dirty="0">
-                <a:solidFill>
-                  <a:srgbClr val="0F172A"/>
-                </a:solidFill>
-                <a:latin typeface="ui-sans-serif" pitchFamily="34" charset="0"/>
-                <a:ea typeface="ui-sans-serif" pitchFamily="34" charset="-122"/>
-                <a:cs typeface="ui-sans-serif" pitchFamily="34" charset="-120"/>
-              </a:rPr>
-              <a:t>Step 1:</a:t>
-            </a:r>
-            <a:endParaRPr lang="en-US" sz="1600" dirty="0"/>
-          </a:p>
-        </p:txBody>
-      </p:sp>
-      <p:sp>
-        <p:nvSpPr>
-          <p:cNvPr id="30" name="Text 28"/>
-          <p:cNvSpPr/>
-          <p:nvPr/>
-        </p:nvSpPr>
-        <p:spPr>
-          <a:xfrm>
-            <a:off x="7136012" y="5609829"/>
-            <a:ext cx="836545" cy="241300"/>
-          </a:xfrm>
-          <a:prstGeom prst="rect">
-            <a:avLst/>
-          </a:prstGeom>
-          <a:noFill/>
-          <a:ln/>
-        </p:spPr>
-        <p:txBody>
-          <a:bodyPr wrap="square" lIns="0" tIns="0" rIns="0" bIns="0" rtlCol="0" anchor="t"/>
-          <a:lstStyle/>
-          <a:p>
-            <a:pPr>
-              <a:lnSpc>
-                <a:spcPts val="2400"/>
-              </a:lnSpc>
-            </a:pPr>
-            <a:r>
-              <a:rPr lang="en-US" sz="1600" b="1" dirty="0">
-                <a:solidFill>
-                  <a:srgbClr val="0F172A"/>
-                </a:solidFill>
-                <a:latin typeface="ui-sans-serif" pitchFamily="34" charset="0"/>
-                <a:ea typeface="ui-sans-serif" pitchFamily="34" charset="-122"/>
-                <a:cs typeface="ui-sans-serif" pitchFamily="34" charset="-120"/>
-              </a:rPr>
-              <a:t>Step 2:</a:t>
-            </a:r>
-            <a:endParaRPr lang="en-US" sz="1600" dirty="0"/>
-          </a:p>
-        </p:txBody>
-      </p:sp>
-      <p:sp>
-        <p:nvSpPr>
-          <p:cNvPr id="31" name="Text 29"/>
-          <p:cNvSpPr/>
-          <p:nvPr/>
-        </p:nvSpPr>
-        <p:spPr>
-          <a:xfrm>
-            <a:off x="7136012" y="6371829"/>
-            <a:ext cx="836545" cy="241300"/>
-          </a:xfrm>
-          <a:prstGeom prst="rect">
-            <a:avLst/>
-          </a:prstGeom>
-          <a:noFill/>
-          <a:ln/>
-        </p:spPr>
-        <p:txBody>
-          <a:bodyPr wrap="square" lIns="0" tIns="0" rIns="0" bIns="0" rtlCol="0" anchor="t"/>
-          <a:lstStyle/>
-          <a:p>
-            <a:pPr>
-              <a:lnSpc>
-                <a:spcPts val="2400"/>
-              </a:lnSpc>
-            </a:pPr>
-            <a:r>
-              <a:rPr lang="en-US" sz="1600" b="1" dirty="0">
-                <a:solidFill>
-                  <a:srgbClr val="0F172A"/>
-                </a:solidFill>
-                <a:latin typeface="ui-sans-serif" pitchFamily="34" charset="0"/>
-                <a:ea typeface="ui-sans-serif" pitchFamily="34" charset="-122"/>
-                <a:cs typeface="ui-sans-serif" pitchFamily="34" charset="-120"/>
-              </a:rPr>
-              <a:t>Step 3:</a:t>
-            </a:r>
-            <a:endParaRPr lang="en-US" sz="1600" dirty="0"/>
+                <a:effectLst/>
+                <a:latin typeface="ui-sans-serif"/>
+              </a:rPr>
+              <a:t> the page lets the user choose the forecasting model and AI provider, then the app explains the forecast operationally for managers.</a:t>
+            </a:r>
           </a:p>
         </p:txBody>
       </p:sp>
     </p:spTree>
+    <p:extLst>
+      <p:ext uri="{BB962C8B-B14F-4D97-AF65-F5344CB8AC3E}">
+        <p14:creationId xmlns:p14="http://schemas.microsoft.com/office/powerpoint/2010/main" val="2005714003"/>
+      </p:ext>
+    </p:extLst>
   </p:cSld>
   <p:clrMapOvr>
     <a:masterClrMapping/>
@@ -9107,7 +7826,13 @@
   <p:cSld>
     <p:spTree>
       <p:nvGrpSpPr>
-        <p:cNvPr id="1" name=""/>
+        <p:cNvPr id="1" name="">
+          <a:extLst>
+            <a:ext uri="{FF2B5EF4-FFF2-40B4-BE49-F238E27FC236}">
+              <a16:creationId xmlns:a16="http://schemas.microsoft.com/office/drawing/2014/main" id="{9BD2071A-7CFF-B9D0-9AB7-44794E93FA5C}"/>
+            </a:ext>
+          </a:extLst>
+        </p:cNvPr>
         <p:cNvGrpSpPr/>
         <p:nvPr/>
       </p:nvGrpSpPr>
@@ -9121,460 +7846,20 @@
       </p:grpSpPr>
       <p:sp>
         <p:nvSpPr>
-          <p:cNvPr id="2" name="Text 0"/>
+          <p:cNvPr id="11" name="Text 7">
+            <a:extLst>
+              <a:ext uri="{FF2B5EF4-FFF2-40B4-BE49-F238E27FC236}">
+                <a16:creationId xmlns:a16="http://schemas.microsoft.com/office/drawing/2014/main" id="{C896AA13-14A1-85D7-6F12-6999B99511FF}"/>
+              </a:ext>
+            </a:extLst>
+          </p:cNvPr>
           <p:cNvSpPr/>
           <p:nvPr/>
         </p:nvSpPr>
         <p:spPr>
           <a:xfrm>
-            <a:off x="609600" y="1391444"/>
-            <a:ext cx="5283200" cy="2514600"/>
-          </a:xfrm>
-          <a:prstGeom prst="roundRect">
-            <a:avLst>
-              <a:gd name="adj" fmla="val 116364"/>
-            </a:avLst>
-          </a:prstGeom>
-          <a:solidFill>
-            <a:srgbClr val="FFFFFF">
-              <a:alpha val="84000"/>
-            </a:srgbClr>
-          </a:solidFill>
-          <a:ln w="9525">
-            <a:solidFill>
-              <a:srgbClr val="0F172A"/>
-            </a:solidFill>
-          </a:ln>
-          <a:effectLst>
-            <a:outerShdw blurRad="323850" dist="152400" dir="5400000" algn="bl" rotWithShape="0">
-              <a:srgbClr val="0F172A">
-                <a:alpha val="6000"/>
-              </a:srgbClr>
-            </a:outerShdw>
-          </a:effectLst>
-        </p:spPr>
-        <p:txBody>
-          <a:bodyPr wrap="none" lIns="0" tIns="0" rIns="0" bIns="0" rtlCol="0" anchor="ctr">
-            <a:normAutofit/>
-          </a:bodyPr>
-          <a:lstStyle/>
-          <a:p>
-            <a:endParaRPr lang="en-US" sz="2400" dirty="0"/>
-          </a:p>
-        </p:txBody>
-      </p:sp>
-      <p:sp>
-        <p:nvSpPr>
-          <p:cNvPr id="3" name="Text 1"/>
-          <p:cNvSpPr/>
-          <p:nvPr/>
-        </p:nvSpPr>
-        <p:spPr>
-          <a:xfrm>
-            <a:off x="876301" y="1663303"/>
-            <a:ext cx="2010172" cy="401240"/>
-          </a:xfrm>
-          <a:prstGeom prst="roundRect">
-            <a:avLst>
-              <a:gd name="adj" fmla="val 30355418"/>
-            </a:avLst>
-          </a:prstGeom>
-          <a:solidFill>
-            <a:srgbClr val="0891B2">
-              <a:alpha val="10000"/>
-            </a:srgbClr>
-          </a:solidFill>
-          <a:ln/>
-        </p:spPr>
-        <p:txBody>
-          <a:bodyPr wrap="square" lIns="142240" tIns="142240" rIns="142240" bIns="142240" rtlCol="0" anchor="t">
-            <a:normAutofit fontScale="25000" lnSpcReduction="20000"/>
-          </a:bodyPr>
-          <a:lstStyle/>
-          <a:p>
-            <a:r>
-              <a:rPr lang="en-US" sz="1312" b="1" dirty="0">
-                <a:solidFill>
-                  <a:srgbClr val="0C4A6E"/>
-                </a:solidFill>
-                <a:latin typeface="ui-sans-serif" pitchFamily="34" charset="0"/>
-                <a:ea typeface="ui-sans-serif" pitchFamily="34" charset="-122"/>
-                <a:cs typeface="ui-sans-serif" pitchFamily="34" charset="-120"/>
-              </a:rPr>
-              <a:t>Main contribution</a:t>
-            </a:r>
-            <a:endParaRPr lang="en-US" sz="1312" dirty="0"/>
-          </a:p>
-        </p:txBody>
-      </p:sp>
-      <p:sp>
-        <p:nvSpPr>
-          <p:cNvPr id="4" name="Text 2"/>
-          <p:cNvSpPr/>
-          <p:nvPr/>
-        </p:nvSpPr>
-        <p:spPr>
-          <a:xfrm>
-            <a:off x="609600" y="4109244"/>
-            <a:ext cx="5283200" cy="2159000"/>
-          </a:xfrm>
-          <a:prstGeom prst="roundRect">
-            <a:avLst>
-              <a:gd name="adj" fmla="val 135529"/>
-            </a:avLst>
-          </a:prstGeom>
-          <a:solidFill>
-            <a:srgbClr val="FFFFFF">
-              <a:alpha val="84000"/>
-            </a:srgbClr>
-          </a:solidFill>
-          <a:ln w="9525">
-            <a:solidFill>
-              <a:srgbClr val="0F172A"/>
-            </a:solidFill>
-          </a:ln>
-          <a:effectLst>
-            <a:outerShdw blurRad="323850" dist="152400" dir="5400000" algn="bl" rotWithShape="0">
-              <a:srgbClr val="0F172A">
-                <a:alpha val="6000"/>
-              </a:srgbClr>
-            </a:outerShdw>
-          </a:effectLst>
-        </p:spPr>
-        <p:txBody>
-          <a:bodyPr wrap="none" lIns="0" tIns="0" rIns="0" bIns="0" rtlCol="0" anchor="ctr">
-            <a:normAutofit/>
-          </a:bodyPr>
-          <a:lstStyle/>
-          <a:p>
-            <a:endParaRPr lang="en-US" sz="2400" dirty="0"/>
-          </a:p>
-        </p:txBody>
-      </p:sp>
-      <p:sp>
-        <p:nvSpPr>
-          <p:cNvPr id="5" name="Text 3"/>
-          <p:cNvSpPr/>
-          <p:nvPr/>
-        </p:nvSpPr>
-        <p:spPr>
-          <a:xfrm>
-            <a:off x="876301" y="4381103"/>
-            <a:ext cx="1628180" cy="401240"/>
-          </a:xfrm>
-          <a:prstGeom prst="roundRect">
-            <a:avLst>
-              <a:gd name="adj" fmla="val 30355418"/>
-            </a:avLst>
-          </a:prstGeom>
-          <a:solidFill>
-            <a:srgbClr val="0891B2">
-              <a:alpha val="10000"/>
-            </a:srgbClr>
-          </a:solidFill>
-          <a:ln/>
-        </p:spPr>
-        <p:txBody>
-          <a:bodyPr wrap="square" lIns="142240" tIns="142240" rIns="142240" bIns="142240" rtlCol="0" anchor="t">
-            <a:normAutofit fontScale="25000" lnSpcReduction="20000"/>
-          </a:bodyPr>
-          <a:lstStyle/>
-          <a:p>
-            <a:r>
-              <a:rPr lang="en-US" sz="1312" b="1" dirty="0">
-                <a:solidFill>
-                  <a:srgbClr val="0C4A6E"/>
-                </a:solidFill>
-                <a:latin typeface="ui-sans-serif" pitchFamily="34" charset="0"/>
-                <a:ea typeface="ui-sans-serif" pitchFamily="34" charset="-122"/>
-                <a:cs typeface="ui-sans-serif" pitchFamily="34" charset="-120"/>
-              </a:rPr>
-              <a:t>Current limits</a:t>
-            </a:r>
-            <a:endParaRPr lang="en-US" sz="1312" dirty="0"/>
-          </a:p>
-        </p:txBody>
-      </p:sp>
-      <p:sp>
-        <p:nvSpPr>
-          <p:cNvPr id="6" name="Text 4"/>
-          <p:cNvSpPr/>
-          <p:nvPr/>
-        </p:nvSpPr>
-        <p:spPr>
-          <a:xfrm>
-            <a:off x="609600" y="6471444"/>
-            <a:ext cx="5283200" cy="2514600"/>
-          </a:xfrm>
-          <a:prstGeom prst="roundRect">
-            <a:avLst>
-              <a:gd name="adj" fmla="val 116364"/>
-            </a:avLst>
-          </a:prstGeom>
-          <a:solidFill>
-            <a:srgbClr val="FFFFFF">
-              <a:alpha val="84000"/>
-            </a:srgbClr>
-          </a:solidFill>
-          <a:ln w="9525">
-            <a:solidFill>
-              <a:srgbClr val="0F172A"/>
-            </a:solidFill>
-          </a:ln>
-          <a:effectLst>
-            <a:outerShdw blurRad="323850" dist="152400" dir="5400000" algn="bl" rotWithShape="0">
-              <a:srgbClr val="0F172A">
-                <a:alpha val="6000"/>
-              </a:srgbClr>
-            </a:outerShdw>
-          </a:effectLst>
-        </p:spPr>
-        <p:txBody>
-          <a:bodyPr wrap="none" lIns="0" tIns="0" rIns="0" bIns="0" rtlCol="0" anchor="ctr">
-            <a:normAutofit/>
-          </a:bodyPr>
-          <a:lstStyle/>
-          <a:p>
-            <a:endParaRPr lang="en-US" sz="2400" dirty="0"/>
-          </a:p>
-        </p:txBody>
-      </p:sp>
-      <p:sp>
-        <p:nvSpPr>
-          <p:cNvPr id="7" name="Text 5"/>
-          <p:cNvSpPr/>
-          <p:nvPr/>
-        </p:nvSpPr>
-        <p:spPr>
-          <a:xfrm>
-            <a:off x="876300" y="6743303"/>
-            <a:ext cx="1376760" cy="401240"/>
-          </a:xfrm>
-          <a:prstGeom prst="roundRect">
-            <a:avLst>
-              <a:gd name="adj" fmla="val 30355418"/>
-            </a:avLst>
-          </a:prstGeom>
-          <a:solidFill>
-            <a:srgbClr val="0891B2">
-              <a:alpha val="10000"/>
-            </a:srgbClr>
-          </a:solidFill>
-          <a:ln/>
-        </p:spPr>
-        <p:txBody>
-          <a:bodyPr wrap="square" lIns="142240" tIns="142240" rIns="142240" bIns="142240" rtlCol="0" anchor="t">
-            <a:normAutofit fontScale="25000" lnSpcReduction="20000"/>
-          </a:bodyPr>
-          <a:lstStyle/>
-          <a:p>
-            <a:r>
-              <a:rPr lang="en-US" sz="1312" b="1" dirty="0">
-                <a:solidFill>
-                  <a:srgbClr val="0C4A6E"/>
-                </a:solidFill>
-                <a:latin typeface="ui-sans-serif" pitchFamily="34" charset="0"/>
-                <a:ea typeface="ui-sans-serif" pitchFamily="34" charset="-122"/>
-                <a:cs typeface="ui-sans-serif" pitchFamily="34" charset="-120"/>
-              </a:rPr>
-              <a:t>Next phase</a:t>
-            </a:r>
-            <a:endParaRPr lang="en-US" sz="1312" dirty="0"/>
-          </a:p>
-        </p:txBody>
-      </p:sp>
-      <p:sp>
-        <p:nvSpPr>
-          <p:cNvPr id="8" name="Text 6"/>
-          <p:cNvSpPr/>
-          <p:nvPr/>
-        </p:nvSpPr>
-        <p:spPr>
-          <a:xfrm>
-            <a:off x="6299200" y="859036"/>
-            <a:ext cx="5283200" cy="5139928"/>
-          </a:xfrm>
-          <a:prstGeom prst="roundRect">
-            <a:avLst>
-              <a:gd name="adj" fmla="val 56928"/>
-            </a:avLst>
-          </a:prstGeom>
-          <a:solidFill>
-            <a:srgbClr val="FFFFFF">
-              <a:alpha val="84000"/>
-            </a:srgbClr>
-          </a:solidFill>
-          <a:ln w="9525">
-            <a:solidFill>
-              <a:srgbClr val="0F172A"/>
-            </a:solidFill>
-          </a:ln>
-          <a:effectLst>
-            <a:outerShdw blurRad="323850" dist="152400" dir="5400000" algn="bl" rotWithShape="0">
-              <a:srgbClr val="0F172A">
-                <a:alpha val="6000"/>
-              </a:srgbClr>
-            </a:outerShdw>
-          </a:effectLst>
-        </p:spPr>
-        <p:txBody>
-          <a:bodyPr wrap="none" lIns="0" tIns="0" rIns="0" bIns="0" rtlCol="0" anchor="ctr">
-            <a:normAutofit/>
-          </a:bodyPr>
-          <a:lstStyle/>
-          <a:p>
-            <a:endParaRPr lang="en-US" sz="2400" dirty="0"/>
-          </a:p>
-        </p:txBody>
-      </p:sp>
-      <p:pic>
-        <p:nvPicPr>
-          <p:cNvPr id="9" name="Image 0" descr="preencoded.png"/>
-          <p:cNvPicPr>
-            <a:picLocks noChangeAspect="1"/>
-          </p:cNvPicPr>
-          <p:nvPr/>
-        </p:nvPicPr>
-        <p:blipFill>
-          <a:blip r:embed="rId3"/>
-          <a:stretch>
-            <a:fillRect/>
-          </a:stretch>
-        </p:blipFill>
-        <p:spPr>
-          <a:xfrm>
-            <a:off x="6591301" y="973336"/>
-            <a:ext cx="38100" cy="4911328"/>
-          </a:xfrm>
-          <a:prstGeom prst="rect">
-            <a:avLst/>
-          </a:prstGeom>
-        </p:spPr>
-      </p:pic>
-      <p:sp>
-        <p:nvSpPr>
-          <p:cNvPr id="10" name="Text 7"/>
-          <p:cNvSpPr/>
-          <p:nvPr/>
-        </p:nvSpPr>
-        <p:spPr>
-          <a:xfrm>
-            <a:off x="6961981" y="1642864"/>
-            <a:ext cx="177800" cy="177800"/>
-          </a:xfrm>
-          <a:prstGeom prst="roundRect">
-            <a:avLst>
-              <a:gd name="adj" fmla="val 3428571"/>
-            </a:avLst>
-          </a:prstGeom>
-          <a:solidFill>
-            <a:srgbClr val="0891B2"/>
-          </a:solidFill>
-          <a:ln/>
-          <a:effectLst>
-            <a:outerShdw blurRad="101600" dist="50800" dir="16200000" algn="bl" rotWithShape="0">
-              <a:srgbClr val="0891B2">
-                <a:alpha val="12000"/>
-              </a:srgbClr>
-            </a:outerShdw>
-          </a:effectLst>
-        </p:spPr>
-        <p:txBody>
-          <a:bodyPr wrap="none" lIns="0" tIns="0" rIns="0" bIns="0" rtlCol="0" anchor="ctr">
-            <a:normAutofit fontScale="40000" lnSpcReduction="20000"/>
-          </a:bodyPr>
-          <a:lstStyle/>
-          <a:p>
-            <a:endParaRPr lang="en-US" sz="2400" dirty="0"/>
-          </a:p>
-        </p:txBody>
-      </p:sp>
-      <p:sp>
-        <p:nvSpPr>
-          <p:cNvPr id="11" name="Text 8"/>
-          <p:cNvSpPr/>
-          <p:nvPr/>
-        </p:nvSpPr>
-        <p:spPr>
-          <a:xfrm>
-            <a:off x="6961981" y="3116064"/>
-            <a:ext cx="177800" cy="177800"/>
-          </a:xfrm>
-          <a:prstGeom prst="roundRect">
-            <a:avLst>
-              <a:gd name="adj" fmla="val 3428571"/>
-            </a:avLst>
-          </a:prstGeom>
-          <a:solidFill>
-            <a:srgbClr val="0891B2"/>
-          </a:solidFill>
-          <a:ln/>
-          <a:effectLst>
-            <a:outerShdw blurRad="101600" dist="50800" dir="16200000" algn="bl" rotWithShape="0">
-              <a:srgbClr val="0891B2">
-                <a:alpha val="12000"/>
-              </a:srgbClr>
-            </a:outerShdw>
-          </a:effectLst>
-        </p:spPr>
-        <p:txBody>
-          <a:bodyPr wrap="none" lIns="0" tIns="0" rIns="0" bIns="0" rtlCol="0" anchor="ctr">
-            <a:normAutofit fontScale="40000" lnSpcReduction="20000"/>
-          </a:bodyPr>
-          <a:lstStyle/>
-          <a:p>
-            <a:endParaRPr lang="en-US" sz="2400" dirty="0"/>
-          </a:p>
-        </p:txBody>
-      </p:sp>
-      <p:sp>
-        <p:nvSpPr>
-          <p:cNvPr id="12" name="Text 9"/>
-          <p:cNvSpPr/>
-          <p:nvPr/>
-        </p:nvSpPr>
-        <p:spPr>
-          <a:xfrm>
-            <a:off x="6961981" y="4589264"/>
-            <a:ext cx="177800" cy="177800"/>
-          </a:xfrm>
-          <a:prstGeom prst="roundRect">
-            <a:avLst>
-              <a:gd name="adj" fmla="val 3428571"/>
-            </a:avLst>
-          </a:prstGeom>
-          <a:solidFill>
-            <a:srgbClr val="0891B2"/>
-          </a:solidFill>
-          <a:ln/>
-          <a:effectLst>
-            <a:outerShdw blurRad="101600" dist="50800" dir="16200000" algn="bl" rotWithShape="0">
-              <a:srgbClr val="0891B2">
-                <a:alpha val="12000"/>
-              </a:srgbClr>
-            </a:outerShdw>
-          </a:effectLst>
-        </p:spPr>
-        <p:txBody>
-          <a:bodyPr wrap="none" lIns="0" tIns="0" rIns="0" bIns="0" rtlCol="0" anchor="ctr">
-            <a:normAutofit fontScale="40000" lnSpcReduction="20000"/>
-          </a:bodyPr>
-          <a:lstStyle/>
-          <a:p>
-            <a:endParaRPr lang="en-US" sz="2400" dirty="0"/>
-          </a:p>
-        </p:txBody>
-      </p:sp>
-      <p:sp>
-        <p:nvSpPr>
-          <p:cNvPr id="13" name="Text 10"/>
-          <p:cNvSpPr/>
-          <p:nvPr/>
-        </p:nvSpPr>
-        <p:spPr>
-          <a:xfrm>
-            <a:off x="609600" y="-2127845"/>
-            <a:ext cx="5388864" cy="237728"/>
+            <a:off x="834280" y="392448"/>
+            <a:ext cx="2678465" cy="259402"/>
           </a:xfrm>
           <a:prstGeom prst="rect">
             <a:avLst/>
@@ -9586,36 +7871,29 @@
           <a:bodyPr wrap="square" lIns="0" tIns="0" rIns="0" bIns="0" rtlCol="0" anchor="t"/>
           <a:lstStyle/>
           <a:p>
-            <a:pPr>
-              <a:lnSpc>
-                <a:spcPts val="1872"/>
-              </a:lnSpc>
-            </a:pPr>
-            <a:r>
-              <a:rPr lang="en-US" sz="1248" b="1" dirty="0">
-                <a:solidFill>
-                  <a:srgbClr val="64748B"/>
-                </a:solidFill>
-                <a:latin typeface="ui-sans-serif" pitchFamily="34" charset="0"/>
-                <a:ea typeface="ui-sans-serif" pitchFamily="34" charset="-122"/>
-                <a:cs typeface="ui-sans-serif" pitchFamily="34" charset="-120"/>
-              </a:rPr>
-              <a:t>Impact, limits, next steps</a:t>
-            </a:r>
-            <a:endParaRPr lang="en-US" sz="1248" dirty="0"/>
-          </a:p>
-        </p:txBody>
-      </p:sp>
-      <p:sp>
-        <p:nvSpPr>
-          <p:cNvPr id="14" name="Text 11"/>
+            <a:br>
+              <a:rPr lang="en-CA" sz="2000" dirty="0"/>
+            </a:br>
+            <a:endParaRPr lang="en-US" sz="2000" dirty="0"/>
+          </a:p>
+        </p:txBody>
+      </p:sp>
+      <p:sp>
+        <p:nvSpPr>
+          <p:cNvPr id="12" name="Text 8">
+            <a:extLst>
+              <a:ext uri="{FF2B5EF4-FFF2-40B4-BE49-F238E27FC236}">
+                <a16:creationId xmlns:a16="http://schemas.microsoft.com/office/drawing/2014/main" id="{7DC65381-6742-D743-5F2B-C7CF2C8ACD53}"/>
+              </a:ext>
+            </a:extLst>
+          </p:cNvPr>
           <p:cNvSpPr/>
           <p:nvPr/>
         </p:nvSpPr>
         <p:spPr>
           <a:xfrm>
-            <a:off x="609600" y="-1788517"/>
-            <a:ext cx="5283200" cy="2925961"/>
+            <a:off x="834279" y="766602"/>
+            <a:ext cx="10455057" cy="618570"/>
           </a:xfrm>
           <a:prstGeom prst="rect">
             <a:avLst/>
@@ -9627,36 +7905,65 @@
           <a:bodyPr wrap="square" lIns="0" tIns="0" rIns="0" bIns="0" rtlCol="0" anchor="t"/>
           <a:lstStyle/>
           <a:p>
-            <a:pPr>
-              <a:lnSpc>
-                <a:spcPts val="7680"/>
-              </a:lnSpc>
-            </a:pPr>
-            <a:r>
-              <a:rPr lang="en-US" sz="5120" b="1" dirty="0">
-                <a:solidFill>
-                  <a:srgbClr val="0F172A"/>
-                </a:solidFill>
-                <a:latin typeface="Manrope" pitchFamily="34" charset="0"/>
-                <a:ea typeface="Manrope" pitchFamily="34" charset="-122"/>
-                <a:cs typeface="Manrope" pitchFamily="34" charset="-120"/>
-              </a:rPr>
-              <a:t>From passive dashboard to decision support</a:t>
-            </a:r>
-            <a:endParaRPr lang="en-US" sz="5120" dirty="0"/>
-          </a:p>
-        </p:txBody>
-      </p:sp>
-      <p:sp>
-        <p:nvSpPr>
-          <p:cNvPr id="15" name="Text 12"/>
+            <a:r>
+              <a:rPr lang="en-US" sz="3200" b="1" dirty="0"/>
+              <a:t>Demo</a:t>
+            </a:r>
+          </a:p>
+        </p:txBody>
+      </p:sp>
+    </p:spTree>
+    <p:extLst>
+      <p:ext uri="{BB962C8B-B14F-4D97-AF65-F5344CB8AC3E}">
+        <p14:creationId xmlns:p14="http://schemas.microsoft.com/office/powerpoint/2010/main" val="799882113"/>
+      </p:ext>
+    </p:extLst>
+  </p:cSld>
+  <p:clrMapOvr>
+    <a:masterClrMapping/>
+  </p:clrMapOvr>
+</p:sld>
+</file>
+
+<file path=ppt/slides/slide7.xml><?xml version="1.0" encoding="utf-8"?>
+<p:sld xmlns:a="http://schemas.openxmlformats.org/drawingml/2006/main" xmlns:r="http://schemas.openxmlformats.org/officeDocument/2006/relationships" xmlns:p="http://schemas.openxmlformats.org/presentationml/2006/main">
+  <p:cSld>
+    <p:spTree>
+      <p:nvGrpSpPr>
+        <p:cNvPr id="1" name="">
+          <a:extLst>
+            <a:ext uri="{FF2B5EF4-FFF2-40B4-BE49-F238E27FC236}">
+              <a16:creationId xmlns:a16="http://schemas.microsoft.com/office/drawing/2014/main" id="{4F49DE60-337B-9DD9-0345-CDAF65570FDB}"/>
+            </a:ext>
+          </a:extLst>
+        </p:cNvPr>
+        <p:cNvGrpSpPr/>
+        <p:nvPr/>
+      </p:nvGrpSpPr>
+      <p:grpSpPr>
+        <a:xfrm>
+          <a:off x="0" y="0"/>
+          <a:ext cx="0" cy="0"/>
+          <a:chOff x="0" y="0"/>
+          <a:chExt cx="0" cy="0"/>
+        </a:xfrm>
+      </p:grpSpPr>
+      <p:sp>
+        <p:nvSpPr>
+          <p:cNvPr id="11" name="Text 7">
+            <a:extLst>
+              <a:ext uri="{FF2B5EF4-FFF2-40B4-BE49-F238E27FC236}">
+                <a16:creationId xmlns:a16="http://schemas.microsoft.com/office/drawing/2014/main" id="{1F902257-DD34-AB6F-DF47-04783DBE46F9}"/>
+              </a:ext>
+            </a:extLst>
+          </p:cNvPr>
           <p:cNvSpPr/>
           <p:nvPr/>
         </p:nvSpPr>
         <p:spPr>
           <a:xfrm>
-            <a:off x="876300" y="2216944"/>
-            <a:ext cx="4749800" cy="1422400"/>
+            <a:off x="834280" y="392448"/>
+            <a:ext cx="2678465" cy="259402"/>
           </a:xfrm>
           <a:prstGeom prst="rect">
             <a:avLst/>
@@ -9668,36 +7975,29 @@
           <a:bodyPr wrap="square" lIns="0" tIns="0" rIns="0" bIns="0" rtlCol="0" anchor="t"/>
           <a:lstStyle/>
           <a:p>
-            <a:pPr>
-              <a:lnSpc>
-                <a:spcPts val="2800"/>
-              </a:lnSpc>
-            </a:pPr>
-            <a:r>
-              <a:rPr lang="en-US" dirty="0">
-                <a:solidFill>
-                  <a:srgbClr val="334155"/>
-                </a:solidFill>
-                <a:latin typeface="ui-sans-serif" pitchFamily="34" charset="0"/>
-                <a:ea typeface="ui-sans-serif" pitchFamily="34" charset="-122"/>
-                <a:cs typeface="ui-sans-serif" pitchFamily="34" charset="-120"/>
-              </a:rPr>
-              <a:t>The project shows that routine EMS exposure records can support a transparent weekly forecasting workflow that managers can understand and use.</a:t>
-            </a:r>
-            <a:endParaRPr lang="en-US" dirty="0"/>
-          </a:p>
-        </p:txBody>
-      </p:sp>
-      <p:sp>
-        <p:nvSpPr>
-          <p:cNvPr id="16" name="Text 13"/>
+            <a:br>
+              <a:rPr lang="en-CA" sz="2000" dirty="0"/>
+            </a:br>
+            <a:endParaRPr lang="en-US" sz="2000" dirty="0"/>
+          </a:p>
+        </p:txBody>
+      </p:sp>
+      <p:sp>
+        <p:nvSpPr>
+          <p:cNvPr id="12" name="Text 8">
+            <a:extLst>
+              <a:ext uri="{FF2B5EF4-FFF2-40B4-BE49-F238E27FC236}">
+                <a16:creationId xmlns:a16="http://schemas.microsoft.com/office/drawing/2014/main" id="{3994E74E-0E28-ABD7-CB63-06A65F363AC1}"/>
+              </a:ext>
+            </a:extLst>
+          </p:cNvPr>
           <p:cNvSpPr/>
           <p:nvPr/>
         </p:nvSpPr>
         <p:spPr>
           <a:xfrm>
-            <a:off x="876300" y="4934744"/>
-            <a:ext cx="4749800" cy="1066800"/>
+            <a:off x="834279" y="766602"/>
+            <a:ext cx="10455057" cy="618570"/>
           </a:xfrm>
           <a:prstGeom prst="rect">
             <a:avLst/>
@@ -9709,355 +8009,66 @@
           <a:bodyPr wrap="square" lIns="0" tIns="0" rIns="0" bIns="0" rtlCol="0" anchor="t"/>
           <a:lstStyle/>
           <a:p>
-            <a:pPr>
-              <a:lnSpc>
-                <a:spcPts val="2800"/>
-              </a:lnSpc>
-            </a:pPr>
-            <a:r>
-              <a:rPr lang="en-US" dirty="0">
-                <a:solidFill>
-                  <a:srgbClr val="334155"/>
-                </a:solidFill>
-                <a:latin typeface="ui-sans-serif" pitchFamily="34" charset="0"/>
-                <a:ea typeface="ui-sans-serif" pitchFamily="34" charset="-122"/>
-                <a:cs typeface="ui-sans-serif" pitchFamily="34" charset="-120"/>
-              </a:rPr>
-              <a:t>The final prototype is constrained by one year of data, a single exposure outcome, and incomplete hospital outcome fields.</a:t>
-            </a:r>
-            <a:endParaRPr lang="en-US" dirty="0"/>
-          </a:p>
-        </p:txBody>
-      </p:sp>
-      <p:sp>
-        <p:nvSpPr>
-          <p:cNvPr id="17" name="Text 14"/>
-          <p:cNvSpPr/>
+            <a:r>
+              <a:rPr lang="en-US" sz="3200" b="1" dirty="0"/>
+              <a:t>CSIS 4495 Applied Research</a:t>
+            </a:r>
+          </a:p>
+        </p:txBody>
+      </p:sp>
+      <p:sp>
+        <p:nvSpPr>
+          <p:cNvPr id="3" name="TextBox 2">
+            <a:extLst>
+              <a:ext uri="{FF2B5EF4-FFF2-40B4-BE49-F238E27FC236}">
+                <a16:creationId xmlns:a16="http://schemas.microsoft.com/office/drawing/2014/main" id="{93635594-7FE0-BC04-2ADA-4E799DB80EDA}"/>
+              </a:ext>
+            </a:extLst>
+          </p:cNvPr>
+          <p:cNvSpPr txBox="1"/>
           <p:nvPr/>
         </p:nvSpPr>
         <p:spPr>
           <a:xfrm>
-            <a:off x="876300" y="7296944"/>
-            <a:ext cx="4749800" cy="1422400"/>
+            <a:off x="834279" y="1893867"/>
+            <a:ext cx="1942145" cy="369332"/>
           </a:xfrm>
           <a:prstGeom prst="rect">
             <a:avLst/>
           </a:prstGeom>
           <a:noFill/>
-          <a:ln/>
         </p:spPr>
         <p:txBody>
-          <a:bodyPr wrap="square" lIns="0" tIns="0" rIns="0" bIns="0" rtlCol="0" anchor="t"/>
-          <a:lstStyle/>
-          <a:p>
-            <a:pPr>
-              <a:lnSpc>
-                <a:spcPts val="2800"/>
-              </a:lnSpc>
+          <a:bodyPr wrap="square">
+            <a:spAutoFit/>
+          </a:bodyPr>
+          <a:lstStyle/>
+          <a:p>
+            <a:pPr algn="l">
+              <a:spcAft>
+                <a:spcPts val="900"/>
+              </a:spcAft>
+              <a:buNone/>
             </a:pPr>
             <a:r>
-              <a:rPr lang="en-US" dirty="0">
+              <a:rPr lang="en-CA" b="1" i="0" dirty="0">
                 <a:solidFill>
-                  <a:srgbClr val="334155"/>
+                  <a:srgbClr val="0F766E"/>
                 </a:solidFill>
-                <a:latin typeface="ui-sans-serif" pitchFamily="34" charset="0"/>
-                <a:ea typeface="ui-sans-serif" pitchFamily="34" charset="-122"/>
-                <a:cs typeface="ui-sans-serif" pitchFamily="34" charset="-120"/>
-              </a:rPr>
-              <a:t>Extend to more years, validate model performance across settings, and strengthen links between forecasts, staffing, and preventive actions.</a:t>
-            </a:r>
-            <a:endParaRPr lang="en-US" dirty="0"/>
-          </a:p>
-        </p:txBody>
-      </p:sp>
-      <p:sp>
-        <p:nvSpPr>
-          <p:cNvPr id="18" name="Text 15"/>
-          <p:cNvSpPr/>
-          <p:nvPr/>
-        </p:nvSpPr>
-        <p:spPr>
-          <a:xfrm>
-            <a:off x="6961982" y="1125736"/>
-            <a:ext cx="4440793" cy="237728"/>
-          </a:xfrm>
-          <a:prstGeom prst="rect">
-            <a:avLst/>
-          </a:prstGeom>
-          <a:noFill/>
-          <a:ln/>
-        </p:spPr>
-        <p:txBody>
-          <a:bodyPr wrap="square" lIns="0" tIns="0" rIns="0" bIns="0" rtlCol="0" anchor="t"/>
-          <a:lstStyle/>
-          <a:p>
-            <a:pPr>
-              <a:lnSpc>
-                <a:spcPts val="1872"/>
-              </a:lnSpc>
-            </a:pPr>
-            <a:r>
-              <a:rPr lang="en-US" sz="1248" b="1" dirty="0">
-                <a:solidFill>
-                  <a:srgbClr val="64748B"/>
-                </a:solidFill>
-                <a:latin typeface="ui-sans-serif" pitchFamily="34" charset="0"/>
-                <a:ea typeface="ui-sans-serif" pitchFamily="34" charset="-122"/>
-                <a:cs typeface="ui-sans-serif" pitchFamily="34" charset="-120"/>
-              </a:rPr>
-              <a:t>Prototype roadmap</a:t>
-            </a:r>
-            <a:endParaRPr lang="en-US" sz="1248" dirty="0"/>
-          </a:p>
-        </p:txBody>
-      </p:sp>
-      <p:sp>
-        <p:nvSpPr>
-          <p:cNvPr id="19" name="Text 16"/>
-          <p:cNvSpPr/>
-          <p:nvPr/>
-        </p:nvSpPr>
-        <p:spPr>
-          <a:xfrm>
-            <a:off x="7342982" y="1566664"/>
-            <a:ext cx="4052173" cy="304800"/>
-          </a:xfrm>
-          <a:prstGeom prst="rect">
-            <a:avLst/>
-          </a:prstGeom>
-          <a:noFill/>
-          <a:ln/>
-        </p:spPr>
-        <p:txBody>
-          <a:bodyPr wrap="square" lIns="0" tIns="0" rIns="0" bIns="0" rtlCol="0" anchor="t"/>
-          <a:lstStyle/>
-          <a:p>
-            <a:pPr>
-              <a:lnSpc>
-                <a:spcPts val="2400"/>
-              </a:lnSpc>
-            </a:pPr>
-            <a:r>
-              <a:rPr lang="en-US" sz="1600" b="1" dirty="0">
-                <a:solidFill>
-                  <a:srgbClr val="0F172A"/>
-                </a:solidFill>
-                <a:latin typeface="ui-sans-serif" pitchFamily="34" charset="0"/>
-                <a:ea typeface="ui-sans-serif" pitchFamily="34" charset="-122"/>
-                <a:cs typeface="ui-sans-serif" pitchFamily="34" charset="-120"/>
-              </a:rPr>
-              <a:t>Now</a:t>
-            </a:r>
-            <a:endParaRPr lang="en-US" sz="1600" dirty="0"/>
-          </a:p>
-        </p:txBody>
-      </p:sp>
-      <p:sp>
-        <p:nvSpPr>
-          <p:cNvPr id="20" name="Text 17"/>
-          <p:cNvSpPr/>
-          <p:nvPr/>
-        </p:nvSpPr>
-        <p:spPr>
-          <a:xfrm>
-            <a:off x="7342982" y="1871464"/>
-            <a:ext cx="3972719" cy="914400"/>
-          </a:xfrm>
-          <a:prstGeom prst="rect">
-            <a:avLst/>
-          </a:prstGeom>
-          <a:noFill/>
-          <a:ln/>
-        </p:spPr>
-        <p:txBody>
-          <a:bodyPr wrap="square" lIns="0" tIns="0" rIns="0" bIns="0" rtlCol="0" anchor="t"/>
-          <a:lstStyle/>
-          <a:p>
-            <a:pPr>
-              <a:lnSpc>
-                <a:spcPts val="2400"/>
-              </a:lnSpc>
-            </a:pPr>
-            <a:r>
-              <a:rPr lang="en-US" sz="1600" dirty="0">
-                <a:solidFill>
-                  <a:srgbClr val="334155"/>
-                </a:solidFill>
-                <a:latin typeface="ui-sans-serif" pitchFamily="34" charset="0"/>
-                <a:ea typeface="ui-sans-serif" pitchFamily="34" charset="-122"/>
-                <a:cs typeface="ui-sans-serif" pitchFamily="34" charset="-120"/>
-              </a:rPr>
-              <a:t>Working Streamlit prototype with forecasting, backtesting, and PAi recommendations.</a:t>
-            </a:r>
-            <a:endParaRPr lang="en-US" sz="1600" dirty="0"/>
-          </a:p>
-        </p:txBody>
-      </p:sp>
-      <p:sp>
-        <p:nvSpPr>
-          <p:cNvPr id="21" name="Text 18"/>
-          <p:cNvSpPr/>
-          <p:nvPr/>
-        </p:nvSpPr>
-        <p:spPr>
-          <a:xfrm>
-            <a:off x="7342982" y="3039864"/>
-            <a:ext cx="4052173" cy="304800"/>
-          </a:xfrm>
-          <a:prstGeom prst="rect">
-            <a:avLst/>
-          </a:prstGeom>
-          <a:noFill/>
-          <a:ln/>
-        </p:spPr>
-        <p:txBody>
-          <a:bodyPr wrap="square" lIns="0" tIns="0" rIns="0" bIns="0" rtlCol="0" anchor="t"/>
-          <a:lstStyle/>
-          <a:p>
-            <a:pPr>
-              <a:lnSpc>
-                <a:spcPts val="2400"/>
-              </a:lnSpc>
-            </a:pPr>
-            <a:r>
-              <a:rPr lang="en-US" sz="1600" b="1" dirty="0">
-                <a:solidFill>
-                  <a:srgbClr val="0F172A"/>
-                </a:solidFill>
-                <a:latin typeface="ui-sans-serif" pitchFamily="34" charset="0"/>
-                <a:ea typeface="ui-sans-serif" pitchFamily="34" charset="-122"/>
-                <a:cs typeface="ui-sans-serif" pitchFamily="34" charset="-120"/>
-              </a:rPr>
-              <a:t>Next</a:t>
-            </a:r>
-            <a:endParaRPr lang="en-US" sz="1600" dirty="0"/>
-          </a:p>
-        </p:txBody>
-      </p:sp>
-      <p:sp>
-        <p:nvSpPr>
-          <p:cNvPr id="22" name="Text 19"/>
-          <p:cNvSpPr/>
-          <p:nvPr/>
-        </p:nvSpPr>
-        <p:spPr>
-          <a:xfrm>
-            <a:off x="7342982" y="3344664"/>
-            <a:ext cx="3972719" cy="914400"/>
-          </a:xfrm>
-          <a:prstGeom prst="rect">
-            <a:avLst/>
-          </a:prstGeom>
-          <a:noFill/>
-          <a:ln/>
-        </p:spPr>
-        <p:txBody>
-          <a:bodyPr wrap="square" lIns="0" tIns="0" rIns="0" bIns="0" rtlCol="0" anchor="t"/>
-          <a:lstStyle/>
-          <a:p>
-            <a:pPr>
-              <a:lnSpc>
-                <a:spcPts val="2400"/>
-              </a:lnSpc>
-            </a:pPr>
-            <a:r>
-              <a:rPr lang="en-US" sz="1600" dirty="0">
-                <a:solidFill>
-                  <a:srgbClr val="334155"/>
-                </a:solidFill>
-                <a:latin typeface="ui-sans-serif" pitchFamily="34" charset="0"/>
-                <a:ea typeface="ui-sans-serif" pitchFamily="34" charset="-122"/>
-                <a:cs typeface="ui-sans-serif" pitchFamily="34" charset="-120"/>
-              </a:rPr>
-              <a:t>Add more historical years and compare forecast stability across models and horizons.</a:t>
-            </a:r>
-            <a:endParaRPr lang="en-US" sz="1600" dirty="0"/>
-          </a:p>
-        </p:txBody>
-      </p:sp>
-      <p:sp>
-        <p:nvSpPr>
-          <p:cNvPr id="23" name="Text 20"/>
-          <p:cNvSpPr/>
-          <p:nvPr/>
-        </p:nvSpPr>
-        <p:spPr>
-          <a:xfrm>
-            <a:off x="7342982" y="4513064"/>
-            <a:ext cx="4052173" cy="304800"/>
-          </a:xfrm>
-          <a:prstGeom prst="rect">
-            <a:avLst/>
-          </a:prstGeom>
-          <a:noFill/>
-          <a:ln/>
-        </p:spPr>
-        <p:txBody>
-          <a:bodyPr wrap="square" lIns="0" tIns="0" rIns="0" bIns="0" rtlCol="0" anchor="t"/>
-          <a:lstStyle/>
-          <a:p>
-            <a:pPr>
-              <a:lnSpc>
-                <a:spcPts val="2400"/>
-              </a:lnSpc>
-            </a:pPr>
-            <a:r>
-              <a:rPr lang="en-US" sz="1600" b="1" dirty="0">
-                <a:solidFill>
-                  <a:srgbClr val="0F172A"/>
-                </a:solidFill>
-                <a:latin typeface="ui-sans-serif" pitchFamily="34" charset="0"/>
-                <a:ea typeface="ui-sans-serif" pitchFamily="34" charset="-122"/>
-                <a:cs typeface="ui-sans-serif" pitchFamily="34" charset="-120"/>
-              </a:rPr>
-              <a:t>Later</a:t>
-            </a:r>
-            <a:endParaRPr lang="en-US" sz="1600" dirty="0"/>
-          </a:p>
-        </p:txBody>
-      </p:sp>
-      <p:sp>
-        <p:nvSpPr>
-          <p:cNvPr id="24" name="Text 21"/>
-          <p:cNvSpPr/>
-          <p:nvPr/>
-        </p:nvSpPr>
-        <p:spPr>
-          <a:xfrm>
-            <a:off x="7342982" y="4817864"/>
-            <a:ext cx="3972719" cy="914400"/>
-          </a:xfrm>
-          <a:prstGeom prst="rect">
-            <a:avLst/>
-          </a:prstGeom>
-          <a:noFill/>
-          <a:ln/>
-        </p:spPr>
-        <p:txBody>
-          <a:bodyPr wrap="square" lIns="0" tIns="0" rIns="0" bIns="0" rtlCol="0" anchor="t"/>
-          <a:lstStyle/>
-          <a:p>
-            <a:pPr>
-              <a:lnSpc>
-                <a:spcPts val="2400"/>
-              </a:lnSpc>
-            </a:pPr>
-            <a:r>
-              <a:rPr lang="en-US" sz="1600" dirty="0">
-                <a:solidFill>
-                  <a:srgbClr val="334155"/>
-                </a:solidFill>
-                <a:latin typeface="ui-sans-serif" pitchFamily="34" charset="0"/>
-                <a:ea typeface="ui-sans-serif" pitchFamily="34" charset="-122"/>
-                <a:cs typeface="ui-sans-serif" pitchFamily="34" charset="-120"/>
-              </a:rPr>
-              <a:t>Test how weather, special events, and operational workload improve planning accuracy.</a:t>
-            </a:r>
-            <a:endParaRPr lang="en-US" sz="1600" dirty="0"/>
+                <a:effectLst/>
+                <a:latin typeface="ui-sans-serif"/>
+              </a:rPr>
+              <a:t>Thank you.</a:t>
+            </a:r>
           </a:p>
         </p:txBody>
       </p:sp>
     </p:spTree>
+    <p:extLst>
+      <p:ext uri="{BB962C8B-B14F-4D97-AF65-F5344CB8AC3E}">
+        <p14:creationId xmlns:p14="http://schemas.microsoft.com/office/powerpoint/2010/main" val="1726875448"/>
+      </p:ext>
+    </p:extLst>
   </p:cSld>
   <p:clrMapOvr>
     <a:masterClrMapping/>
